--- a/slides/3.Math/Math.pptx
+++ b/slides/3.Math/Math.pptx
@@ -5,7 +5,7 @@
     <p:sldMasterId id="2147483672" r:id="rId1"/>
   </p:sldMasterIdLst>
   <p:notesMasterIdLst>
-    <p:notesMasterId r:id="rId14"/>
+    <p:notesMasterId r:id="rId16"/>
   </p:notesMasterIdLst>
   <p:sldIdLst>
     <p:sldId id="256" r:id="rId2"/>
@@ -19,27 +19,29 @@
     <p:sldId id="311" r:id="rId10"/>
     <p:sldId id="312" r:id="rId11"/>
     <p:sldId id="313" r:id="rId12"/>
-    <p:sldId id="314" r:id="rId13"/>
+    <p:sldId id="315" r:id="rId13"/>
+    <p:sldId id="314" r:id="rId14"/>
+    <p:sldId id="316" r:id="rId15"/>
   </p:sldIdLst>
   <p:sldSz cx="9144000" cy="5143500" type="screen16x9"/>
   <p:notesSz cx="6858000" cy="9144000"/>
   <p:embeddedFontLst>
     <p:embeddedFont>
       <p:font typeface="B Nazanin" panose="00000400000000000000" pitchFamily="2" charset="-78"/>
-      <p:regular r:id="rId15"/>
-      <p:bold r:id="rId16"/>
+      <p:regular r:id="rId17"/>
+      <p:bold r:id="rId18"/>
     </p:embeddedFont>
     <p:embeddedFont>
       <p:font typeface="Dana" panose="020B0604020202020204" charset="0"/>
-      <p:regular r:id="rId17"/>
-      <p:bold r:id="rId18"/>
-      <p:italic r:id="rId19"/>
-      <p:boldItalic r:id="rId20"/>
+      <p:regular r:id="rId19"/>
+      <p:bold r:id="rId20"/>
+      <p:italic r:id="rId21"/>
+      <p:boldItalic r:id="rId22"/>
     </p:embeddedFont>
     <p:embeddedFont>
       <p:font typeface="Fira Code" panose="020B0809050000020004" pitchFamily="49" charset="0"/>
-      <p:regular r:id="rId21"/>
-      <p:bold r:id="rId22"/>
+      <p:regular r:id="rId23"/>
+      <p:bold r:id="rId24"/>
     </p:embeddedFont>
   </p:embeddedFontLst>
   <p:defaultTextStyle>
@@ -1086,6 +1088,133 @@
         <p:cNvPr id="1" name="Shape 454">
           <a:extLst>
             <a:ext uri="{FF2B5EF4-FFF2-40B4-BE49-F238E27FC236}">
+              <a16:creationId xmlns:a16="http://schemas.microsoft.com/office/drawing/2014/main" id="{776CC841-B4FB-91BD-FDC9-7098BAFEBD6C}"/>
+            </a:ext>
+          </a:extLst>
+        </p:cNvPr>
+        <p:cNvGrpSpPr/>
+        <p:nvPr/>
+      </p:nvGrpSpPr>
+      <p:grpSpPr>
+        <a:xfrm>
+          <a:off x="0" y="0"/>
+          <a:ext cx="0" cy="0"/>
+          <a:chOff x="0" y="0"/>
+          <a:chExt cx="0" cy="0"/>
+        </a:xfrm>
+      </p:grpSpPr>
+      <p:sp>
+        <p:nvSpPr>
+          <p:cNvPr id="455" name="Google Shape;455;ge7b5133482_0_0:notes">
+            <a:extLst>
+              <a:ext uri="{FF2B5EF4-FFF2-40B4-BE49-F238E27FC236}">
+                <a16:creationId xmlns:a16="http://schemas.microsoft.com/office/drawing/2014/main" id="{512B93E5-B96F-2366-E1A8-DEAFD9A7A687}"/>
+              </a:ext>
+            </a:extLst>
+          </p:cNvPr>
+          <p:cNvSpPr>
+            <a:spLocks noGrp="1" noRot="1" noChangeAspect="1"/>
+          </p:cNvSpPr>
+          <p:nvPr>
+            <p:ph type="sldImg" idx="2"/>
+          </p:nvPr>
+        </p:nvSpPr>
+        <p:spPr>
+          <a:xfrm>
+            <a:off x="381000" y="685800"/>
+            <a:ext cx="6096000" cy="3429000"/>
+          </a:xfrm>
+          <a:custGeom>
+            <a:avLst/>
+            <a:gdLst/>
+            <a:ahLst/>
+            <a:cxnLst/>
+            <a:rect l="l" t="t" r="r" b="b"/>
+            <a:pathLst>
+              <a:path w="120000" h="120000" extrusionOk="0">
+                <a:moveTo>
+                  <a:pt x="0" y="0"/>
+                </a:moveTo>
+                <a:lnTo>
+                  <a:pt x="120000" y="0"/>
+                </a:lnTo>
+                <a:lnTo>
+                  <a:pt x="120000" y="120000"/>
+                </a:lnTo>
+                <a:lnTo>
+                  <a:pt x="0" y="120000"/>
+                </a:lnTo>
+                <a:close/>
+              </a:path>
+            </a:pathLst>
+          </a:custGeom>
+        </p:spPr>
+      </p:sp>
+      <p:sp>
+        <p:nvSpPr>
+          <p:cNvPr id="456" name="Google Shape;456;ge7b5133482_0_0:notes">
+            <a:extLst>
+              <a:ext uri="{FF2B5EF4-FFF2-40B4-BE49-F238E27FC236}">
+                <a16:creationId xmlns:a16="http://schemas.microsoft.com/office/drawing/2014/main" id="{904DE618-08B8-9CCB-C45C-F411ECBD9016}"/>
+              </a:ext>
+            </a:extLst>
+          </p:cNvPr>
+          <p:cNvSpPr txBox="1">
+            <a:spLocks noGrp="1"/>
+          </p:cNvSpPr>
+          <p:nvPr>
+            <p:ph type="body" idx="1"/>
+          </p:nvPr>
+        </p:nvSpPr>
+        <p:spPr>
+          <a:xfrm>
+            <a:off x="685800" y="4343400"/>
+            <a:ext cx="5486400" cy="4114800"/>
+          </a:xfrm>
+          <a:prstGeom prst="rect">
+            <a:avLst/>
+          </a:prstGeom>
+        </p:spPr>
+        <p:txBody>
+          <a:bodyPr spcFirstLastPara="1" wrap="square" lIns="91425" tIns="91425" rIns="91425" bIns="91425" anchor="t" anchorCtr="0">
+            <a:noAutofit/>
+          </a:bodyPr>
+          <a:lstStyle/>
+          <a:p>
+            <a:pPr marL="0" lvl="0" indent="0" algn="l" rtl="0">
+              <a:spcBef>
+                <a:spcPts val="0"/>
+              </a:spcBef>
+              <a:spcAft>
+                <a:spcPts val="0"/>
+              </a:spcAft>
+              <a:buNone/>
+            </a:pPr>
+            <a:endParaRPr dirty="0"/>
+          </a:p>
+        </p:txBody>
+      </p:sp>
+    </p:spTree>
+    <p:extLst>
+      <p:ext uri="{BB962C8B-B14F-4D97-AF65-F5344CB8AC3E}">
+        <p14:creationId xmlns:p14="http://schemas.microsoft.com/office/powerpoint/2010/main" val="3732529032"/>
+      </p:ext>
+    </p:extLst>
+  </p:cSld>
+  <p:clrMapOvr>
+    <a:masterClrMapping/>
+  </p:clrMapOvr>
+</p:notes>
+</file>
+
+<file path=ppt/notesSlides/notesSlide13.xml><?xml version="1.0" encoding="utf-8"?>
+<p:notes xmlns:a="http://schemas.openxmlformats.org/drawingml/2006/main" xmlns:r="http://schemas.openxmlformats.org/officeDocument/2006/relationships" xmlns:p="http://schemas.openxmlformats.org/presentationml/2006/main" showMasterSp="0" showMasterPhAnim="0">
+  <p:cSld>
+    <p:spTree>
+      <p:nvGrpSpPr>
+        <p:cNvPr id="1" name="Shape 454">
+          <a:extLst>
+            <a:ext uri="{FF2B5EF4-FFF2-40B4-BE49-F238E27FC236}">
               <a16:creationId xmlns:a16="http://schemas.microsoft.com/office/drawing/2014/main" id="{BB4E1877-3449-D108-AE14-C94B7BF4D609}"/>
             </a:ext>
           </a:extLst>
@@ -1196,6 +1325,133 @@
     <p:extLst>
       <p:ext uri="{BB962C8B-B14F-4D97-AF65-F5344CB8AC3E}">
         <p14:creationId xmlns:p14="http://schemas.microsoft.com/office/powerpoint/2010/main" val="1289347785"/>
+      </p:ext>
+    </p:extLst>
+  </p:cSld>
+  <p:clrMapOvr>
+    <a:masterClrMapping/>
+  </p:clrMapOvr>
+</p:notes>
+</file>
+
+<file path=ppt/notesSlides/notesSlide14.xml><?xml version="1.0" encoding="utf-8"?>
+<p:notes xmlns:a="http://schemas.openxmlformats.org/drawingml/2006/main" xmlns:r="http://schemas.openxmlformats.org/officeDocument/2006/relationships" xmlns:p="http://schemas.openxmlformats.org/presentationml/2006/main" showMasterSp="0" showMasterPhAnim="0">
+  <p:cSld>
+    <p:spTree>
+      <p:nvGrpSpPr>
+        <p:cNvPr id="1" name="Shape 454">
+          <a:extLst>
+            <a:ext uri="{FF2B5EF4-FFF2-40B4-BE49-F238E27FC236}">
+              <a16:creationId xmlns:a16="http://schemas.microsoft.com/office/drawing/2014/main" id="{A3E319A7-71A1-1334-70CA-C0F832B2D1CD}"/>
+            </a:ext>
+          </a:extLst>
+        </p:cNvPr>
+        <p:cNvGrpSpPr/>
+        <p:nvPr/>
+      </p:nvGrpSpPr>
+      <p:grpSpPr>
+        <a:xfrm>
+          <a:off x="0" y="0"/>
+          <a:ext cx="0" cy="0"/>
+          <a:chOff x="0" y="0"/>
+          <a:chExt cx="0" cy="0"/>
+        </a:xfrm>
+      </p:grpSpPr>
+      <p:sp>
+        <p:nvSpPr>
+          <p:cNvPr id="455" name="Google Shape;455;ge7b5133482_0_0:notes">
+            <a:extLst>
+              <a:ext uri="{FF2B5EF4-FFF2-40B4-BE49-F238E27FC236}">
+                <a16:creationId xmlns:a16="http://schemas.microsoft.com/office/drawing/2014/main" id="{ABA91C89-9D91-0602-626F-D06756924DFA}"/>
+              </a:ext>
+            </a:extLst>
+          </p:cNvPr>
+          <p:cNvSpPr>
+            <a:spLocks noGrp="1" noRot="1" noChangeAspect="1"/>
+          </p:cNvSpPr>
+          <p:nvPr>
+            <p:ph type="sldImg" idx="2"/>
+          </p:nvPr>
+        </p:nvSpPr>
+        <p:spPr>
+          <a:xfrm>
+            <a:off x="381000" y="685800"/>
+            <a:ext cx="6096000" cy="3429000"/>
+          </a:xfrm>
+          <a:custGeom>
+            <a:avLst/>
+            <a:gdLst/>
+            <a:ahLst/>
+            <a:cxnLst/>
+            <a:rect l="l" t="t" r="r" b="b"/>
+            <a:pathLst>
+              <a:path w="120000" h="120000" extrusionOk="0">
+                <a:moveTo>
+                  <a:pt x="0" y="0"/>
+                </a:moveTo>
+                <a:lnTo>
+                  <a:pt x="120000" y="0"/>
+                </a:lnTo>
+                <a:lnTo>
+                  <a:pt x="120000" y="120000"/>
+                </a:lnTo>
+                <a:lnTo>
+                  <a:pt x="0" y="120000"/>
+                </a:lnTo>
+                <a:close/>
+              </a:path>
+            </a:pathLst>
+          </a:custGeom>
+        </p:spPr>
+      </p:sp>
+      <p:sp>
+        <p:nvSpPr>
+          <p:cNvPr id="456" name="Google Shape;456;ge7b5133482_0_0:notes">
+            <a:extLst>
+              <a:ext uri="{FF2B5EF4-FFF2-40B4-BE49-F238E27FC236}">
+                <a16:creationId xmlns:a16="http://schemas.microsoft.com/office/drawing/2014/main" id="{7B1F8178-391D-CC6D-D2CB-6C035559DB61}"/>
+              </a:ext>
+            </a:extLst>
+          </p:cNvPr>
+          <p:cNvSpPr txBox="1">
+            <a:spLocks noGrp="1"/>
+          </p:cNvSpPr>
+          <p:nvPr>
+            <p:ph type="body" idx="1"/>
+          </p:nvPr>
+        </p:nvSpPr>
+        <p:spPr>
+          <a:xfrm>
+            <a:off x="685800" y="4343400"/>
+            <a:ext cx="5486400" cy="4114800"/>
+          </a:xfrm>
+          <a:prstGeom prst="rect">
+            <a:avLst/>
+          </a:prstGeom>
+        </p:spPr>
+        <p:txBody>
+          <a:bodyPr spcFirstLastPara="1" wrap="square" lIns="91425" tIns="91425" rIns="91425" bIns="91425" anchor="t" anchorCtr="0">
+            <a:noAutofit/>
+          </a:bodyPr>
+          <a:lstStyle/>
+          <a:p>
+            <a:pPr marL="0" lvl="0" indent="0" algn="l" rtl="0">
+              <a:spcBef>
+                <a:spcPts val="0"/>
+              </a:spcBef>
+              <a:spcAft>
+                <a:spcPts val="0"/>
+              </a:spcAft>
+              <a:buNone/>
+            </a:pPr>
+            <a:endParaRPr dirty="0"/>
+          </a:p>
+        </p:txBody>
+      </p:sp>
+    </p:spTree>
+    <p:extLst>
+      <p:ext uri="{BB962C8B-B14F-4D97-AF65-F5344CB8AC3E}">
+        <p14:creationId xmlns:p14="http://schemas.microsoft.com/office/powerpoint/2010/main" val="4156475703"/>
       </p:ext>
     </p:extLst>
   </p:cSld>
@@ -8636,6 +8892,1549 @@
         <p:cNvPr id="1" name="Shape 457">
           <a:extLst>
             <a:ext uri="{FF2B5EF4-FFF2-40B4-BE49-F238E27FC236}">
+              <a16:creationId xmlns:a16="http://schemas.microsoft.com/office/drawing/2014/main" id="{DEC8022C-5B58-6531-6FA5-19588A9BD199}"/>
+            </a:ext>
+          </a:extLst>
+        </p:cNvPr>
+        <p:cNvGrpSpPr/>
+        <p:nvPr/>
+      </p:nvGrpSpPr>
+      <p:grpSpPr>
+        <a:xfrm>
+          <a:off x="0" y="0"/>
+          <a:ext cx="0" cy="0"/>
+          <a:chOff x="0" y="0"/>
+          <a:chExt cx="0" cy="0"/>
+        </a:xfrm>
+      </p:grpSpPr>
+      <p:sp>
+        <p:nvSpPr>
+          <p:cNvPr id="465" name="Google Shape;465;p27">
+            <a:extLst>
+              <a:ext uri="{FF2B5EF4-FFF2-40B4-BE49-F238E27FC236}">
+                <a16:creationId xmlns:a16="http://schemas.microsoft.com/office/drawing/2014/main" id="{3D50D106-391E-A0EF-50F2-59E6B0AD3EAD}"/>
+              </a:ext>
+            </a:extLst>
+          </p:cNvPr>
+          <p:cNvSpPr txBox="1">
+            <a:spLocks noGrp="1"/>
+          </p:cNvSpPr>
+          <p:nvPr>
+            <p:ph type="subTitle" idx="1"/>
+          </p:nvPr>
+        </p:nvSpPr>
+        <p:spPr>
+          <a:xfrm>
+            <a:off x="4597685" y="84876"/>
+            <a:ext cx="4572000" cy="357300"/>
+          </a:xfrm>
+          <a:prstGeom prst="rect">
+            <a:avLst/>
+          </a:prstGeom>
+        </p:spPr>
+        <p:txBody>
+          <a:bodyPr spcFirstLastPara="1" wrap="square" lIns="91425" tIns="91425" rIns="91425" bIns="91425" anchor="ctr" anchorCtr="0">
+            <a:noAutofit/>
+          </a:bodyPr>
+          <a:lstStyle/>
+          <a:p>
+            <a:pPr marL="0" lvl="0" indent="0" algn="ctr" rtl="0">
+              <a:spcBef>
+                <a:spcPts val="0"/>
+              </a:spcBef>
+              <a:spcAft>
+                <a:spcPts val="0"/>
+              </a:spcAft>
+              <a:buNone/>
+            </a:pPr>
+            <a:r>
+              <a:rPr lang="en-US" sz="1000" dirty="0"/>
+              <a:t>Task3</a:t>
+            </a:r>
+            <a:endParaRPr sz="1000" dirty="0"/>
+          </a:p>
+        </p:txBody>
+      </p:sp>
+      <p:sp>
+        <p:nvSpPr>
+          <p:cNvPr id="12" name="AutoShape 4">
+            <a:extLst>
+              <a:ext uri="{FF2B5EF4-FFF2-40B4-BE49-F238E27FC236}">
+                <a16:creationId xmlns:a16="http://schemas.microsoft.com/office/drawing/2014/main" id="{577E11C7-4EE5-1131-5C1D-0403927A074B}"/>
+              </a:ext>
+            </a:extLst>
+          </p:cNvPr>
+          <p:cNvSpPr>
+            <a:spLocks noChangeAspect="1" noChangeArrowheads="1"/>
+          </p:cNvSpPr>
+          <p:nvPr/>
+        </p:nvSpPr>
+        <p:spPr bwMode="auto">
+          <a:xfrm>
+            <a:off x="4419600" y="2419350"/>
+            <a:ext cx="304800" cy="304800"/>
+          </a:xfrm>
+          <a:prstGeom prst="rect">
+            <a:avLst/>
+          </a:prstGeom>
+          <a:noFill/>
+          <a:extLst>
+            <a:ext uri="{909E8E84-426E-40DD-AFC4-6F175D3DCCD1}">
+              <a14:hiddenFill xmlns:a14="http://schemas.microsoft.com/office/drawing/2010/main">
+                <a:solidFill>
+                  <a:srgbClr val="FFFFFF"/>
+                </a:solidFill>
+              </a14:hiddenFill>
+            </a:ext>
+          </a:extLst>
+        </p:spPr>
+        <p:txBody>
+          <a:bodyPr vert="horz" wrap="square" lIns="91440" tIns="45720" rIns="91440" bIns="45720" numCol="1" anchor="t" anchorCtr="0" compatLnSpc="1">
+            <a:prstTxWarp prst="textNoShape">
+              <a:avLst/>
+            </a:prstTxWarp>
+          </a:bodyPr>
+          <a:lstStyle/>
+          <a:p>
+            <a:endParaRPr lang="en-US"/>
+          </a:p>
+        </p:txBody>
+      </p:sp>
+      <p:sp>
+        <p:nvSpPr>
+          <p:cNvPr id="14" name="Google Shape;814;p39">
+            <a:extLst>
+              <a:ext uri="{FF2B5EF4-FFF2-40B4-BE49-F238E27FC236}">
+                <a16:creationId xmlns:a16="http://schemas.microsoft.com/office/drawing/2014/main" id="{0ED210A6-E561-CA98-F4ED-1537F82AAD85}"/>
+              </a:ext>
+            </a:extLst>
+          </p:cNvPr>
+          <p:cNvSpPr txBox="1">
+            <a:spLocks/>
+          </p:cNvSpPr>
+          <p:nvPr/>
+        </p:nvSpPr>
+        <p:spPr>
+          <a:xfrm>
+            <a:off x="1005895" y="270175"/>
+            <a:ext cx="5877790" cy="974809"/>
+          </a:xfrm>
+          <a:prstGeom prst="rect">
+            <a:avLst/>
+          </a:prstGeom>
+          <a:noFill/>
+          <a:ln>
+            <a:noFill/>
+          </a:ln>
+        </p:spPr>
+        <p:txBody>
+          <a:bodyPr spcFirstLastPara="1" wrap="square" lIns="91425" tIns="91425" rIns="91425" bIns="91425" anchor="ctr" anchorCtr="0">
+            <a:noAutofit/>
+          </a:bodyPr>
+          <a:lstStyle>
+            <a:defPPr marR="0" lvl="0" algn="l" rtl="0">
+              <a:lnSpc>
+                <a:spcPct val="100000"/>
+              </a:lnSpc>
+              <a:spcBef>
+                <a:spcPts val="0"/>
+              </a:spcBef>
+              <a:spcAft>
+                <a:spcPts val="0"/>
+              </a:spcAft>
+            </a:defPPr>
+            <a:lvl1pPr marR="0" lvl="0" algn="l" rtl="0">
+              <a:lnSpc>
+                <a:spcPct val="100000"/>
+              </a:lnSpc>
+              <a:spcBef>
+                <a:spcPts val="0"/>
+              </a:spcBef>
+              <a:spcAft>
+                <a:spcPts val="0"/>
+              </a:spcAft>
+              <a:buClr>
+                <a:schemeClr val="lt1"/>
+              </a:buClr>
+              <a:buSzPts val="5200"/>
+              <a:buFont typeface="Fira Code"/>
+              <a:buNone/>
+              <a:defRPr sz="3000" b="0" i="0" u="none" strike="noStrike" cap="none">
+                <a:solidFill>
+                  <a:schemeClr val="lt1"/>
+                </a:solidFill>
+                <a:latin typeface="Fira Code"/>
+                <a:ea typeface="Fira Code"/>
+                <a:cs typeface="Fira Code"/>
+                <a:sym typeface="Fira Code"/>
+              </a:defRPr>
+            </a:lvl1pPr>
+            <a:lvl2pPr marR="0" lvl="1" algn="ctr" rtl="0">
+              <a:lnSpc>
+                <a:spcPct val="100000"/>
+              </a:lnSpc>
+              <a:spcBef>
+                <a:spcPts val="0"/>
+              </a:spcBef>
+              <a:spcAft>
+                <a:spcPts val="0"/>
+              </a:spcAft>
+              <a:buClr>
+                <a:schemeClr val="dk1"/>
+              </a:buClr>
+              <a:buSzPts val="5200"/>
+              <a:buFont typeface="Fira Code"/>
+              <a:buNone/>
+              <a:defRPr sz="5200" b="0" i="0" u="none" strike="noStrike" cap="none">
+                <a:solidFill>
+                  <a:schemeClr val="dk1"/>
+                </a:solidFill>
+                <a:latin typeface="Fira Code"/>
+                <a:ea typeface="Fira Code"/>
+                <a:cs typeface="Fira Code"/>
+                <a:sym typeface="Fira Code"/>
+              </a:defRPr>
+            </a:lvl2pPr>
+            <a:lvl3pPr marR="0" lvl="2" algn="ctr" rtl="0">
+              <a:lnSpc>
+                <a:spcPct val="100000"/>
+              </a:lnSpc>
+              <a:spcBef>
+                <a:spcPts val="0"/>
+              </a:spcBef>
+              <a:spcAft>
+                <a:spcPts val="0"/>
+              </a:spcAft>
+              <a:buClr>
+                <a:schemeClr val="dk1"/>
+              </a:buClr>
+              <a:buSzPts val="5200"/>
+              <a:buFont typeface="Fira Code"/>
+              <a:buNone/>
+              <a:defRPr sz="5200" b="0" i="0" u="none" strike="noStrike" cap="none">
+                <a:solidFill>
+                  <a:schemeClr val="dk1"/>
+                </a:solidFill>
+                <a:latin typeface="Fira Code"/>
+                <a:ea typeface="Fira Code"/>
+                <a:cs typeface="Fira Code"/>
+                <a:sym typeface="Fira Code"/>
+              </a:defRPr>
+            </a:lvl3pPr>
+            <a:lvl4pPr marR="0" lvl="3" algn="ctr" rtl="0">
+              <a:lnSpc>
+                <a:spcPct val="100000"/>
+              </a:lnSpc>
+              <a:spcBef>
+                <a:spcPts val="0"/>
+              </a:spcBef>
+              <a:spcAft>
+                <a:spcPts val="0"/>
+              </a:spcAft>
+              <a:buClr>
+                <a:schemeClr val="dk1"/>
+              </a:buClr>
+              <a:buSzPts val="5200"/>
+              <a:buFont typeface="Fira Code"/>
+              <a:buNone/>
+              <a:defRPr sz="5200" b="0" i="0" u="none" strike="noStrike" cap="none">
+                <a:solidFill>
+                  <a:schemeClr val="dk1"/>
+                </a:solidFill>
+                <a:latin typeface="Fira Code"/>
+                <a:ea typeface="Fira Code"/>
+                <a:cs typeface="Fira Code"/>
+                <a:sym typeface="Fira Code"/>
+              </a:defRPr>
+            </a:lvl4pPr>
+            <a:lvl5pPr marR="0" lvl="4" algn="ctr" rtl="0">
+              <a:lnSpc>
+                <a:spcPct val="100000"/>
+              </a:lnSpc>
+              <a:spcBef>
+                <a:spcPts val="0"/>
+              </a:spcBef>
+              <a:spcAft>
+                <a:spcPts val="0"/>
+              </a:spcAft>
+              <a:buClr>
+                <a:schemeClr val="dk1"/>
+              </a:buClr>
+              <a:buSzPts val="5200"/>
+              <a:buFont typeface="Fira Code"/>
+              <a:buNone/>
+              <a:defRPr sz="5200" b="0" i="0" u="none" strike="noStrike" cap="none">
+                <a:solidFill>
+                  <a:schemeClr val="dk1"/>
+                </a:solidFill>
+                <a:latin typeface="Fira Code"/>
+                <a:ea typeface="Fira Code"/>
+                <a:cs typeface="Fira Code"/>
+                <a:sym typeface="Fira Code"/>
+              </a:defRPr>
+            </a:lvl5pPr>
+            <a:lvl6pPr marR="0" lvl="5" algn="ctr" rtl="0">
+              <a:lnSpc>
+                <a:spcPct val="100000"/>
+              </a:lnSpc>
+              <a:spcBef>
+                <a:spcPts val="0"/>
+              </a:spcBef>
+              <a:spcAft>
+                <a:spcPts val="0"/>
+              </a:spcAft>
+              <a:buClr>
+                <a:schemeClr val="dk1"/>
+              </a:buClr>
+              <a:buSzPts val="5200"/>
+              <a:buFont typeface="Fira Code"/>
+              <a:buNone/>
+              <a:defRPr sz="5200" b="0" i="0" u="none" strike="noStrike" cap="none">
+                <a:solidFill>
+                  <a:schemeClr val="dk1"/>
+                </a:solidFill>
+                <a:latin typeface="Fira Code"/>
+                <a:ea typeface="Fira Code"/>
+                <a:cs typeface="Fira Code"/>
+                <a:sym typeface="Fira Code"/>
+              </a:defRPr>
+            </a:lvl6pPr>
+            <a:lvl7pPr marR="0" lvl="6" algn="ctr" rtl="0">
+              <a:lnSpc>
+                <a:spcPct val="100000"/>
+              </a:lnSpc>
+              <a:spcBef>
+                <a:spcPts val="0"/>
+              </a:spcBef>
+              <a:spcAft>
+                <a:spcPts val="0"/>
+              </a:spcAft>
+              <a:buClr>
+                <a:schemeClr val="dk1"/>
+              </a:buClr>
+              <a:buSzPts val="5200"/>
+              <a:buFont typeface="Fira Code"/>
+              <a:buNone/>
+              <a:defRPr sz="5200" b="0" i="0" u="none" strike="noStrike" cap="none">
+                <a:solidFill>
+                  <a:schemeClr val="dk1"/>
+                </a:solidFill>
+                <a:latin typeface="Fira Code"/>
+                <a:ea typeface="Fira Code"/>
+                <a:cs typeface="Fira Code"/>
+                <a:sym typeface="Fira Code"/>
+              </a:defRPr>
+            </a:lvl7pPr>
+            <a:lvl8pPr marR="0" lvl="7" algn="ctr" rtl="0">
+              <a:lnSpc>
+                <a:spcPct val="100000"/>
+              </a:lnSpc>
+              <a:spcBef>
+                <a:spcPts val="0"/>
+              </a:spcBef>
+              <a:spcAft>
+                <a:spcPts val="0"/>
+              </a:spcAft>
+              <a:buClr>
+                <a:schemeClr val="dk1"/>
+              </a:buClr>
+              <a:buSzPts val="5200"/>
+              <a:buFont typeface="Fira Code"/>
+              <a:buNone/>
+              <a:defRPr sz="5200" b="0" i="0" u="none" strike="noStrike" cap="none">
+                <a:solidFill>
+                  <a:schemeClr val="dk1"/>
+                </a:solidFill>
+                <a:latin typeface="Fira Code"/>
+                <a:ea typeface="Fira Code"/>
+                <a:cs typeface="Fira Code"/>
+                <a:sym typeface="Fira Code"/>
+              </a:defRPr>
+            </a:lvl8pPr>
+            <a:lvl9pPr marR="0" lvl="8" algn="ctr" rtl="0">
+              <a:lnSpc>
+                <a:spcPct val="100000"/>
+              </a:lnSpc>
+              <a:spcBef>
+                <a:spcPts val="0"/>
+              </a:spcBef>
+              <a:spcAft>
+                <a:spcPts val="0"/>
+              </a:spcAft>
+              <a:buClr>
+                <a:schemeClr val="dk1"/>
+              </a:buClr>
+              <a:buSzPts val="5200"/>
+              <a:buFont typeface="Fira Code"/>
+              <a:buNone/>
+              <a:defRPr sz="5200" b="0" i="0" u="none" strike="noStrike" cap="none">
+                <a:solidFill>
+                  <a:schemeClr val="dk1"/>
+                </a:solidFill>
+                <a:latin typeface="Fira Code"/>
+                <a:ea typeface="Fira Code"/>
+                <a:cs typeface="Fira Code"/>
+                <a:sym typeface="Fira Code"/>
+              </a:defRPr>
+            </a:lvl9pPr>
+          </a:lstStyle>
+          <a:p>
+            <a:r>
+              <a:rPr lang="en-US" sz="2400" dirty="0">
+                <a:solidFill>
+                  <a:schemeClr val="accent2"/>
+                </a:solidFill>
+              </a:rPr>
+              <a:t>Task</a:t>
+            </a:r>
+          </a:p>
+        </p:txBody>
+      </p:sp>
+      <p:sp>
+        <p:nvSpPr>
+          <p:cNvPr id="4" name="TextBox 3">
+            <a:extLst>
+              <a:ext uri="{FF2B5EF4-FFF2-40B4-BE49-F238E27FC236}">
+                <a16:creationId xmlns:a16="http://schemas.microsoft.com/office/drawing/2014/main" id="{CF8CCAFF-CB96-2117-8EAE-6A0B1B88164F}"/>
+              </a:ext>
+            </a:extLst>
+          </p:cNvPr>
+          <p:cNvSpPr txBox="1"/>
+          <p:nvPr/>
+        </p:nvSpPr>
+        <p:spPr>
+          <a:xfrm>
+            <a:off x="1149230" y="1191390"/>
+            <a:ext cx="7606764" cy="2292935"/>
+          </a:xfrm>
+          <a:prstGeom prst="rect">
+            <a:avLst/>
+          </a:prstGeom>
+          <a:noFill/>
+        </p:spPr>
+        <p:txBody>
+          <a:bodyPr wrap="square">
+            <a:spAutoFit/>
+          </a:bodyPr>
+          <a:lstStyle/>
+          <a:p>
+            <a:r>
+              <a:rPr lang="en-US" sz="1100" dirty="0">
+                <a:solidFill>
+                  <a:schemeClr val="accent3"/>
+                </a:solidFill>
+                <a:latin typeface="Fira Code"/>
+                <a:ea typeface="Fira Code"/>
+                <a:cs typeface="B Nazanin" panose="00000400000000000000" pitchFamily="2" charset="-78"/>
+              </a:rPr>
+              <a:t>1. Write a program that generates 5 random numbers every time it runs?</a:t>
+            </a:r>
+          </a:p>
+          <a:p>
+            <a:pPr marL="228600" indent="-228600">
+              <a:buAutoNum type="arabicPeriod"/>
+            </a:pPr>
+            <a:endParaRPr lang="en-US" sz="1100" dirty="0">
+              <a:solidFill>
+                <a:schemeClr val="accent3"/>
+              </a:solidFill>
+              <a:latin typeface="Fira Code"/>
+              <a:ea typeface="Fira Code"/>
+              <a:cs typeface="B Nazanin" panose="00000400000000000000" pitchFamily="2" charset="-78"/>
+            </a:endParaRPr>
+          </a:p>
+          <a:p>
+            <a:endParaRPr lang="en-US" sz="1100" dirty="0">
+              <a:solidFill>
+                <a:schemeClr val="accent3"/>
+              </a:solidFill>
+              <a:latin typeface="Fira Code"/>
+              <a:ea typeface="Fira Code"/>
+              <a:cs typeface="B Nazanin" panose="00000400000000000000" pitchFamily="2" charset="-78"/>
+            </a:endParaRPr>
+          </a:p>
+          <a:p>
+            <a:r>
+              <a:rPr lang="en-US" altLang="en-US" sz="1100" dirty="0">
+                <a:solidFill>
+                  <a:schemeClr val="accent3"/>
+                </a:solidFill>
+                <a:latin typeface="Fira Code"/>
+                <a:ea typeface="Fira Code"/>
+                <a:cs typeface="B Nazanin" panose="00000400000000000000" pitchFamily="2" charset="-78"/>
+              </a:rPr>
+              <a:t>2. </a:t>
+            </a:r>
+            <a:r>
+              <a:rPr lang="en-US" sz="1100" dirty="0">
+                <a:solidFill>
+                  <a:schemeClr val="accent3"/>
+                </a:solidFill>
+                <a:latin typeface="Fira Code"/>
+                <a:ea typeface="Fira Code"/>
+                <a:cs typeface="B Nazanin" panose="00000400000000000000" pitchFamily="2" charset="-78"/>
+              </a:rPr>
+              <a:t>Why does the output become the same every time the program runs?</a:t>
+            </a:r>
+            <a:endParaRPr lang="fa-IR" sz="1100" dirty="0">
+              <a:solidFill>
+                <a:schemeClr val="accent3"/>
+              </a:solidFill>
+              <a:latin typeface="Fira Code"/>
+              <a:ea typeface="Fira Code"/>
+              <a:cs typeface="B Nazanin" panose="00000400000000000000" pitchFamily="2" charset="-78"/>
+            </a:endParaRPr>
+          </a:p>
+          <a:p>
+            <a:endParaRPr lang="en-US" altLang="en-US" sz="1100" dirty="0">
+              <a:solidFill>
+                <a:schemeClr val="accent3"/>
+              </a:solidFill>
+              <a:latin typeface="Fira Code"/>
+              <a:ea typeface="Fira Code"/>
+              <a:cs typeface="B Nazanin" panose="00000400000000000000" pitchFamily="2" charset="-78"/>
+            </a:endParaRPr>
+          </a:p>
+          <a:p>
+            <a:pPr marL="228600" indent="-228600">
+              <a:buAutoNum type="arabicPeriod"/>
+            </a:pPr>
+            <a:endParaRPr lang="en-US" sz="1100" dirty="0">
+              <a:solidFill>
+                <a:schemeClr val="accent3"/>
+              </a:solidFill>
+              <a:latin typeface="Fira Code"/>
+              <a:ea typeface="Fira Code"/>
+              <a:cs typeface="B Nazanin" panose="00000400000000000000" pitchFamily="2" charset="-78"/>
+            </a:endParaRPr>
+          </a:p>
+          <a:p>
+            <a:r>
+              <a:rPr lang="en-US" sz="1100" dirty="0">
+                <a:solidFill>
+                  <a:schemeClr val="accent3"/>
+                </a:solidFill>
+                <a:latin typeface="Fira Code"/>
+                <a:ea typeface="Fira Code"/>
+                <a:cs typeface="B Nazanin" panose="00000400000000000000" pitchFamily="2" charset="-78"/>
+              </a:rPr>
+              <a:t>3. Use </a:t>
+            </a:r>
+            <a:r>
+              <a:rPr lang="en-US" sz="1100" b="1" dirty="0" err="1">
+                <a:solidFill>
+                  <a:schemeClr val="accent3"/>
+                </a:solidFill>
+                <a:latin typeface="Fira Code"/>
+                <a:ea typeface="Fira Code"/>
+                <a:cs typeface="B Nazanin" panose="00000400000000000000" pitchFamily="2" charset="-78"/>
+              </a:rPr>
+              <a:t>srand</a:t>
+            </a:r>
+            <a:r>
+              <a:rPr lang="en-US" sz="1100" dirty="0">
+                <a:solidFill>
+                  <a:schemeClr val="accent3"/>
+                </a:solidFill>
+                <a:latin typeface="Fira Code"/>
+                <a:ea typeface="Fira Code"/>
+                <a:cs typeface="B Nazanin" panose="00000400000000000000" pitchFamily="2" charset="-78"/>
+              </a:rPr>
+              <a:t> and run the program again.</a:t>
+            </a:r>
+          </a:p>
+          <a:p>
+            <a:endParaRPr lang="fa-IR" sz="1100" dirty="0">
+              <a:solidFill>
+                <a:schemeClr val="accent3"/>
+              </a:solidFill>
+              <a:latin typeface="Fira Code"/>
+              <a:ea typeface="Fira Code"/>
+              <a:cs typeface="B Nazanin" panose="00000400000000000000" pitchFamily="2" charset="-78"/>
+            </a:endParaRPr>
+          </a:p>
+          <a:p>
+            <a:endParaRPr lang="fa-IR" sz="1100" dirty="0">
+              <a:solidFill>
+                <a:schemeClr val="accent3"/>
+              </a:solidFill>
+              <a:latin typeface="Fira Code"/>
+              <a:ea typeface="Fira Code"/>
+              <a:cs typeface="B Nazanin" panose="00000400000000000000" pitchFamily="2" charset="-78"/>
+            </a:endParaRPr>
+          </a:p>
+          <a:p>
+            <a:r>
+              <a:rPr lang="en-US" sz="1100" dirty="0">
+                <a:solidFill>
+                  <a:schemeClr val="accent3"/>
+                </a:solidFill>
+                <a:latin typeface="Fira Code"/>
+                <a:ea typeface="Fira Code"/>
+                <a:cs typeface="B Nazanin" panose="00000400000000000000" pitchFamily="2" charset="-78"/>
+              </a:rPr>
+              <a:t>4. </a:t>
+            </a:r>
+            <a:r>
+              <a:rPr lang="en-US" altLang="en-US" sz="1100" dirty="0">
+                <a:solidFill>
+                  <a:schemeClr val="accent3"/>
+                </a:solidFill>
+                <a:latin typeface="Fira Code"/>
+                <a:ea typeface="Fira Code"/>
+                <a:cs typeface="B Nazanin" panose="00000400000000000000" pitchFamily="2" charset="-78"/>
+              </a:rPr>
+              <a:t>Write a program that generates a random number between 0 and 100.</a:t>
+            </a:r>
+          </a:p>
+          <a:p>
+            <a:endParaRPr lang="en-US" sz="1100" dirty="0">
+              <a:solidFill>
+                <a:schemeClr val="accent3"/>
+              </a:solidFill>
+              <a:latin typeface="Fira Code"/>
+              <a:ea typeface="Fira Code"/>
+              <a:cs typeface="B Nazanin" panose="00000400000000000000" pitchFamily="2" charset="-78"/>
+            </a:endParaRPr>
+          </a:p>
+          <a:p>
+            <a:pPr marL="228600" indent="-228600">
+              <a:buAutoNum type="arabicPeriod"/>
+            </a:pPr>
+            <a:endParaRPr lang="en-US" sz="1100" dirty="0">
+              <a:solidFill>
+                <a:schemeClr val="accent3"/>
+              </a:solidFill>
+              <a:latin typeface="Fira Code"/>
+              <a:ea typeface="Fira Code"/>
+              <a:cs typeface="B Nazanin" panose="00000400000000000000" pitchFamily="2" charset="-78"/>
+            </a:endParaRPr>
+          </a:p>
+          <a:p>
+            <a:r>
+              <a:rPr lang="en-US" sz="1100" dirty="0">
+                <a:solidFill>
+                  <a:schemeClr val="accent3"/>
+                </a:solidFill>
+                <a:latin typeface="Fira Code"/>
+                <a:ea typeface="Fira Code"/>
+                <a:cs typeface="B Nazanin" panose="00000400000000000000" pitchFamily="2" charset="-78"/>
+              </a:rPr>
+              <a:t> </a:t>
+            </a:r>
+            <a:endParaRPr lang="fa-IR" sz="1100" dirty="0">
+              <a:solidFill>
+                <a:schemeClr val="accent3"/>
+              </a:solidFill>
+              <a:latin typeface="Fira Code"/>
+              <a:ea typeface="Fira Code"/>
+              <a:cs typeface="B Nazanin" panose="00000400000000000000" pitchFamily="2" charset="-78"/>
+            </a:endParaRPr>
+          </a:p>
+        </p:txBody>
+      </p:sp>
+      <p:sp>
+        <p:nvSpPr>
+          <p:cNvPr id="6" name="Google Shape;473;p28">
+            <a:extLst>
+              <a:ext uri="{FF2B5EF4-FFF2-40B4-BE49-F238E27FC236}">
+                <a16:creationId xmlns:a16="http://schemas.microsoft.com/office/drawing/2014/main" id="{AC6E8023-247A-6FFF-2BF8-E96108158969}"/>
+              </a:ext>
+            </a:extLst>
+          </p:cNvPr>
+          <p:cNvSpPr txBox="1">
+            <a:spLocks/>
+          </p:cNvSpPr>
+          <p:nvPr/>
+        </p:nvSpPr>
+        <p:spPr>
+          <a:xfrm>
+            <a:off x="729503" y="4701324"/>
+            <a:ext cx="4865100" cy="357300"/>
+          </a:xfrm>
+          <a:prstGeom prst="rect">
+            <a:avLst/>
+          </a:prstGeom>
+          <a:noFill/>
+          <a:ln>
+            <a:noFill/>
+          </a:ln>
+        </p:spPr>
+        <p:txBody>
+          <a:bodyPr spcFirstLastPara="1" wrap="square" lIns="91425" tIns="91425" rIns="91425" bIns="91425" anchor="ctr" anchorCtr="0">
+            <a:noAutofit/>
+          </a:bodyPr>
+          <a:lstStyle>
+            <a:defPPr marR="0" lvl="0" algn="l" rtl="0">
+              <a:lnSpc>
+                <a:spcPct val="100000"/>
+              </a:lnSpc>
+              <a:spcBef>
+                <a:spcPts val="0"/>
+              </a:spcBef>
+              <a:spcAft>
+                <a:spcPts val="0"/>
+              </a:spcAft>
+            </a:defPPr>
+            <a:lvl1pPr marL="457200" marR="0" lvl="0" indent="-317500" algn="l" rtl="0">
+              <a:lnSpc>
+                <a:spcPct val="100000"/>
+              </a:lnSpc>
+              <a:spcBef>
+                <a:spcPts val="0"/>
+              </a:spcBef>
+              <a:spcAft>
+                <a:spcPts val="0"/>
+              </a:spcAft>
+              <a:buClr>
+                <a:schemeClr val="dk2"/>
+              </a:buClr>
+              <a:buSzPts val="1400"/>
+              <a:buFont typeface="Fira Code"/>
+              <a:buChar char="●"/>
+              <a:defRPr sz="1400" b="0" i="0" u="none" strike="noStrike" cap="none">
+                <a:solidFill>
+                  <a:schemeClr val="dk2"/>
+                </a:solidFill>
+                <a:latin typeface="Fira Code"/>
+                <a:ea typeface="Fira Code"/>
+                <a:cs typeface="Fira Code"/>
+                <a:sym typeface="Fira Code"/>
+              </a:defRPr>
+            </a:lvl1pPr>
+            <a:lvl2pPr marL="914400" marR="0" lvl="1" indent="-317500" algn="l" rtl="0">
+              <a:lnSpc>
+                <a:spcPct val="100000"/>
+              </a:lnSpc>
+              <a:spcBef>
+                <a:spcPts val="0"/>
+              </a:spcBef>
+              <a:spcAft>
+                <a:spcPts val="0"/>
+              </a:spcAft>
+              <a:buClr>
+                <a:schemeClr val="dk2"/>
+              </a:buClr>
+              <a:buSzPts val="1400"/>
+              <a:buFont typeface="Fira Code"/>
+              <a:buChar char="○"/>
+              <a:defRPr sz="1400" b="0" i="0" u="none" strike="noStrike" cap="none">
+                <a:solidFill>
+                  <a:schemeClr val="dk2"/>
+                </a:solidFill>
+                <a:latin typeface="Fira Code"/>
+                <a:ea typeface="Fira Code"/>
+                <a:cs typeface="Fira Code"/>
+                <a:sym typeface="Fira Code"/>
+              </a:defRPr>
+            </a:lvl2pPr>
+            <a:lvl3pPr marL="1371600" marR="0" lvl="2" indent="-317500" algn="l" rtl="0">
+              <a:lnSpc>
+                <a:spcPct val="100000"/>
+              </a:lnSpc>
+              <a:spcBef>
+                <a:spcPts val="0"/>
+              </a:spcBef>
+              <a:spcAft>
+                <a:spcPts val="0"/>
+              </a:spcAft>
+              <a:buClr>
+                <a:schemeClr val="dk2"/>
+              </a:buClr>
+              <a:buSzPts val="1400"/>
+              <a:buFont typeface="Fira Code"/>
+              <a:buChar char="■"/>
+              <a:defRPr sz="1400" b="0" i="0" u="none" strike="noStrike" cap="none">
+                <a:solidFill>
+                  <a:schemeClr val="dk2"/>
+                </a:solidFill>
+                <a:latin typeface="Fira Code"/>
+                <a:ea typeface="Fira Code"/>
+                <a:cs typeface="Fira Code"/>
+                <a:sym typeface="Fira Code"/>
+              </a:defRPr>
+            </a:lvl3pPr>
+            <a:lvl4pPr marL="1828800" marR="0" lvl="3" indent="-317500" algn="l" rtl="0">
+              <a:lnSpc>
+                <a:spcPct val="100000"/>
+              </a:lnSpc>
+              <a:spcBef>
+                <a:spcPts val="0"/>
+              </a:spcBef>
+              <a:spcAft>
+                <a:spcPts val="0"/>
+              </a:spcAft>
+              <a:buClr>
+                <a:schemeClr val="dk2"/>
+              </a:buClr>
+              <a:buSzPts val="1400"/>
+              <a:buFont typeface="Fira Code"/>
+              <a:buChar char="●"/>
+              <a:defRPr sz="1400" b="0" i="0" u="none" strike="noStrike" cap="none">
+                <a:solidFill>
+                  <a:schemeClr val="dk2"/>
+                </a:solidFill>
+                <a:latin typeface="Fira Code"/>
+                <a:ea typeface="Fira Code"/>
+                <a:cs typeface="Fira Code"/>
+                <a:sym typeface="Fira Code"/>
+              </a:defRPr>
+            </a:lvl4pPr>
+            <a:lvl5pPr marL="2286000" marR="0" lvl="4" indent="-317500" algn="l" rtl="0">
+              <a:lnSpc>
+                <a:spcPct val="100000"/>
+              </a:lnSpc>
+              <a:spcBef>
+                <a:spcPts val="0"/>
+              </a:spcBef>
+              <a:spcAft>
+                <a:spcPts val="0"/>
+              </a:spcAft>
+              <a:buClr>
+                <a:schemeClr val="dk2"/>
+              </a:buClr>
+              <a:buSzPts val="1400"/>
+              <a:buFont typeface="Fira Code"/>
+              <a:buChar char="○"/>
+              <a:defRPr sz="1400" b="0" i="0" u="none" strike="noStrike" cap="none">
+                <a:solidFill>
+                  <a:schemeClr val="dk2"/>
+                </a:solidFill>
+                <a:latin typeface="Fira Code"/>
+                <a:ea typeface="Fira Code"/>
+                <a:cs typeface="Fira Code"/>
+                <a:sym typeface="Fira Code"/>
+              </a:defRPr>
+            </a:lvl5pPr>
+            <a:lvl6pPr marL="2743200" marR="0" lvl="5" indent="-317500" algn="l" rtl="0">
+              <a:lnSpc>
+                <a:spcPct val="100000"/>
+              </a:lnSpc>
+              <a:spcBef>
+                <a:spcPts val="0"/>
+              </a:spcBef>
+              <a:spcAft>
+                <a:spcPts val="0"/>
+              </a:spcAft>
+              <a:buClr>
+                <a:schemeClr val="dk2"/>
+              </a:buClr>
+              <a:buSzPts val="1400"/>
+              <a:buFont typeface="Fira Code"/>
+              <a:buChar char="■"/>
+              <a:defRPr sz="1400" b="0" i="0" u="none" strike="noStrike" cap="none">
+                <a:solidFill>
+                  <a:schemeClr val="dk2"/>
+                </a:solidFill>
+                <a:latin typeface="Fira Code"/>
+                <a:ea typeface="Fira Code"/>
+                <a:cs typeface="Fira Code"/>
+                <a:sym typeface="Fira Code"/>
+              </a:defRPr>
+            </a:lvl6pPr>
+            <a:lvl7pPr marL="3200400" marR="0" lvl="6" indent="-317500" algn="l" rtl="0">
+              <a:lnSpc>
+                <a:spcPct val="100000"/>
+              </a:lnSpc>
+              <a:spcBef>
+                <a:spcPts val="0"/>
+              </a:spcBef>
+              <a:spcAft>
+                <a:spcPts val="0"/>
+              </a:spcAft>
+              <a:buClr>
+                <a:schemeClr val="dk2"/>
+              </a:buClr>
+              <a:buSzPts val="1400"/>
+              <a:buFont typeface="Fira Code"/>
+              <a:buChar char="●"/>
+              <a:defRPr sz="1400" b="0" i="0" u="none" strike="noStrike" cap="none">
+                <a:solidFill>
+                  <a:schemeClr val="dk2"/>
+                </a:solidFill>
+                <a:latin typeface="Fira Code"/>
+                <a:ea typeface="Fira Code"/>
+                <a:cs typeface="Fira Code"/>
+                <a:sym typeface="Fira Code"/>
+              </a:defRPr>
+            </a:lvl7pPr>
+            <a:lvl8pPr marL="3657600" marR="0" lvl="7" indent="-317500" algn="l" rtl="0">
+              <a:lnSpc>
+                <a:spcPct val="100000"/>
+              </a:lnSpc>
+              <a:spcBef>
+                <a:spcPts val="0"/>
+              </a:spcBef>
+              <a:spcAft>
+                <a:spcPts val="0"/>
+              </a:spcAft>
+              <a:buClr>
+                <a:schemeClr val="dk2"/>
+              </a:buClr>
+              <a:buSzPts val="1400"/>
+              <a:buFont typeface="Fira Code"/>
+              <a:buChar char="○"/>
+              <a:defRPr sz="1400" b="0" i="0" u="none" strike="noStrike" cap="none">
+                <a:solidFill>
+                  <a:schemeClr val="dk2"/>
+                </a:solidFill>
+                <a:latin typeface="Fira Code"/>
+                <a:ea typeface="Fira Code"/>
+                <a:cs typeface="Fira Code"/>
+                <a:sym typeface="Fira Code"/>
+              </a:defRPr>
+            </a:lvl8pPr>
+            <a:lvl9pPr marL="4114800" marR="0" lvl="8" indent="-317500" algn="l" rtl="0">
+              <a:lnSpc>
+                <a:spcPct val="100000"/>
+              </a:lnSpc>
+              <a:spcBef>
+                <a:spcPts val="0"/>
+              </a:spcBef>
+              <a:spcAft>
+                <a:spcPts val="0"/>
+              </a:spcAft>
+              <a:buClr>
+                <a:schemeClr val="dk2"/>
+              </a:buClr>
+              <a:buSzPts val="1400"/>
+              <a:buFont typeface="Fira Code"/>
+              <a:buChar char="■"/>
+              <a:defRPr sz="1400" b="0" i="0" u="none" strike="noStrike" cap="none">
+                <a:solidFill>
+                  <a:schemeClr val="dk2"/>
+                </a:solidFill>
+                <a:latin typeface="Fira Code"/>
+                <a:ea typeface="Fira Code"/>
+                <a:cs typeface="Fira Code"/>
+                <a:sym typeface="Fira Code"/>
+              </a:defRPr>
+            </a:lvl9pPr>
+          </a:lstStyle>
+          <a:p>
+            <a:pPr marL="0" indent="0">
+              <a:buFont typeface="Fira Code"/>
+              <a:buNone/>
+            </a:pPr>
+            <a:r>
+              <a:rPr lang="en-US" dirty="0">
+                <a:solidFill>
+                  <a:schemeClr val="accent3"/>
+                </a:solidFill>
+              </a:rPr>
+              <a:t>Programming Language Lab</a:t>
+            </a:r>
+          </a:p>
+        </p:txBody>
+      </p:sp>
+      <p:sp>
+        <p:nvSpPr>
+          <p:cNvPr id="7" name="Google Shape;473;p28">
+            <a:extLst>
+              <a:ext uri="{FF2B5EF4-FFF2-40B4-BE49-F238E27FC236}">
+                <a16:creationId xmlns:a16="http://schemas.microsoft.com/office/drawing/2014/main" id="{EFD90008-5A1F-E858-9BB0-5B8F4866121E}"/>
+              </a:ext>
+            </a:extLst>
+          </p:cNvPr>
+          <p:cNvSpPr txBox="1">
+            <a:spLocks/>
+          </p:cNvSpPr>
+          <p:nvPr/>
+        </p:nvSpPr>
+        <p:spPr>
+          <a:xfrm>
+            <a:off x="8433851" y="4694675"/>
+            <a:ext cx="438300" cy="357300"/>
+          </a:xfrm>
+          <a:prstGeom prst="rect">
+            <a:avLst/>
+          </a:prstGeom>
+          <a:noFill/>
+          <a:ln>
+            <a:noFill/>
+          </a:ln>
+        </p:spPr>
+        <p:txBody>
+          <a:bodyPr spcFirstLastPara="1" wrap="square" lIns="91425" tIns="91425" rIns="91425" bIns="91425" anchor="ctr" anchorCtr="0">
+            <a:noAutofit/>
+          </a:bodyPr>
+          <a:lstStyle>
+            <a:defPPr marR="0" lvl="0" algn="l" rtl="0">
+              <a:lnSpc>
+                <a:spcPct val="100000"/>
+              </a:lnSpc>
+              <a:spcBef>
+                <a:spcPts val="0"/>
+              </a:spcBef>
+              <a:spcAft>
+                <a:spcPts val="0"/>
+              </a:spcAft>
+            </a:defPPr>
+            <a:lvl1pPr marL="457200" marR="0" lvl="0" indent="-317500" algn="l" rtl="0">
+              <a:lnSpc>
+                <a:spcPct val="100000"/>
+              </a:lnSpc>
+              <a:spcBef>
+                <a:spcPts val="0"/>
+              </a:spcBef>
+              <a:spcAft>
+                <a:spcPts val="0"/>
+              </a:spcAft>
+              <a:buClr>
+                <a:schemeClr val="dk2"/>
+              </a:buClr>
+              <a:buSzPts val="1400"/>
+              <a:buFont typeface="Fira Code"/>
+              <a:buChar char="●"/>
+              <a:defRPr sz="1400" b="0" i="0" u="none" strike="noStrike" cap="none">
+                <a:solidFill>
+                  <a:schemeClr val="dk2"/>
+                </a:solidFill>
+                <a:latin typeface="Fira Code"/>
+                <a:ea typeface="Fira Code"/>
+                <a:cs typeface="Fira Code"/>
+                <a:sym typeface="Fira Code"/>
+              </a:defRPr>
+            </a:lvl1pPr>
+            <a:lvl2pPr marL="914400" marR="0" lvl="1" indent="-317500" algn="l" rtl="0">
+              <a:lnSpc>
+                <a:spcPct val="100000"/>
+              </a:lnSpc>
+              <a:spcBef>
+                <a:spcPts val="0"/>
+              </a:spcBef>
+              <a:spcAft>
+                <a:spcPts val="0"/>
+              </a:spcAft>
+              <a:buClr>
+                <a:schemeClr val="dk2"/>
+              </a:buClr>
+              <a:buSzPts val="1400"/>
+              <a:buFont typeface="Fira Code"/>
+              <a:buChar char="○"/>
+              <a:defRPr sz="1400" b="0" i="0" u="none" strike="noStrike" cap="none">
+                <a:solidFill>
+                  <a:schemeClr val="dk2"/>
+                </a:solidFill>
+                <a:latin typeface="Fira Code"/>
+                <a:ea typeface="Fira Code"/>
+                <a:cs typeface="Fira Code"/>
+                <a:sym typeface="Fira Code"/>
+              </a:defRPr>
+            </a:lvl2pPr>
+            <a:lvl3pPr marL="1371600" marR="0" lvl="2" indent="-317500" algn="l" rtl="0">
+              <a:lnSpc>
+                <a:spcPct val="100000"/>
+              </a:lnSpc>
+              <a:spcBef>
+                <a:spcPts val="0"/>
+              </a:spcBef>
+              <a:spcAft>
+                <a:spcPts val="0"/>
+              </a:spcAft>
+              <a:buClr>
+                <a:schemeClr val="dk2"/>
+              </a:buClr>
+              <a:buSzPts val="1400"/>
+              <a:buFont typeface="Fira Code"/>
+              <a:buChar char="■"/>
+              <a:defRPr sz="1400" b="0" i="0" u="none" strike="noStrike" cap="none">
+                <a:solidFill>
+                  <a:schemeClr val="dk2"/>
+                </a:solidFill>
+                <a:latin typeface="Fira Code"/>
+                <a:ea typeface="Fira Code"/>
+                <a:cs typeface="Fira Code"/>
+                <a:sym typeface="Fira Code"/>
+              </a:defRPr>
+            </a:lvl3pPr>
+            <a:lvl4pPr marL="1828800" marR="0" lvl="3" indent="-317500" algn="l" rtl="0">
+              <a:lnSpc>
+                <a:spcPct val="100000"/>
+              </a:lnSpc>
+              <a:spcBef>
+                <a:spcPts val="0"/>
+              </a:spcBef>
+              <a:spcAft>
+                <a:spcPts val="0"/>
+              </a:spcAft>
+              <a:buClr>
+                <a:schemeClr val="dk2"/>
+              </a:buClr>
+              <a:buSzPts val="1400"/>
+              <a:buFont typeface="Fira Code"/>
+              <a:buChar char="●"/>
+              <a:defRPr sz="1400" b="0" i="0" u="none" strike="noStrike" cap="none">
+                <a:solidFill>
+                  <a:schemeClr val="dk2"/>
+                </a:solidFill>
+                <a:latin typeface="Fira Code"/>
+                <a:ea typeface="Fira Code"/>
+                <a:cs typeface="Fira Code"/>
+                <a:sym typeface="Fira Code"/>
+              </a:defRPr>
+            </a:lvl4pPr>
+            <a:lvl5pPr marL="2286000" marR="0" lvl="4" indent="-317500" algn="l" rtl="0">
+              <a:lnSpc>
+                <a:spcPct val="100000"/>
+              </a:lnSpc>
+              <a:spcBef>
+                <a:spcPts val="0"/>
+              </a:spcBef>
+              <a:spcAft>
+                <a:spcPts val="0"/>
+              </a:spcAft>
+              <a:buClr>
+                <a:schemeClr val="dk2"/>
+              </a:buClr>
+              <a:buSzPts val="1400"/>
+              <a:buFont typeface="Fira Code"/>
+              <a:buChar char="○"/>
+              <a:defRPr sz="1400" b="0" i="0" u="none" strike="noStrike" cap="none">
+                <a:solidFill>
+                  <a:schemeClr val="dk2"/>
+                </a:solidFill>
+                <a:latin typeface="Fira Code"/>
+                <a:ea typeface="Fira Code"/>
+                <a:cs typeface="Fira Code"/>
+                <a:sym typeface="Fira Code"/>
+              </a:defRPr>
+            </a:lvl5pPr>
+            <a:lvl6pPr marL="2743200" marR="0" lvl="5" indent="-317500" algn="l" rtl="0">
+              <a:lnSpc>
+                <a:spcPct val="100000"/>
+              </a:lnSpc>
+              <a:spcBef>
+                <a:spcPts val="0"/>
+              </a:spcBef>
+              <a:spcAft>
+                <a:spcPts val="0"/>
+              </a:spcAft>
+              <a:buClr>
+                <a:schemeClr val="dk2"/>
+              </a:buClr>
+              <a:buSzPts val="1400"/>
+              <a:buFont typeface="Fira Code"/>
+              <a:buChar char="■"/>
+              <a:defRPr sz="1400" b="0" i="0" u="none" strike="noStrike" cap="none">
+                <a:solidFill>
+                  <a:schemeClr val="dk2"/>
+                </a:solidFill>
+                <a:latin typeface="Fira Code"/>
+                <a:ea typeface="Fira Code"/>
+                <a:cs typeface="Fira Code"/>
+                <a:sym typeface="Fira Code"/>
+              </a:defRPr>
+            </a:lvl6pPr>
+            <a:lvl7pPr marL="3200400" marR="0" lvl="6" indent="-317500" algn="l" rtl="0">
+              <a:lnSpc>
+                <a:spcPct val="100000"/>
+              </a:lnSpc>
+              <a:spcBef>
+                <a:spcPts val="0"/>
+              </a:spcBef>
+              <a:spcAft>
+                <a:spcPts val="0"/>
+              </a:spcAft>
+              <a:buClr>
+                <a:schemeClr val="dk2"/>
+              </a:buClr>
+              <a:buSzPts val="1400"/>
+              <a:buFont typeface="Fira Code"/>
+              <a:buChar char="●"/>
+              <a:defRPr sz="1400" b="0" i="0" u="none" strike="noStrike" cap="none">
+                <a:solidFill>
+                  <a:schemeClr val="dk2"/>
+                </a:solidFill>
+                <a:latin typeface="Fira Code"/>
+                <a:ea typeface="Fira Code"/>
+                <a:cs typeface="Fira Code"/>
+                <a:sym typeface="Fira Code"/>
+              </a:defRPr>
+            </a:lvl7pPr>
+            <a:lvl8pPr marL="3657600" marR="0" lvl="7" indent="-317500" algn="l" rtl="0">
+              <a:lnSpc>
+                <a:spcPct val="100000"/>
+              </a:lnSpc>
+              <a:spcBef>
+                <a:spcPts val="0"/>
+              </a:spcBef>
+              <a:spcAft>
+                <a:spcPts val="0"/>
+              </a:spcAft>
+              <a:buClr>
+                <a:schemeClr val="dk2"/>
+              </a:buClr>
+              <a:buSzPts val="1400"/>
+              <a:buFont typeface="Fira Code"/>
+              <a:buChar char="○"/>
+              <a:defRPr sz="1400" b="0" i="0" u="none" strike="noStrike" cap="none">
+                <a:solidFill>
+                  <a:schemeClr val="dk2"/>
+                </a:solidFill>
+                <a:latin typeface="Fira Code"/>
+                <a:ea typeface="Fira Code"/>
+                <a:cs typeface="Fira Code"/>
+                <a:sym typeface="Fira Code"/>
+              </a:defRPr>
+            </a:lvl8pPr>
+            <a:lvl9pPr marL="4114800" marR="0" lvl="8" indent="-317500" algn="l" rtl="0">
+              <a:lnSpc>
+                <a:spcPct val="100000"/>
+              </a:lnSpc>
+              <a:spcBef>
+                <a:spcPts val="0"/>
+              </a:spcBef>
+              <a:spcAft>
+                <a:spcPts val="0"/>
+              </a:spcAft>
+              <a:buClr>
+                <a:schemeClr val="dk2"/>
+              </a:buClr>
+              <a:buSzPts val="1400"/>
+              <a:buFont typeface="Fira Code"/>
+              <a:buChar char="■"/>
+              <a:defRPr sz="1400" b="0" i="0" u="none" strike="noStrike" cap="none">
+                <a:solidFill>
+                  <a:schemeClr val="dk2"/>
+                </a:solidFill>
+                <a:latin typeface="Fira Code"/>
+                <a:ea typeface="Fira Code"/>
+                <a:cs typeface="Fira Code"/>
+                <a:sym typeface="Fira Code"/>
+              </a:defRPr>
+            </a:lvl9pPr>
+          </a:lstStyle>
+          <a:p>
+            <a:pPr marL="0" indent="0">
+              <a:buFont typeface="Fira Code"/>
+              <a:buNone/>
+            </a:pPr>
+            <a:r>
+              <a:rPr lang="en" sz="1100" dirty="0">
+                <a:solidFill>
+                  <a:schemeClr val="accent3"/>
+                </a:solidFill>
+              </a:rPr>
+              <a:t>11</a:t>
+            </a:r>
+            <a:endParaRPr lang="en" dirty="0">
+              <a:solidFill>
+                <a:schemeClr val="accent3"/>
+              </a:solidFill>
+            </a:endParaRPr>
+          </a:p>
+        </p:txBody>
+      </p:sp>
+      <p:sp>
+        <p:nvSpPr>
+          <p:cNvPr id="3" name="Google Shape;465;p27">
+            <a:extLst>
+              <a:ext uri="{FF2B5EF4-FFF2-40B4-BE49-F238E27FC236}">
+                <a16:creationId xmlns:a16="http://schemas.microsoft.com/office/drawing/2014/main" id="{E6E41B85-80DD-56F2-76C9-3D891BCDF424}"/>
+              </a:ext>
+            </a:extLst>
+          </p:cNvPr>
+          <p:cNvSpPr txBox="1">
+            <a:spLocks/>
+          </p:cNvSpPr>
+          <p:nvPr/>
+        </p:nvSpPr>
+        <p:spPr>
+          <a:xfrm>
+            <a:off x="-5975" y="91525"/>
+            <a:ext cx="4572000" cy="357300"/>
+          </a:xfrm>
+          <a:prstGeom prst="rect">
+            <a:avLst/>
+          </a:prstGeom>
+          <a:noFill/>
+          <a:ln>
+            <a:noFill/>
+          </a:ln>
+        </p:spPr>
+        <p:txBody>
+          <a:bodyPr spcFirstLastPara="1" wrap="square" lIns="91425" tIns="91425" rIns="91425" bIns="91425" anchor="ctr" anchorCtr="0">
+            <a:noAutofit/>
+          </a:bodyPr>
+          <a:lstStyle>
+            <a:defPPr marR="0" lvl="0" algn="l" rtl="0">
+              <a:lnSpc>
+                <a:spcPct val="100000"/>
+              </a:lnSpc>
+              <a:spcBef>
+                <a:spcPts val="0"/>
+              </a:spcBef>
+              <a:spcAft>
+                <a:spcPts val="0"/>
+              </a:spcAft>
+            </a:defPPr>
+            <a:lvl1pPr marL="457200" marR="0" lvl="0" indent="-317500" algn="l" rtl="0">
+              <a:lnSpc>
+                <a:spcPct val="100000"/>
+              </a:lnSpc>
+              <a:spcBef>
+                <a:spcPts val="0"/>
+              </a:spcBef>
+              <a:spcAft>
+                <a:spcPts val="0"/>
+              </a:spcAft>
+              <a:buClr>
+                <a:schemeClr val="dk2"/>
+              </a:buClr>
+              <a:buSzPts val="2800"/>
+              <a:buFont typeface="Fira Code"/>
+              <a:buNone/>
+              <a:defRPr sz="1800" b="0" i="0" u="none" strike="noStrike" cap="none">
+                <a:solidFill>
+                  <a:schemeClr val="accent3"/>
+                </a:solidFill>
+                <a:latin typeface="Fira Code"/>
+                <a:ea typeface="Fira Code"/>
+                <a:cs typeface="Fira Code"/>
+                <a:sym typeface="Fira Code"/>
+              </a:defRPr>
+            </a:lvl1pPr>
+            <a:lvl2pPr marL="914400" marR="0" lvl="1" indent="-317500" algn="ctr" rtl="0">
+              <a:lnSpc>
+                <a:spcPct val="100000"/>
+              </a:lnSpc>
+              <a:spcBef>
+                <a:spcPts val="0"/>
+              </a:spcBef>
+              <a:spcAft>
+                <a:spcPts val="0"/>
+              </a:spcAft>
+              <a:buClr>
+                <a:schemeClr val="dk2"/>
+              </a:buClr>
+              <a:buSzPts val="2800"/>
+              <a:buFont typeface="Fira Code"/>
+              <a:buNone/>
+              <a:defRPr sz="2800" b="0" i="0" u="none" strike="noStrike" cap="none">
+                <a:solidFill>
+                  <a:schemeClr val="dk2"/>
+                </a:solidFill>
+                <a:latin typeface="Fira Code"/>
+                <a:ea typeface="Fira Code"/>
+                <a:cs typeface="Fira Code"/>
+                <a:sym typeface="Fira Code"/>
+              </a:defRPr>
+            </a:lvl2pPr>
+            <a:lvl3pPr marL="1371600" marR="0" lvl="2" indent="-317500" algn="ctr" rtl="0">
+              <a:lnSpc>
+                <a:spcPct val="100000"/>
+              </a:lnSpc>
+              <a:spcBef>
+                <a:spcPts val="0"/>
+              </a:spcBef>
+              <a:spcAft>
+                <a:spcPts val="0"/>
+              </a:spcAft>
+              <a:buClr>
+                <a:schemeClr val="dk2"/>
+              </a:buClr>
+              <a:buSzPts val="2800"/>
+              <a:buFont typeface="Fira Code"/>
+              <a:buNone/>
+              <a:defRPr sz="2800" b="0" i="0" u="none" strike="noStrike" cap="none">
+                <a:solidFill>
+                  <a:schemeClr val="dk2"/>
+                </a:solidFill>
+                <a:latin typeface="Fira Code"/>
+                <a:ea typeface="Fira Code"/>
+                <a:cs typeface="Fira Code"/>
+                <a:sym typeface="Fira Code"/>
+              </a:defRPr>
+            </a:lvl3pPr>
+            <a:lvl4pPr marL="1828800" marR="0" lvl="3" indent="-317500" algn="ctr" rtl="0">
+              <a:lnSpc>
+                <a:spcPct val="100000"/>
+              </a:lnSpc>
+              <a:spcBef>
+                <a:spcPts val="0"/>
+              </a:spcBef>
+              <a:spcAft>
+                <a:spcPts val="0"/>
+              </a:spcAft>
+              <a:buClr>
+                <a:schemeClr val="dk2"/>
+              </a:buClr>
+              <a:buSzPts val="2800"/>
+              <a:buFont typeface="Fira Code"/>
+              <a:buNone/>
+              <a:defRPr sz="2800" b="0" i="0" u="none" strike="noStrike" cap="none">
+                <a:solidFill>
+                  <a:schemeClr val="dk2"/>
+                </a:solidFill>
+                <a:latin typeface="Fira Code"/>
+                <a:ea typeface="Fira Code"/>
+                <a:cs typeface="Fira Code"/>
+                <a:sym typeface="Fira Code"/>
+              </a:defRPr>
+            </a:lvl4pPr>
+            <a:lvl5pPr marL="2286000" marR="0" lvl="4" indent="-317500" algn="ctr" rtl="0">
+              <a:lnSpc>
+                <a:spcPct val="100000"/>
+              </a:lnSpc>
+              <a:spcBef>
+                <a:spcPts val="0"/>
+              </a:spcBef>
+              <a:spcAft>
+                <a:spcPts val="0"/>
+              </a:spcAft>
+              <a:buClr>
+                <a:schemeClr val="dk2"/>
+              </a:buClr>
+              <a:buSzPts val="2800"/>
+              <a:buFont typeface="Fira Code"/>
+              <a:buNone/>
+              <a:defRPr sz="2800" b="0" i="0" u="none" strike="noStrike" cap="none">
+                <a:solidFill>
+                  <a:schemeClr val="dk2"/>
+                </a:solidFill>
+                <a:latin typeface="Fira Code"/>
+                <a:ea typeface="Fira Code"/>
+                <a:cs typeface="Fira Code"/>
+                <a:sym typeface="Fira Code"/>
+              </a:defRPr>
+            </a:lvl5pPr>
+            <a:lvl6pPr marL="2743200" marR="0" lvl="5" indent="-317500" algn="ctr" rtl="0">
+              <a:lnSpc>
+                <a:spcPct val="100000"/>
+              </a:lnSpc>
+              <a:spcBef>
+                <a:spcPts val="0"/>
+              </a:spcBef>
+              <a:spcAft>
+                <a:spcPts val="0"/>
+              </a:spcAft>
+              <a:buClr>
+                <a:schemeClr val="dk2"/>
+              </a:buClr>
+              <a:buSzPts val="2800"/>
+              <a:buFont typeface="Fira Code"/>
+              <a:buNone/>
+              <a:defRPr sz="2800" b="0" i="0" u="none" strike="noStrike" cap="none">
+                <a:solidFill>
+                  <a:schemeClr val="dk2"/>
+                </a:solidFill>
+                <a:latin typeface="Fira Code"/>
+                <a:ea typeface="Fira Code"/>
+                <a:cs typeface="Fira Code"/>
+                <a:sym typeface="Fira Code"/>
+              </a:defRPr>
+            </a:lvl6pPr>
+            <a:lvl7pPr marL="3200400" marR="0" lvl="6" indent="-317500" algn="ctr" rtl="0">
+              <a:lnSpc>
+                <a:spcPct val="100000"/>
+              </a:lnSpc>
+              <a:spcBef>
+                <a:spcPts val="0"/>
+              </a:spcBef>
+              <a:spcAft>
+                <a:spcPts val="0"/>
+              </a:spcAft>
+              <a:buClr>
+                <a:schemeClr val="dk2"/>
+              </a:buClr>
+              <a:buSzPts val="2800"/>
+              <a:buFont typeface="Fira Code"/>
+              <a:buNone/>
+              <a:defRPr sz="2800" b="0" i="0" u="none" strike="noStrike" cap="none">
+                <a:solidFill>
+                  <a:schemeClr val="dk2"/>
+                </a:solidFill>
+                <a:latin typeface="Fira Code"/>
+                <a:ea typeface="Fira Code"/>
+                <a:cs typeface="Fira Code"/>
+                <a:sym typeface="Fira Code"/>
+              </a:defRPr>
+            </a:lvl7pPr>
+            <a:lvl8pPr marL="3657600" marR="0" lvl="7" indent="-317500" algn="ctr" rtl="0">
+              <a:lnSpc>
+                <a:spcPct val="100000"/>
+              </a:lnSpc>
+              <a:spcBef>
+                <a:spcPts val="0"/>
+              </a:spcBef>
+              <a:spcAft>
+                <a:spcPts val="0"/>
+              </a:spcAft>
+              <a:buClr>
+                <a:schemeClr val="dk2"/>
+              </a:buClr>
+              <a:buSzPts val="2800"/>
+              <a:buFont typeface="Fira Code"/>
+              <a:buNone/>
+              <a:defRPr sz="2800" b="0" i="0" u="none" strike="noStrike" cap="none">
+                <a:solidFill>
+                  <a:schemeClr val="dk2"/>
+                </a:solidFill>
+                <a:latin typeface="Fira Code"/>
+                <a:ea typeface="Fira Code"/>
+                <a:cs typeface="Fira Code"/>
+                <a:sym typeface="Fira Code"/>
+              </a:defRPr>
+            </a:lvl8pPr>
+            <a:lvl9pPr marL="4114800" marR="0" lvl="8" indent="-317500" algn="ctr" rtl="0">
+              <a:lnSpc>
+                <a:spcPct val="100000"/>
+              </a:lnSpc>
+              <a:spcBef>
+                <a:spcPts val="0"/>
+              </a:spcBef>
+              <a:spcAft>
+                <a:spcPts val="0"/>
+              </a:spcAft>
+              <a:buClr>
+                <a:schemeClr val="dk2"/>
+              </a:buClr>
+              <a:buSzPts val="2800"/>
+              <a:buFont typeface="Fira Code"/>
+              <a:buNone/>
+              <a:defRPr sz="2800" b="0" i="0" u="none" strike="noStrike" cap="none">
+                <a:solidFill>
+                  <a:schemeClr val="dk2"/>
+                </a:solidFill>
+                <a:latin typeface="Fira Code"/>
+                <a:ea typeface="Fira Code"/>
+                <a:cs typeface="Fira Code"/>
+                <a:sym typeface="Fira Code"/>
+              </a:defRPr>
+            </a:lvl9pPr>
+          </a:lstStyle>
+          <a:p>
+            <a:pPr marL="0" indent="0" algn="ctr"/>
+            <a:r>
+              <a:rPr lang="en-US" sz="1000"/>
+              <a:t>Random.c</a:t>
+            </a:r>
+            <a:endParaRPr lang="en-US" sz="1000" dirty="0"/>
+          </a:p>
+        </p:txBody>
+      </p:sp>
+    </p:spTree>
+    <p:extLst>
+      <p:ext uri="{BB962C8B-B14F-4D97-AF65-F5344CB8AC3E}">
+        <p14:creationId xmlns:p14="http://schemas.microsoft.com/office/powerpoint/2010/main" val="1840553548"/>
+      </p:ext>
+    </p:extLst>
+  </p:cSld>
+  <p:clrMapOvr>
+    <a:masterClrMapping/>
+  </p:clrMapOvr>
+</p:sld>
+</file>
+
+<file path=ppt/slides/slide13.xml><?xml version="1.0" encoding="utf-8"?>
+<p:sld xmlns:a="http://schemas.openxmlformats.org/drawingml/2006/main" xmlns:r="http://schemas.openxmlformats.org/officeDocument/2006/relationships" xmlns:p="http://schemas.openxmlformats.org/presentationml/2006/main">
+  <p:cSld>
+    <p:spTree>
+      <p:nvGrpSpPr>
+        <p:cNvPr id="1" name="Shape 457">
+          <a:extLst>
+            <a:ext uri="{FF2B5EF4-FFF2-40B4-BE49-F238E27FC236}">
               <a16:creationId xmlns:a16="http://schemas.microsoft.com/office/drawing/2014/main" id="{4C6AD2BA-8BD7-7334-5544-D5884DF1E6AB}"/>
             </a:ext>
           </a:extLst>
@@ -8693,7 +10492,7 @@
             </a:pPr>
             <a:r>
               <a:rPr lang="en-US" sz="1000" dirty="0"/>
-              <a:t>Task3</a:t>
+              <a:t>HW1</a:t>
             </a:r>
             <a:endParaRPr sz="1000" dirty="0"/>
           </a:p>
@@ -8760,7 +10559,7 @@
         </p:nvSpPr>
         <p:spPr>
           <a:xfrm>
-            <a:off x="1005895" y="270175"/>
+            <a:off x="1005895" y="95486"/>
             <a:ext cx="5877790" cy="974809"/>
           </a:xfrm>
           <a:prstGeom prst="rect">
@@ -9029,7 +10828,7 @@
                   <a:schemeClr val="accent2"/>
                 </a:solidFill>
               </a:rPr>
-              <a:t>Task</a:t>
+              <a:t>Home Work</a:t>
             </a:r>
           </a:p>
         </p:txBody>
@@ -9048,8 +10847,8 @@
         </p:nvSpPr>
         <p:spPr>
           <a:xfrm>
-            <a:off x="1149230" y="1191390"/>
-            <a:ext cx="7606764" cy="2292935"/>
+            <a:off x="1050324" y="892879"/>
+            <a:ext cx="7920682" cy="3662541"/>
           </a:xfrm>
           <a:prstGeom prst="rect">
             <a:avLst/>
@@ -9062,8 +10861,17 @@
           </a:bodyPr>
           <a:lstStyle/>
           <a:p>
+            <a:pPr lvl="0" algn="just" eaLnBrk="0" fontAlgn="base" hangingPunct="0">
+              <a:spcBef>
+                <a:spcPct val="0"/>
+              </a:spcBef>
+              <a:spcAft>
+                <a:spcPct val="0"/>
+              </a:spcAft>
+              <a:buClrTx/>
+            </a:pPr>
             <a:r>
-              <a:rPr lang="en-US" sz="1100" dirty="0">
+              <a:rPr lang="en-US" altLang="en-US" sz="1100" dirty="0">
                 <a:solidFill>
                   <a:schemeClr val="accent3"/>
                 </a:solidFill>
@@ -9071,33 +10879,19 @@
                 <a:ea typeface="Fira Code"/>
                 <a:cs typeface="B Nazanin" panose="00000400000000000000" pitchFamily="2" charset="-78"/>
               </a:rPr>
-              <a:t>1. Write a program that generates 5 random numbers every time it runs?</a:t>
+              <a:t>Write a C program that uses functions from the </a:t>
             </a:r>
-          </a:p>
-          <a:p>
-            <a:pPr marL="228600" indent="-228600">
-              <a:buAutoNum type="arabicPeriod"/>
-            </a:pPr>
-            <a:endParaRPr lang="en-US" sz="1100" dirty="0">
-              <a:solidFill>
-                <a:schemeClr val="accent3"/>
-              </a:solidFill>
-              <a:latin typeface="Fira Code"/>
-              <a:ea typeface="Fira Code"/>
-              <a:cs typeface="B Nazanin" panose="00000400000000000000" pitchFamily="2" charset="-78"/>
-            </a:endParaRPr>
-          </a:p>
-          <a:p>
-            <a:endParaRPr lang="en-US" sz="1100" dirty="0">
-              <a:solidFill>
-                <a:schemeClr val="accent3"/>
-              </a:solidFill>
-              <a:latin typeface="Fira Code"/>
-              <a:ea typeface="Fira Code"/>
-              <a:cs typeface="B Nazanin" panose="00000400000000000000" pitchFamily="2" charset="-78"/>
-            </a:endParaRPr>
-          </a:p>
-          <a:p>
+            <a:r>
+              <a:rPr lang="en-US" altLang="en-US" sz="1100" dirty="0" err="1">
+                <a:solidFill>
+                  <a:schemeClr val="accent3"/>
+                </a:solidFill>
+                <a:latin typeface="Fira Code"/>
+                <a:ea typeface="Fira Code"/>
+                <a:cs typeface="B Nazanin" panose="00000400000000000000" pitchFamily="2" charset="-78"/>
+              </a:rPr>
+              <a:t>math.h</a:t>
+            </a:r>
             <a:r>
               <a:rPr lang="en-US" altLang="en-US" sz="1100" dirty="0">
                 <a:solidFill>
@@ -9107,29 +10901,19 @@
                 <a:ea typeface="Fira Code"/>
                 <a:cs typeface="B Nazanin" panose="00000400000000000000" pitchFamily="2" charset="-78"/>
               </a:rPr>
-              <a:t>2. </a:t>
+              <a:t> library to perform the following tasks:</a:t>
             </a:r>
-            <a:r>
-              <a:rPr lang="en-US" sz="1100" dirty="0">
-                <a:solidFill>
-                  <a:schemeClr val="accent3"/>
-                </a:solidFill>
-                <a:latin typeface="Fira Code"/>
-                <a:ea typeface="Fira Code"/>
-                <a:cs typeface="B Nazanin" panose="00000400000000000000" pitchFamily="2" charset="-78"/>
-              </a:rPr>
-              <a:t>Why does the output become the same every time the program runs?</a:t>
-            </a:r>
-            <a:endParaRPr lang="fa-IR" sz="1100" dirty="0">
-              <a:solidFill>
-                <a:schemeClr val="accent3"/>
-              </a:solidFill>
-              <a:latin typeface="Fira Code"/>
-              <a:ea typeface="Fira Code"/>
-              <a:cs typeface="B Nazanin" panose="00000400000000000000" pitchFamily="2" charset="-78"/>
-            </a:endParaRPr>
-          </a:p>
-          <a:p>
+          </a:p>
+          <a:p>
+            <a:pPr lvl="0" algn="just" eaLnBrk="0" fontAlgn="base" hangingPunct="0">
+              <a:spcBef>
+                <a:spcPct val="0"/>
+              </a:spcBef>
+              <a:spcAft>
+                <a:spcPct val="0"/>
+              </a:spcAft>
+              <a:buClrTx/>
+            </a:pPr>
             <a:endParaRPr lang="en-US" altLang="en-US" sz="1100" dirty="0">
               <a:solidFill>
                 <a:schemeClr val="accent3"/>
@@ -9140,10 +10924,136 @@
             </a:endParaRPr>
           </a:p>
           <a:p>
-            <a:pPr marL="228600" indent="-228600">
+            <a:pPr lvl="0" eaLnBrk="0" fontAlgn="base" hangingPunct="0">
+              <a:spcBef>
+                <a:spcPct val="0"/>
+              </a:spcBef>
+              <a:spcAft>
+                <a:spcPct val="0"/>
+              </a:spcAft>
+              <a:buClrTx/>
+              <a:buFontTx/>
               <a:buAutoNum type="arabicPeriod"/>
             </a:pPr>
-            <a:endParaRPr lang="en-US" sz="1100" dirty="0">
+            <a:r>
+              <a:rPr lang="en-US" altLang="en-US" sz="1100" dirty="0">
+                <a:solidFill>
+                  <a:schemeClr val="accent3"/>
+                </a:solidFill>
+                <a:latin typeface="Fira Code"/>
+                <a:ea typeface="Fira Code"/>
+                <a:cs typeface="B Nazanin" panose="00000400000000000000" pitchFamily="2" charset="-78"/>
+              </a:rPr>
+              <a:t>Ask the user to enter a positive number and:</a:t>
+            </a:r>
+          </a:p>
+          <a:p>
+            <a:pPr marL="457200" lvl="1" eaLnBrk="0" fontAlgn="base" hangingPunct="0">
+              <a:spcBef>
+                <a:spcPct val="0"/>
+              </a:spcBef>
+              <a:spcAft>
+                <a:spcPct val="0"/>
+              </a:spcAft>
+              <a:buClrTx/>
+              <a:buFontTx/>
+              <a:buChar char="•"/>
+            </a:pPr>
+            <a:r>
+              <a:rPr lang="en-US" altLang="en-US" sz="1100" dirty="0">
+                <a:solidFill>
+                  <a:schemeClr val="accent3"/>
+                </a:solidFill>
+                <a:latin typeface="Fira Code"/>
+                <a:ea typeface="Fira Code"/>
+                <a:cs typeface="B Nazanin" panose="00000400000000000000" pitchFamily="2" charset="-78"/>
+              </a:rPr>
+              <a:t>Display its square root using sqrt()</a:t>
+            </a:r>
+          </a:p>
+          <a:p>
+            <a:pPr marL="457200" lvl="1" algn="just" eaLnBrk="0" fontAlgn="base" hangingPunct="0">
+              <a:spcBef>
+                <a:spcPct val="0"/>
+              </a:spcBef>
+              <a:spcAft>
+                <a:spcPct val="0"/>
+              </a:spcAft>
+              <a:buClrTx/>
+              <a:buFontTx/>
+              <a:buChar char="•"/>
+            </a:pPr>
+            <a:r>
+              <a:rPr lang="en-US" altLang="en-US" sz="1100" dirty="0">
+                <a:solidFill>
+                  <a:schemeClr val="accent3"/>
+                </a:solidFill>
+                <a:latin typeface="Fira Code"/>
+                <a:ea typeface="Fira Code"/>
+                <a:cs typeface="B Nazanin" panose="00000400000000000000" pitchFamily="2" charset="-78"/>
+              </a:rPr>
+              <a:t>Display e to the power of the number using exp()</a:t>
+            </a:r>
+          </a:p>
+          <a:p>
+            <a:pPr marL="457200" lvl="1" algn="just" eaLnBrk="0" fontAlgn="base" hangingPunct="0">
+              <a:spcBef>
+                <a:spcPct val="0"/>
+              </a:spcBef>
+              <a:spcAft>
+                <a:spcPct val="0"/>
+              </a:spcAft>
+              <a:buClrTx/>
+              <a:buFontTx/>
+              <a:buChar char="•"/>
+            </a:pPr>
+            <a:r>
+              <a:rPr lang="en-US" altLang="en-US" sz="1100" dirty="0">
+                <a:solidFill>
+                  <a:schemeClr val="accent3"/>
+                </a:solidFill>
+                <a:latin typeface="Fira Code"/>
+                <a:ea typeface="Fira Code"/>
+                <a:cs typeface="B Nazanin" panose="00000400000000000000" pitchFamily="2" charset="-78"/>
+              </a:rPr>
+              <a:t>Display its natural logarithm using log()</a:t>
+            </a:r>
+          </a:p>
+          <a:p>
+            <a:pPr marL="457200" lvl="1" algn="just" eaLnBrk="0" fontAlgn="base" hangingPunct="0">
+              <a:spcBef>
+                <a:spcPct val="0"/>
+              </a:spcBef>
+              <a:spcAft>
+                <a:spcPct val="0"/>
+              </a:spcAft>
+              <a:buClrTx/>
+              <a:buFontTx/>
+              <a:buChar char="•"/>
+            </a:pPr>
+            <a:r>
+              <a:rPr lang="en-US" altLang="en-US" sz="1100" dirty="0">
+                <a:solidFill>
+                  <a:schemeClr val="accent3"/>
+                </a:solidFill>
+                <a:latin typeface="Fira Code"/>
+                <a:ea typeface="Fira Code"/>
+                <a:cs typeface="B Nazanin" panose="00000400000000000000" pitchFamily="2" charset="-78"/>
+              </a:rPr>
+              <a:t>Display its base-10 logarithm using log10()</a:t>
+            </a:r>
+          </a:p>
+          <a:p>
+            <a:pPr marL="457200" lvl="1" algn="just" eaLnBrk="0" fontAlgn="base" hangingPunct="0">
+              <a:spcBef>
+                <a:spcPct val="0"/>
+              </a:spcBef>
+              <a:spcAft>
+                <a:spcPct val="0"/>
+              </a:spcAft>
+              <a:buClrTx/>
+            </a:pPr>
+            <a:endParaRPr lang="en-US" altLang="en-US" sz="1100" dirty="0">
               <a:solidFill>
                 <a:schemeClr val="accent3"/>
               </a:solidFill>
@@ -9153,8 +11063,19 @@
             </a:endParaRPr>
           </a:p>
           <a:p>
+            <a:pPr lvl="0" algn="just" eaLnBrk="0" fontAlgn="base" hangingPunct="0">
+              <a:spcBef>
+                <a:spcPct val="0"/>
+              </a:spcBef>
+              <a:spcAft>
+                <a:spcPct val="0"/>
+              </a:spcAft>
+              <a:buClrTx/>
+              <a:buFontTx/>
+              <a:buAutoNum type="arabicPeriod" startAt="2"/>
+            </a:pPr>
             <a:r>
-              <a:rPr lang="en-US" sz="1100" dirty="0">
+              <a:rPr lang="en-US" altLang="en-US" sz="1100" dirty="0">
                 <a:solidFill>
                   <a:schemeClr val="accent3"/>
                 </a:solidFill>
@@ -9162,10 +11083,23 @@
                 <a:ea typeface="Fira Code"/>
                 <a:cs typeface="B Nazanin" panose="00000400000000000000" pitchFamily="2" charset="-78"/>
               </a:rPr>
-              <a:t>3. Use </a:t>
+              <a:t>Ask the user to enter any number (positive or negative) and:</a:t>
             </a:r>
+          </a:p>
+          <a:p>
+            <a:pPr marL="457200" lvl="1" algn="just" eaLnBrk="0" fontAlgn="base" hangingPunct="0">
+              <a:spcBef>
+                <a:spcPct val="0"/>
+              </a:spcBef>
+              <a:spcAft>
+                <a:spcPct val="0"/>
+              </a:spcAft>
+              <a:buClrTx/>
+              <a:buFontTx/>
+              <a:buChar char="•"/>
+            </a:pPr>
             <a:r>
-              <a:rPr lang="en-US" sz="1100" b="1" dirty="0" err="1">
+              <a:rPr lang="en-US" altLang="en-US" sz="1100" dirty="0">
                 <a:solidFill>
                   <a:schemeClr val="accent3"/>
                 </a:solidFill>
@@ -9173,10 +11107,23 @@
                 <a:ea typeface="Fira Code"/>
                 <a:cs typeface="B Nazanin" panose="00000400000000000000" pitchFamily="2" charset="-78"/>
               </a:rPr>
-              <a:t>srand</a:t>
+              <a:t>Display its absolute value using fabs()</a:t>
             </a:r>
+          </a:p>
+          <a:p>
+            <a:pPr marL="457200" lvl="1" algn="just" eaLnBrk="0" fontAlgn="base" hangingPunct="0">
+              <a:spcBef>
+                <a:spcPct val="0"/>
+              </a:spcBef>
+              <a:spcAft>
+                <a:spcPct val="0"/>
+              </a:spcAft>
+              <a:buClrTx/>
+              <a:buFontTx/>
+              <a:buChar char="•"/>
+            </a:pPr>
             <a:r>
-              <a:rPr lang="en-US" sz="1100" dirty="0">
+              <a:rPr lang="en-US" altLang="en-US" sz="1100" dirty="0">
                 <a:solidFill>
                   <a:schemeClr val="accent3"/>
                 </a:solidFill>
@@ -9184,11 +11131,46 @@
                 <a:ea typeface="Fira Code"/>
                 <a:cs typeface="B Nazanin" panose="00000400000000000000" pitchFamily="2" charset="-78"/>
               </a:rPr>
-              <a:t> and run the program again.</a:t>
+              <a:t>Display the ceiling of the number using ceil()</a:t>
             </a:r>
           </a:p>
           <a:p>
-            <a:endParaRPr lang="fa-IR" sz="1100" dirty="0">
+            <a:pPr marL="457200" lvl="1" algn="just" eaLnBrk="0" fontAlgn="base" hangingPunct="0">
+              <a:spcBef>
+                <a:spcPct val="0"/>
+              </a:spcBef>
+              <a:spcAft>
+                <a:spcPct val="0"/>
+              </a:spcAft>
+              <a:buClrTx/>
+              <a:buFontTx/>
+              <a:buChar char="•"/>
+            </a:pPr>
+            <a:r>
+              <a:rPr lang="en-US" altLang="en-US" sz="1100" dirty="0">
+                <a:solidFill>
+                  <a:schemeClr val="accent3"/>
+                </a:solidFill>
+                <a:latin typeface="Fira Code"/>
+                <a:ea typeface="Fira Code"/>
+                <a:cs typeface="B Nazanin" panose="00000400000000000000" pitchFamily="2" charset="-78"/>
+              </a:rPr>
+              <a:t>Display the floor of the number using floor()</a:t>
+            </a:r>
+          </a:p>
+          <a:p>
+            <a:pPr marL="457200" lvl="1" algn="just" eaLnBrk="0" fontAlgn="base" hangingPunct="0">
+              <a:spcBef>
+                <a:spcPct val="0"/>
+              </a:spcBef>
+              <a:spcAft>
+                <a:spcPct val="0"/>
+              </a:spcAft>
+              <a:buClrTx/>
+              <a:buFontTx/>
+              <a:buChar char="•"/>
+            </a:pPr>
+            <a:endParaRPr lang="en-US" altLang="en-US" sz="1100" dirty="0">
               <a:solidFill>
                 <a:schemeClr val="accent3"/>
               </a:solidFill>
@@ -9198,7 +11180,112 @@
             </a:endParaRPr>
           </a:p>
           <a:p>
-            <a:endParaRPr lang="fa-IR" sz="1100" dirty="0">
+            <a:pPr lvl="0" algn="just" eaLnBrk="0" fontAlgn="base" hangingPunct="0">
+              <a:spcBef>
+                <a:spcPct val="0"/>
+              </a:spcBef>
+              <a:spcAft>
+                <a:spcPct val="0"/>
+              </a:spcAft>
+              <a:buClrTx/>
+              <a:buFontTx/>
+              <a:buAutoNum type="arabicPeriod" startAt="3"/>
+            </a:pPr>
+            <a:r>
+              <a:rPr lang="en-US" altLang="en-US" sz="1100" dirty="0">
+                <a:solidFill>
+                  <a:schemeClr val="accent3"/>
+                </a:solidFill>
+                <a:latin typeface="Fira Code"/>
+                <a:ea typeface="Fira Code"/>
+                <a:cs typeface="B Nazanin" panose="00000400000000000000" pitchFamily="2" charset="-78"/>
+              </a:rPr>
+              <a:t>Ask the user to enter two numbers and:</a:t>
+            </a:r>
+          </a:p>
+          <a:p>
+            <a:pPr marL="457200" lvl="1" algn="just" eaLnBrk="0" fontAlgn="base" hangingPunct="0">
+              <a:spcBef>
+                <a:spcPct val="0"/>
+              </a:spcBef>
+              <a:spcAft>
+                <a:spcPct val="0"/>
+              </a:spcAft>
+              <a:buClrTx/>
+              <a:buFontTx/>
+              <a:buChar char="•"/>
+            </a:pPr>
+            <a:r>
+              <a:rPr lang="en-US" altLang="en-US" sz="1100" dirty="0">
+                <a:solidFill>
+                  <a:schemeClr val="accent3"/>
+                </a:solidFill>
+                <a:latin typeface="Fira Code"/>
+                <a:ea typeface="Fira Code"/>
+                <a:cs typeface="B Nazanin" panose="00000400000000000000" pitchFamily="2" charset="-78"/>
+              </a:rPr>
+              <a:t>Display the result of raising the first number to the power of the second using   pow(x, y)</a:t>
+            </a:r>
+          </a:p>
+          <a:p>
+            <a:pPr marL="457200" lvl="1" algn="just" eaLnBrk="0" fontAlgn="base" hangingPunct="0">
+              <a:spcBef>
+                <a:spcPct val="0"/>
+              </a:spcBef>
+              <a:spcAft>
+                <a:spcPct val="0"/>
+              </a:spcAft>
+              <a:buClrTx/>
+              <a:buFontTx/>
+              <a:buChar char="•"/>
+            </a:pPr>
+            <a:r>
+              <a:rPr lang="en-US" altLang="en-US" sz="1100" dirty="0">
+                <a:solidFill>
+                  <a:schemeClr val="accent3"/>
+                </a:solidFill>
+                <a:latin typeface="Fira Code"/>
+                <a:ea typeface="Fira Code"/>
+                <a:cs typeface="B Nazanin" panose="00000400000000000000" pitchFamily="2" charset="-78"/>
+              </a:rPr>
+              <a:t>Display the remainder when the first number is divided by the second using </a:t>
+            </a:r>
+            <a:r>
+              <a:rPr lang="en-US" altLang="en-US" sz="1100" dirty="0" err="1">
+                <a:solidFill>
+                  <a:schemeClr val="accent3"/>
+                </a:solidFill>
+                <a:latin typeface="Fira Code"/>
+                <a:ea typeface="Fira Code"/>
+                <a:cs typeface="B Nazanin" panose="00000400000000000000" pitchFamily="2" charset="-78"/>
+              </a:rPr>
+              <a:t>fmod</a:t>
+            </a:r>
+            <a:r>
+              <a:rPr lang="en-US" altLang="en-US" sz="1100" dirty="0">
+                <a:solidFill>
+                  <a:schemeClr val="accent3"/>
+                </a:solidFill>
+                <a:latin typeface="Fira Code"/>
+                <a:ea typeface="Fira Code"/>
+                <a:cs typeface="B Nazanin" panose="00000400000000000000" pitchFamily="2" charset="-78"/>
+              </a:rPr>
+              <a:t>(x, y)</a:t>
+            </a:r>
+          </a:p>
+          <a:p>
+            <a:pPr marL="457200" lvl="1" algn="just" eaLnBrk="0" fontAlgn="base" hangingPunct="0">
+              <a:spcBef>
+                <a:spcPct val="0"/>
+              </a:spcBef>
+              <a:spcAft>
+                <a:spcPct val="0"/>
+              </a:spcAft>
+              <a:buClrTx/>
+              <a:buFontTx/>
+              <a:buChar char="•"/>
+            </a:pPr>
+            <a:endParaRPr lang="en-US" altLang="en-US" sz="1100" dirty="0">
               <a:solidFill>
                 <a:schemeClr val="accent3"/>
               </a:solidFill>
@@ -9208,8 +11295,19 @@
             </a:endParaRPr>
           </a:p>
           <a:p>
+            <a:pPr lvl="0" algn="just" eaLnBrk="0" fontAlgn="base" hangingPunct="0">
+              <a:spcBef>
+                <a:spcPct val="0"/>
+              </a:spcBef>
+              <a:spcAft>
+                <a:spcPct val="0"/>
+              </a:spcAft>
+              <a:buClrTx/>
+              <a:buFontTx/>
+              <a:buAutoNum type="arabicPeriod" startAt="4"/>
+            </a:pPr>
             <a:r>
-              <a:rPr lang="en-US" sz="1100" dirty="0">
+              <a:rPr lang="en-US" altLang="en-US" sz="1100" dirty="0">
                 <a:solidFill>
                   <a:schemeClr val="accent3"/>
                 </a:solidFill>
@@ -9217,62 +11315,24 @@
                 <a:ea typeface="Fira Code"/>
                 <a:cs typeface="B Nazanin" panose="00000400000000000000" pitchFamily="2" charset="-78"/>
               </a:rPr>
-              <a:t>4. </a:t>
+              <a:t>Finally, display the values of sin(), cos(), and tan() for 0 radians.</a:t>
             </a:r>
-            <a:r>
-              <a:rPr lang="en-US" altLang="en-US" sz="1100" dirty="0">
-                <a:solidFill>
-                  <a:schemeClr val="accent3"/>
-                </a:solidFill>
-                <a:latin typeface="Fira Code"/>
-                <a:ea typeface="Fira Code"/>
-                <a:cs typeface="B Nazanin" panose="00000400000000000000" pitchFamily="2" charset="-78"/>
-              </a:rPr>
-              <a:t>Write a program that generates a random number between 0 and 100.</a:t>
-            </a:r>
-          </a:p>
-          <a:p>
-            <a:endParaRPr lang="en-US" sz="1100" dirty="0">
+          </a:p>
+          <a:p>
+            <a:pPr lvl="0" eaLnBrk="0" fontAlgn="base" hangingPunct="0">
+              <a:spcBef>
+                <a:spcPct val="0"/>
+              </a:spcBef>
+              <a:spcAft>
+                <a:spcPct val="0"/>
+              </a:spcAft>
+              <a:buClrTx/>
+            </a:pPr>
+            <a:endParaRPr lang="en-US" altLang="en-US" sz="1200" dirty="0">
               <a:solidFill>
                 <a:schemeClr val="accent3"/>
               </a:solidFill>
-              <a:latin typeface="Fira Code"/>
-              <a:ea typeface="Fira Code"/>
-              <a:cs typeface="B Nazanin" panose="00000400000000000000" pitchFamily="2" charset="-78"/>
-            </a:endParaRPr>
-          </a:p>
-          <a:p>
-            <a:pPr marL="228600" indent="-228600">
-              <a:buAutoNum type="arabicPeriod"/>
-            </a:pPr>
-            <a:endParaRPr lang="en-US" sz="1100" dirty="0">
-              <a:solidFill>
-                <a:schemeClr val="accent3"/>
-              </a:solidFill>
-              <a:latin typeface="Fira Code"/>
-              <a:ea typeface="Fira Code"/>
-              <a:cs typeface="B Nazanin" panose="00000400000000000000" pitchFamily="2" charset="-78"/>
-            </a:endParaRPr>
-          </a:p>
-          <a:p>
-            <a:r>
-              <a:rPr lang="en-US" sz="1100" dirty="0">
-                <a:solidFill>
-                  <a:schemeClr val="accent3"/>
-                </a:solidFill>
-                <a:latin typeface="Fira Code"/>
-                <a:ea typeface="Fira Code"/>
-                <a:cs typeface="B Nazanin" panose="00000400000000000000" pitchFamily="2" charset="-78"/>
-              </a:rPr>
-              <a:t> </a:t>
-            </a:r>
-            <a:endParaRPr lang="fa-IR" sz="1100" dirty="0">
-              <a:solidFill>
-                <a:schemeClr val="accent3"/>
-              </a:solidFill>
-              <a:latin typeface="Fira Code"/>
-              <a:ea typeface="Fira Code"/>
-              <a:cs typeface="B Nazanin" panose="00000400000000000000" pitchFamily="2" charset="-78"/>
+              <a:latin typeface="Arial" panose="020B0604020202020204" pitchFamily="34" charset="0"/>
             </a:endParaRPr>
           </a:p>
         </p:txBody>
@@ -9860,7 +11920,15 @@
                   <a:schemeClr val="accent3"/>
                 </a:solidFill>
               </a:rPr>
-              <a:t>11</a:t>
+              <a:t>1</a:t>
+            </a:r>
+            <a:r>
+              <a:rPr lang="fa-IR" sz="1100" dirty="0">
+                <a:solidFill>
+                  <a:schemeClr val="accent3"/>
+                </a:solidFill>
+              </a:rPr>
+              <a:t>2</a:t>
             </a:r>
             <a:endParaRPr lang="en" dirty="0">
               <a:solidFill>
@@ -9870,12 +11938,145 @@
           </a:p>
         </p:txBody>
       </p:sp>
+    </p:spTree>
+    <p:extLst>
+      <p:ext uri="{BB962C8B-B14F-4D97-AF65-F5344CB8AC3E}">
+        <p14:creationId xmlns:p14="http://schemas.microsoft.com/office/powerpoint/2010/main" val="460007682"/>
+      </p:ext>
+    </p:extLst>
+  </p:cSld>
+  <p:clrMapOvr>
+    <a:masterClrMapping/>
+  </p:clrMapOvr>
+</p:sld>
+</file>
+
+<file path=ppt/slides/slide14.xml><?xml version="1.0" encoding="utf-8"?>
+<p:sld xmlns:a="http://schemas.openxmlformats.org/drawingml/2006/main" xmlns:r="http://schemas.openxmlformats.org/officeDocument/2006/relationships" xmlns:p="http://schemas.openxmlformats.org/presentationml/2006/main">
+  <p:cSld>
+    <p:spTree>
+      <p:nvGrpSpPr>
+        <p:cNvPr id="1" name="Shape 457">
+          <a:extLst>
+            <a:ext uri="{FF2B5EF4-FFF2-40B4-BE49-F238E27FC236}">
+              <a16:creationId xmlns:a16="http://schemas.microsoft.com/office/drawing/2014/main" id="{867973E8-309B-D235-E203-A46CFF258377}"/>
+            </a:ext>
+          </a:extLst>
+        </p:cNvPr>
+        <p:cNvGrpSpPr/>
+        <p:nvPr/>
+      </p:nvGrpSpPr>
+      <p:grpSpPr>
+        <a:xfrm>
+          <a:off x="0" y="0"/>
+          <a:ext cx="0" cy="0"/>
+          <a:chOff x="0" y="0"/>
+          <a:chExt cx="0" cy="0"/>
+        </a:xfrm>
+      </p:grpSpPr>
       <p:sp>
         <p:nvSpPr>
-          <p:cNvPr id="3" name="Google Shape;465;p27">
+          <p:cNvPr id="465" name="Google Shape;465;p27">
             <a:extLst>
               <a:ext uri="{FF2B5EF4-FFF2-40B4-BE49-F238E27FC236}">
-                <a16:creationId xmlns:a16="http://schemas.microsoft.com/office/drawing/2014/main" id="{020E2A1D-DBF3-86C4-96C8-0E811AC4719E}"/>
+                <a16:creationId xmlns:a16="http://schemas.microsoft.com/office/drawing/2014/main" id="{A8B5F3C1-C0A6-E61B-F5BA-7BCF17FCEFC3}"/>
+              </a:ext>
+            </a:extLst>
+          </p:cNvPr>
+          <p:cNvSpPr txBox="1">
+            <a:spLocks noGrp="1"/>
+          </p:cNvSpPr>
+          <p:nvPr>
+            <p:ph type="subTitle" idx="1"/>
+          </p:nvPr>
+        </p:nvSpPr>
+        <p:spPr>
+          <a:xfrm>
+            <a:off x="4597685" y="84876"/>
+            <a:ext cx="4572000" cy="357300"/>
+          </a:xfrm>
+          <a:prstGeom prst="rect">
+            <a:avLst/>
+          </a:prstGeom>
+        </p:spPr>
+        <p:txBody>
+          <a:bodyPr spcFirstLastPara="1" wrap="square" lIns="91425" tIns="91425" rIns="91425" bIns="91425" anchor="ctr" anchorCtr="0">
+            <a:noAutofit/>
+          </a:bodyPr>
+          <a:lstStyle/>
+          <a:p>
+            <a:pPr marL="0" lvl="0" indent="0" algn="ctr" rtl="0">
+              <a:spcBef>
+                <a:spcPts val="0"/>
+              </a:spcBef>
+              <a:spcAft>
+                <a:spcPts val="0"/>
+              </a:spcAft>
+              <a:buNone/>
+            </a:pPr>
+            <a:r>
+              <a:rPr lang="en-US" sz="1000" dirty="0"/>
+              <a:t>HW</a:t>
+            </a:r>
+            <a:r>
+              <a:rPr lang="fa-IR" sz="1000"/>
+              <a:t>2</a:t>
+            </a:r>
+            <a:endParaRPr sz="1000" dirty="0"/>
+          </a:p>
+        </p:txBody>
+      </p:sp>
+      <p:sp>
+        <p:nvSpPr>
+          <p:cNvPr id="12" name="AutoShape 4">
+            <a:extLst>
+              <a:ext uri="{FF2B5EF4-FFF2-40B4-BE49-F238E27FC236}">
+                <a16:creationId xmlns:a16="http://schemas.microsoft.com/office/drawing/2014/main" id="{CB363D7A-E969-BCDA-AC9A-2C5E75274E1C}"/>
+              </a:ext>
+            </a:extLst>
+          </p:cNvPr>
+          <p:cNvSpPr>
+            <a:spLocks noChangeAspect="1" noChangeArrowheads="1"/>
+          </p:cNvSpPr>
+          <p:nvPr/>
+        </p:nvSpPr>
+        <p:spPr bwMode="auto">
+          <a:xfrm>
+            <a:off x="4419600" y="2419350"/>
+            <a:ext cx="304800" cy="304800"/>
+          </a:xfrm>
+          <a:prstGeom prst="rect">
+            <a:avLst/>
+          </a:prstGeom>
+          <a:noFill/>
+          <a:extLst>
+            <a:ext uri="{909E8E84-426E-40DD-AFC4-6F175D3DCCD1}">
+              <a14:hiddenFill xmlns:a14="http://schemas.microsoft.com/office/drawing/2010/main">
+                <a:solidFill>
+                  <a:srgbClr val="FFFFFF"/>
+                </a:solidFill>
+              </a14:hiddenFill>
+            </a:ext>
+          </a:extLst>
+        </p:spPr>
+        <p:txBody>
+          <a:bodyPr vert="horz" wrap="square" lIns="91440" tIns="45720" rIns="91440" bIns="45720" numCol="1" anchor="t" anchorCtr="0" compatLnSpc="1">
+            <a:prstTxWarp prst="textNoShape">
+              <a:avLst/>
+            </a:prstTxWarp>
+          </a:bodyPr>
+          <a:lstStyle/>
+          <a:p>
+            <a:endParaRPr lang="en-US"/>
+          </a:p>
+        </p:txBody>
+      </p:sp>
+      <p:sp>
+        <p:nvSpPr>
+          <p:cNvPr id="14" name="Google Shape;814;p39">
+            <a:extLst>
+              <a:ext uri="{FF2B5EF4-FFF2-40B4-BE49-F238E27FC236}">
+                <a16:creationId xmlns:a16="http://schemas.microsoft.com/office/drawing/2014/main" id="{54A43F61-8DD3-1EEA-1990-B67776C0ECC5}"/>
               </a:ext>
             </a:extLst>
           </p:cNvPr>
@@ -9886,8 +12087,8 @@
         </p:nvSpPr>
         <p:spPr>
           <a:xfrm>
-            <a:off x="-5975" y="91525"/>
-            <a:ext cx="4572000" cy="357300"/>
+            <a:off x="1005895" y="95486"/>
+            <a:ext cx="5877790" cy="974809"/>
           </a:xfrm>
           <a:prstGeom prst="rect">
             <a:avLst/>
@@ -9913,25 +12114,25 @@
                 <a:spcPts val="0"/>
               </a:spcAft>
             </a:defPPr>
-            <a:lvl1pPr marL="457200" marR="0" lvl="0" indent="-317500" algn="l" rtl="0">
-              <a:lnSpc>
-                <a:spcPct val="100000"/>
-              </a:lnSpc>
-              <a:spcBef>
-                <a:spcPts val="0"/>
-              </a:spcBef>
-              <a:spcAft>
-                <a:spcPts val="0"/>
-              </a:spcAft>
-              <a:buClr>
-                <a:schemeClr val="dk2"/>
-              </a:buClr>
-              <a:buSzPts val="2800"/>
-              <a:buFont typeface="Fira Code"/>
-              <a:buNone/>
-              <a:defRPr sz="1800" b="0" i="0" u="none" strike="noStrike" cap="none">
-                <a:solidFill>
-                  <a:schemeClr val="accent3"/>
+            <a:lvl1pPr marR="0" lvl="0" algn="l" rtl="0">
+              <a:lnSpc>
+                <a:spcPct val="100000"/>
+              </a:lnSpc>
+              <a:spcBef>
+                <a:spcPts val="0"/>
+              </a:spcBef>
+              <a:spcAft>
+                <a:spcPts val="0"/>
+              </a:spcAft>
+              <a:buClr>
+                <a:schemeClr val="lt1"/>
+              </a:buClr>
+              <a:buSzPts val="5200"/>
+              <a:buFont typeface="Fira Code"/>
+              <a:buNone/>
+              <a:defRPr sz="3000" b="0" i="0" u="none" strike="noStrike" cap="none">
+                <a:solidFill>
+                  <a:schemeClr val="lt1"/>
                 </a:solidFill>
                 <a:latin typeface="Fira Code"/>
                 <a:ea typeface="Fira Code"/>
@@ -9939,25 +12140,25 @@
                 <a:sym typeface="Fira Code"/>
               </a:defRPr>
             </a:lvl1pPr>
-            <a:lvl2pPr marL="914400" marR="0" lvl="1" indent="-317500" algn="ctr" rtl="0">
-              <a:lnSpc>
-                <a:spcPct val="100000"/>
-              </a:lnSpc>
-              <a:spcBef>
-                <a:spcPts val="0"/>
-              </a:spcBef>
-              <a:spcAft>
-                <a:spcPts val="0"/>
-              </a:spcAft>
-              <a:buClr>
-                <a:schemeClr val="dk2"/>
-              </a:buClr>
-              <a:buSzPts val="2800"/>
-              <a:buFont typeface="Fira Code"/>
-              <a:buNone/>
-              <a:defRPr sz="2800" b="0" i="0" u="none" strike="noStrike" cap="none">
-                <a:solidFill>
-                  <a:schemeClr val="dk2"/>
+            <a:lvl2pPr marR="0" lvl="1" algn="ctr" rtl="0">
+              <a:lnSpc>
+                <a:spcPct val="100000"/>
+              </a:lnSpc>
+              <a:spcBef>
+                <a:spcPts val="0"/>
+              </a:spcBef>
+              <a:spcAft>
+                <a:spcPts val="0"/>
+              </a:spcAft>
+              <a:buClr>
+                <a:schemeClr val="dk1"/>
+              </a:buClr>
+              <a:buSzPts val="5200"/>
+              <a:buFont typeface="Fira Code"/>
+              <a:buNone/>
+              <a:defRPr sz="5200" b="0" i="0" u="none" strike="noStrike" cap="none">
+                <a:solidFill>
+                  <a:schemeClr val="dk1"/>
                 </a:solidFill>
                 <a:latin typeface="Fira Code"/>
                 <a:ea typeface="Fira Code"/>
@@ -9965,25 +12166,25 @@
                 <a:sym typeface="Fira Code"/>
               </a:defRPr>
             </a:lvl2pPr>
-            <a:lvl3pPr marL="1371600" marR="0" lvl="2" indent="-317500" algn="ctr" rtl="0">
-              <a:lnSpc>
-                <a:spcPct val="100000"/>
-              </a:lnSpc>
-              <a:spcBef>
-                <a:spcPts val="0"/>
-              </a:spcBef>
-              <a:spcAft>
-                <a:spcPts val="0"/>
-              </a:spcAft>
-              <a:buClr>
-                <a:schemeClr val="dk2"/>
-              </a:buClr>
-              <a:buSzPts val="2800"/>
-              <a:buFont typeface="Fira Code"/>
-              <a:buNone/>
-              <a:defRPr sz="2800" b="0" i="0" u="none" strike="noStrike" cap="none">
-                <a:solidFill>
-                  <a:schemeClr val="dk2"/>
+            <a:lvl3pPr marR="0" lvl="2" algn="ctr" rtl="0">
+              <a:lnSpc>
+                <a:spcPct val="100000"/>
+              </a:lnSpc>
+              <a:spcBef>
+                <a:spcPts val="0"/>
+              </a:spcBef>
+              <a:spcAft>
+                <a:spcPts val="0"/>
+              </a:spcAft>
+              <a:buClr>
+                <a:schemeClr val="dk1"/>
+              </a:buClr>
+              <a:buSzPts val="5200"/>
+              <a:buFont typeface="Fira Code"/>
+              <a:buNone/>
+              <a:defRPr sz="5200" b="0" i="0" u="none" strike="noStrike" cap="none">
+                <a:solidFill>
+                  <a:schemeClr val="dk1"/>
                 </a:solidFill>
                 <a:latin typeface="Fira Code"/>
                 <a:ea typeface="Fira Code"/>
@@ -9991,25 +12192,25 @@
                 <a:sym typeface="Fira Code"/>
               </a:defRPr>
             </a:lvl3pPr>
-            <a:lvl4pPr marL="1828800" marR="0" lvl="3" indent="-317500" algn="ctr" rtl="0">
-              <a:lnSpc>
-                <a:spcPct val="100000"/>
-              </a:lnSpc>
-              <a:spcBef>
-                <a:spcPts val="0"/>
-              </a:spcBef>
-              <a:spcAft>
-                <a:spcPts val="0"/>
-              </a:spcAft>
-              <a:buClr>
-                <a:schemeClr val="dk2"/>
-              </a:buClr>
-              <a:buSzPts val="2800"/>
-              <a:buFont typeface="Fira Code"/>
-              <a:buNone/>
-              <a:defRPr sz="2800" b="0" i="0" u="none" strike="noStrike" cap="none">
-                <a:solidFill>
-                  <a:schemeClr val="dk2"/>
+            <a:lvl4pPr marR="0" lvl="3" algn="ctr" rtl="0">
+              <a:lnSpc>
+                <a:spcPct val="100000"/>
+              </a:lnSpc>
+              <a:spcBef>
+                <a:spcPts val="0"/>
+              </a:spcBef>
+              <a:spcAft>
+                <a:spcPts val="0"/>
+              </a:spcAft>
+              <a:buClr>
+                <a:schemeClr val="dk1"/>
+              </a:buClr>
+              <a:buSzPts val="5200"/>
+              <a:buFont typeface="Fira Code"/>
+              <a:buNone/>
+              <a:defRPr sz="5200" b="0" i="0" u="none" strike="noStrike" cap="none">
+                <a:solidFill>
+                  <a:schemeClr val="dk1"/>
                 </a:solidFill>
                 <a:latin typeface="Fira Code"/>
                 <a:ea typeface="Fira Code"/>
@@ -10017,25 +12218,25 @@
                 <a:sym typeface="Fira Code"/>
               </a:defRPr>
             </a:lvl4pPr>
-            <a:lvl5pPr marL="2286000" marR="0" lvl="4" indent="-317500" algn="ctr" rtl="0">
-              <a:lnSpc>
-                <a:spcPct val="100000"/>
-              </a:lnSpc>
-              <a:spcBef>
-                <a:spcPts val="0"/>
-              </a:spcBef>
-              <a:spcAft>
-                <a:spcPts val="0"/>
-              </a:spcAft>
-              <a:buClr>
-                <a:schemeClr val="dk2"/>
-              </a:buClr>
-              <a:buSzPts val="2800"/>
-              <a:buFont typeface="Fira Code"/>
-              <a:buNone/>
-              <a:defRPr sz="2800" b="0" i="0" u="none" strike="noStrike" cap="none">
-                <a:solidFill>
-                  <a:schemeClr val="dk2"/>
+            <a:lvl5pPr marR="0" lvl="4" algn="ctr" rtl="0">
+              <a:lnSpc>
+                <a:spcPct val="100000"/>
+              </a:lnSpc>
+              <a:spcBef>
+                <a:spcPts val="0"/>
+              </a:spcBef>
+              <a:spcAft>
+                <a:spcPts val="0"/>
+              </a:spcAft>
+              <a:buClr>
+                <a:schemeClr val="dk1"/>
+              </a:buClr>
+              <a:buSzPts val="5200"/>
+              <a:buFont typeface="Fira Code"/>
+              <a:buNone/>
+              <a:defRPr sz="5200" b="0" i="0" u="none" strike="noStrike" cap="none">
+                <a:solidFill>
+                  <a:schemeClr val="dk1"/>
                 </a:solidFill>
                 <a:latin typeface="Fira Code"/>
                 <a:ea typeface="Fira Code"/>
@@ -10043,25 +12244,25 @@
                 <a:sym typeface="Fira Code"/>
               </a:defRPr>
             </a:lvl5pPr>
-            <a:lvl6pPr marL="2743200" marR="0" lvl="5" indent="-317500" algn="ctr" rtl="0">
-              <a:lnSpc>
-                <a:spcPct val="100000"/>
-              </a:lnSpc>
-              <a:spcBef>
-                <a:spcPts val="0"/>
-              </a:spcBef>
-              <a:spcAft>
-                <a:spcPts val="0"/>
-              </a:spcAft>
-              <a:buClr>
-                <a:schemeClr val="dk2"/>
-              </a:buClr>
-              <a:buSzPts val="2800"/>
-              <a:buFont typeface="Fira Code"/>
-              <a:buNone/>
-              <a:defRPr sz="2800" b="0" i="0" u="none" strike="noStrike" cap="none">
-                <a:solidFill>
-                  <a:schemeClr val="dk2"/>
+            <a:lvl6pPr marR="0" lvl="5" algn="ctr" rtl="0">
+              <a:lnSpc>
+                <a:spcPct val="100000"/>
+              </a:lnSpc>
+              <a:spcBef>
+                <a:spcPts val="0"/>
+              </a:spcBef>
+              <a:spcAft>
+                <a:spcPts val="0"/>
+              </a:spcAft>
+              <a:buClr>
+                <a:schemeClr val="dk1"/>
+              </a:buClr>
+              <a:buSzPts val="5200"/>
+              <a:buFont typeface="Fira Code"/>
+              <a:buNone/>
+              <a:defRPr sz="5200" b="0" i="0" u="none" strike="noStrike" cap="none">
+                <a:solidFill>
+                  <a:schemeClr val="dk1"/>
                 </a:solidFill>
                 <a:latin typeface="Fira Code"/>
                 <a:ea typeface="Fira Code"/>
@@ -10069,25 +12270,25 @@
                 <a:sym typeface="Fira Code"/>
               </a:defRPr>
             </a:lvl6pPr>
-            <a:lvl7pPr marL="3200400" marR="0" lvl="6" indent="-317500" algn="ctr" rtl="0">
-              <a:lnSpc>
-                <a:spcPct val="100000"/>
-              </a:lnSpc>
-              <a:spcBef>
-                <a:spcPts val="0"/>
-              </a:spcBef>
-              <a:spcAft>
-                <a:spcPts val="0"/>
-              </a:spcAft>
-              <a:buClr>
-                <a:schemeClr val="dk2"/>
-              </a:buClr>
-              <a:buSzPts val="2800"/>
-              <a:buFont typeface="Fira Code"/>
-              <a:buNone/>
-              <a:defRPr sz="2800" b="0" i="0" u="none" strike="noStrike" cap="none">
-                <a:solidFill>
-                  <a:schemeClr val="dk2"/>
+            <a:lvl7pPr marR="0" lvl="6" algn="ctr" rtl="0">
+              <a:lnSpc>
+                <a:spcPct val="100000"/>
+              </a:lnSpc>
+              <a:spcBef>
+                <a:spcPts val="0"/>
+              </a:spcBef>
+              <a:spcAft>
+                <a:spcPts val="0"/>
+              </a:spcAft>
+              <a:buClr>
+                <a:schemeClr val="dk1"/>
+              </a:buClr>
+              <a:buSzPts val="5200"/>
+              <a:buFont typeface="Fira Code"/>
+              <a:buNone/>
+              <a:defRPr sz="5200" b="0" i="0" u="none" strike="noStrike" cap="none">
+                <a:solidFill>
+                  <a:schemeClr val="dk1"/>
                 </a:solidFill>
                 <a:latin typeface="Fira Code"/>
                 <a:ea typeface="Fira Code"/>
@@ -10095,25 +12296,25 @@
                 <a:sym typeface="Fira Code"/>
               </a:defRPr>
             </a:lvl7pPr>
-            <a:lvl8pPr marL="3657600" marR="0" lvl="7" indent="-317500" algn="ctr" rtl="0">
-              <a:lnSpc>
-                <a:spcPct val="100000"/>
-              </a:lnSpc>
-              <a:spcBef>
-                <a:spcPts val="0"/>
-              </a:spcBef>
-              <a:spcAft>
-                <a:spcPts val="0"/>
-              </a:spcAft>
-              <a:buClr>
-                <a:schemeClr val="dk2"/>
-              </a:buClr>
-              <a:buSzPts val="2800"/>
-              <a:buFont typeface="Fira Code"/>
-              <a:buNone/>
-              <a:defRPr sz="2800" b="0" i="0" u="none" strike="noStrike" cap="none">
-                <a:solidFill>
-                  <a:schemeClr val="dk2"/>
+            <a:lvl8pPr marR="0" lvl="7" algn="ctr" rtl="0">
+              <a:lnSpc>
+                <a:spcPct val="100000"/>
+              </a:lnSpc>
+              <a:spcBef>
+                <a:spcPts val="0"/>
+              </a:spcBef>
+              <a:spcAft>
+                <a:spcPts val="0"/>
+              </a:spcAft>
+              <a:buClr>
+                <a:schemeClr val="dk1"/>
+              </a:buClr>
+              <a:buSzPts val="5200"/>
+              <a:buFont typeface="Fira Code"/>
+              <a:buNone/>
+              <a:defRPr sz="5200" b="0" i="0" u="none" strike="noStrike" cap="none">
+                <a:solidFill>
+                  <a:schemeClr val="dk1"/>
                 </a:solidFill>
                 <a:latin typeface="Fira Code"/>
                 <a:ea typeface="Fira Code"/>
@@ -10121,25 +12322,25 @@
                 <a:sym typeface="Fira Code"/>
               </a:defRPr>
             </a:lvl8pPr>
-            <a:lvl9pPr marL="4114800" marR="0" lvl="8" indent="-317500" algn="ctr" rtl="0">
-              <a:lnSpc>
-                <a:spcPct val="100000"/>
-              </a:lnSpc>
-              <a:spcBef>
-                <a:spcPts val="0"/>
-              </a:spcBef>
-              <a:spcAft>
-                <a:spcPts val="0"/>
-              </a:spcAft>
-              <a:buClr>
-                <a:schemeClr val="dk2"/>
-              </a:buClr>
-              <a:buSzPts val="2800"/>
-              <a:buFont typeface="Fira Code"/>
-              <a:buNone/>
-              <a:defRPr sz="2800" b="0" i="0" u="none" strike="noStrike" cap="none">
-                <a:solidFill>
-                  <a:schemeClr val="dk2"/>
+            <a:lvl9pPr marR="0" lvl="8" algn="ctr" rtl="0">
+              <a:lnSpc>
+                <a:spcPct val="100000"/>
+              </a:lnSpc>
+              <a:spcBef>
+                <a:spcPts val="0"/>
+              </a:spcBef>
+              <a:spcAft>
+                <a:spcPts val="0"/>
+              </a:spcAft>
+              <a:buClr>
+                <a:schemeClr val="dk1"/>
+              </a:buClr>
+              <a:buSzPts val="5200"/>
+              <a:buFont typeface="Fira Code"/>
+              <a:buNone/>
+              <a:defRPr sz="5200" b="0" i="0" u="none" strike="noStrike" cap="none">
+                <a:solidFill>
+                  <a:schemeClr val="dk1"/>
                 </a:solidFill>
                 <a:latin typeface="Fira Code"/>
                 <a:ea typeface="Fira Code"/>
@@ -10149,19 +12350,1323 @@
             </a:lvl9pPr>
           </a:lstStyle>
           <a:p>
-            <a:pPr marL="0" indent="0" algn="ctr"/>
             <a:r>
-              <a:rPr lang="en-US" sz="1000"/>
-              <a:t>Random.c</a:t>
+              <a:rPr lang="en-US" sz="2400" dirty="0">
+                <a:solidFill>
+                  <a:schemeClr val="accent2"/>
+                </a:solidFill>
+              </a:rPr>
+              <a:t>Home Work</a:t>
             </a:r>
-            <a:endParaRPr lang="en-US" sz="1000" dirty="0"/>
           </a:p>
         </p:txBody>
       </p:sp>
+      <p:sp>
+        <p:nvSpPr>
+          <p:cNvPr id="4" name="TextBox 3">
+            <a:extLst>
+              <a:ext uri="{FF2B5EF4-FFF2-40B4-BE49-F238E27FC236}">
+                <a16:creationId xmlns:a16="http://schemas.microsoft.com/office/drawing/2014/main" id="{6F31226E-6F79-2ACF-F863-0B8EE3F7328B}"/>
+              </a:ext>
+            </a:extLst>
+          </p:cNvPr>
+          <p:cNvSpPr txBox="1"/>
+          <p:nvPr/>
+        </p:nvSpPr>
+        <p:spPr>
+          <a:xfrm>
+            <a:off x="637344" y="950886"/>
+            <a:ext cx="8308948" cy="2169825"/>
+          </a:xfrm>
+          <a:prstGeom prst="rect">
+            <a:avLst/>
+          </a:prstGeom>
+          <a:noFill/>
+        </p:spPr>
+        <p:txBody>
+          <a:bodyPr wrap="square">
+            <a:spAutoFit/>
+          </a:bodyPr>
+          <a:lstStyle/>
+          <a:p>
+            <a:pPr marL="457200" lvl="1" indent="-171450" algn="just" eaLnBrk="0" fontAlgn="base" hangingPunct="0">
+              <a:spcBef>
+                <a:spcPct val="0"/>
+              </a:spcBef>
+              <a:spcAft>
+                <a:spcPct val="0"/>
+              </a:spcAft>
+              <a:buClrTx/>
+              <a:buFontTx/>
+              <a:buChar char="•"/>
+            </a:pPr>
+            <a:r>
+              <a:rPr lang="en-US" altLang="en-US" sz="1100" dirty="0">
+                <a:solidFill>
+                  <a:schemeClr val="accent3"/>
+                </a:solidFill>
+                <a:latin typeface="Fira Code"/>
+                <a:ea typeface="Fira Code"/>
+                <a:cs typeface="B Nazanin" panose="00000400000000000000" pitchFamily="2" charset="-78"/>
+              </a:rPr>
+              <a:t>Write a C program that:</a:t>
+            </a:r>
+            <a:endParaRPr lang="fa-IR" altLang="en-US" sz="1100" dirty="0">
+              <a:solidFill>
+                <a:schemeClr val="accent3"/>
+              </a:solidFill>
+              <a:latin typeface="Fira Code"/>
+              <a:ea typeface="Fira Code"/>
+              <a:cs typeface="B Nazanin" panose="00000400000000000000" pitchFamily="2" charset="-78"/>
+            </a:endParaRPr>
+          </a:p>
+          <a:p>
+            <a:pPr marL="457200" lvl="1" indent="-171450" algn="just" eaLnBrk="0" fontAlgn="base" hangingPunct="0">
+              <a:spcBef>
+                <a:spcPct val="0"/>
+              </a:spcBef>
+              <a:spcAft>
+                <a:spcPct val="0"/>
+              </a:spcAft>
+              <a:buClrTx/>
+              <a:buFontTx/>
+              <a:buChar char="•"/>
+            </a:pPr>
+            <a:endParaRPr lang="en-US" altLang="en-US" sz="1100" dirty="0">
+              <a:solidFill>
+                <a:schemeClr val="accent3"/>
+              </a:solidFill>
+              <a:latin typeface="Fira Code"/>
+              <a:ea typeface="Fira Code"/>
+              <a:cs typeface="B Nazanin" panose="00000400000000000000" pitchFamily="2" charset="-78"/>
+            </a:endParaRPr>
+          </a:p>
+          <a:p>
+            <a:pPr marL="457200" lvl="1" indent="-171450" algn="just" eaLnBrk="0" fontAlgn="base" hangingPunct="0">
+              <a:spcBef>
+                <a:spcPct val="0"/>
+              </a:spcBef>
+              <a:spcAft>
+                <a:spcPct val="0"/>
+              </a:spcAft>
+              <a:buClrTx/>
+              <a:buFontTx/>
+              <a:buChar char="•"/>
+            </a:pPr>
+            <a:r>
+              <a:rPr lang="en-US" altLang="en-US" sz="1100" dirty="0">
+                <a:solidFill>
+                  <a:schemeClr val="accent3"/>
+                </a:solidFill>
+                <a:latin typeface="Fira Code"/>
+                <a:ea typeface="Fira Code"/>
+                <a:cs typeface="B Nazanin" panose="00000400000000000000" pitchFamily="2" charset="-78"/>
+              </a:rPr>
+              <a:t>Asks the user to enter the lengths of the two perpendicular sides of a right triangle (side1 and side2).</a:t>
+            </a:r>
+            <a:endParaRPr lang="fa-IR" altLang="en-US" sz="1100" dirty="0">
+              <a:solidFill>
+                <a:schemeClr val="accent3"/>
+              </a:solidFill>
+              <a:latin typeface="Fira Code"/>
+              <a:ea typeface="Fira Code"/>
+              <a:cs typeface="B Nazanin" panose="00000400000000000000" pitchFamily="2" charset="-78"/>
+            </a:endParaRPr>
+          </a:p>
+          <a:p>
+            <a:pPr marL="457200" lvl="1" indent="-171450" algn="just" eaLnBrk="0" fontAlgn="base" hangingPunct="0">
+              <a:spcBef>
+                <a:spcPct val="0"/>
+              </a:spcBef>
+              <a:spcAft>
+                <a:spcPct val="0"/>
+              </a:spcAft>
+              <a:buClrTx/>
+              <a:buFontTx/>
+              <a:buChar char="•"/>
+            </a:pPr>
+            <a:endParaRPr lang="en-US" altLang="en-US" sz="1100" dirty="0">
+              <a:solidFill>
+                <a:schemeClr val="accent3"/>
+              </a:solidFill>
+              <a:latin typeface="Fira Code"/>
+              <a:ea typeface="Fira Code"/>
+              <a:cs typeface="B Nazanin" panose="00000400000000000000" pitchFamily="2" charset="-78"/>
+            </a:endParaRPr>
+          </a:p>
+          <a:p>
+            <a:pPr marL="457200" lvl="1" indent="-171450" algn="just" eaLnBrk="0" fontAlgn="base" hangingPunct="0">
+              <a:spcBef>
+                <a:spcPct val="0"/>
+              </a:spcBef>
+              <a:spcAft>
+                <a:spcPct val="0"/>
+              </a:spcAft>
+              <a:buClrTx/>
+              <a:buFontTx/>
+              <a:buChar char="•"/>
+            </a:pPr>
+            <a:r>
+              <a:rPr lang="en-US" altLang="en-US" sz="1100" dirty="0">
+                <a:solidFill>
+                  <a:schemeClr val="accent3"/>
+                </a:solidFill>
+                <a:latin typeface="Fira Code"/>
+                <a:ea typeface="Fira Code"/>
+                <a:cs typeface="B Nazanin" panose="00000400000000000000" pitchFamily="2" charset="-78"/>
+              </a:rPr>
+              <a:t>Calculates the length of the hypotenuse using the built-in function </a:t>
+            </a:r>
+            <a:r>
+              <a:rPr lang="en-US" altLang="en-US" sz="1100" dirty="0" err="1">
+                <a:solidFill>
+                  <a:schemeClr val="accent3"/>
+                </a:solidFill>
+                <a:latin typeface="Fira Code"/>
+                <a:ea typeface="Fira Code"/>
+                <a:cs typeface="B Nazanin" panose="00000400000000000000" pitchFamily="2" charset="-78"/>
+              </a:rPr>
+              <a:t>hypot</a:t>
+            </a:r>
+            <a:r>
+              <a:rPr lang="en-US" altLang="en-US" sz="1100" dirty="0">
+                <a:solidFill>
+                  <a:schemeClr val="accent3"/>
+                </a:solidFill>
+                <a:latin typeface="Fira Code"/>
+                <a:ea typeface="Fira Code"/>
+                <a:cs typeface="B Nazanin" panose="00000400000000000000" pitchFamily="2" charset="-78"/>
+              </a:rPr>
+              <a:t>()</a:t>
+            </a:r>
+            <a:endParaRPr lang="fa-IR" altLang="en-US" sz="1100" dirty="0">
+              <a:solidFill>
+                <a:schemeClr val="accent3"/>
+              </a:solidFill>
+              <a:latin typeface="Fira Code"/>
+              <a:ea typeface="Fira Code"/>
+              <a:cs typeface="B Nazanin" panose="00000400000000000000" pitchFamily="2" charset="-78"/>
+            </a:endParaRPr>
+          </a:p>
+          <a:p>
+            <a:pPr marL="285750" lvl="1" algn="just" eaLnBrk="0" fontAlgn="base" hangingPunct="0">
+              <a:spcBef>
+                <a:spcPct val="0"/>
+              </a:spcBef>
+              <a:spcAft>
+                <a:spcPct val="0"/>
+              </a:spcAft>
+              <a:buClrTx/>
+            </a:pPr>
+            <a:r>
+              <a:rPr lang="en-US" altLang="en-US" sz="1100" dirty="0">
+                <a:solidFill>
+                  <a:schemeClr val="accent3"/>
+                </a:solidFill>
+                <a:latin typeface="Fira Code"/>
+                <a:ea typeface="Fira Code"/>
+                <a:cs typeface="B Nazanin" panose="00000400000000000000" pitchFamily="2" charset="-78"/>
+              </a:rPr>
+              <a:t> </a:t>
+            </a:r>
+            <a:endParaRPr lang="fa-IR" altLang="en-US" sz="1100" dirty="0">
+              <a:solidFill>
+                <a:schemeClr val="accent3"/>
+              </a:solidFill>
+              <a:latin typeface="Fira Code"/>
+              <a:ea typeface="Fira Code"/>
+              <a:cs typeface="B Nazanin" panose="00000400000000000000" pitchFamily="2" charset="-78"/>
+            </a:endParaRPr>
+          </a:p>
+          <a:p>
+            <a:pPr marL="457200" lvl="1" indent="-171450" algn="just" eaLnBrk="0" fontAlgn="base" hangingPunct="0">
+              <a:spcBef>
+                <a:spcPct val="0"/>
+              </a:spcBef>
+              <a:spcAft>
+                <a:spcPct val="0"/>
+              </a:spcAft>
+              <a:buClrTx/>
+              <a:buFontTx/>
+              <a:buChar char="•"/>
+            </a:pPr>
+            <a:r>
+              <a:rPr lang="en-US" altLang="en-US" sz="1100" dirty="0">
+                <a:solidFill>
+                  <a:schemeClr val="accent3"/>
+                </a:solidFill>
+                <a:latin typeface="Fira Code"/>
+                <a:ea typeface="Fira Code"/>
+                <a:cs typeface="B Nazanin" panose="00000400000000000000" pitchFamily="2" charset="-78"/>
+              </a:rPr>
+              <a:t>Displays the result with two decimal places.</a:t>
+            </a:r>
+            <a:endParaRPr lang="fa-IR" altLang="en-US" sz="1100" dirty="0">
+              <a:solidFill>
+                <a:schemeClr val="accent3"/>
+              </a:solidFill>
+              <a:latin typeface="Fira Code"/>
+              <a:ea typeface="Fira Code"/>
+              <a:cs typeface="B Nazanin" panose="00000400000000000000" pitchFamily="2" charset="-78"/>
+            </a:endParaRPr>
+          </a:p>
+          <a:p>
+            <a:pPr marL="457200" lvl="1" indent="-171450" algn="just" eaLnBrk="0" fontAlgn="base" hangingPunct="0">
+              <a:spcBef>
+                <a:spcPct val="0"/>
+              </a:spcBef>
+              <a:spcAft>
+                <a:spcPct val="0"/>
+              </a:spcAft>
+              <a:buClrTx/>
+              <a:buFontTx/>
+              <a:buChar char="•"/>
+            </a:pPr>
+            <a:endParaRPr lang="fa-IR" altLang="en-US" sz="1100" dirty="0">
+              <a:solidFill>
+                <a:schemeClr val="accent3"/>
+              </a:solidFill>
+              <a:latin typeface="Fira Code"/>
+              <a:ea typeface="Fira Code"/>
+              <a:cs typeface="B Nazanin" panose="00000400000000000000" pitchFamily="2" charset="-78"/>
+            </a:endParaRPr>
+          </a:p>
+          <a:p>
+            <a:pPr marL="457200" lvl="1" indent="-171450" algn="just" eaLnBrk="0" fontAlgn="base" hangingPunct="0">
+              <a:spcBef>
+                <a:spcPct val="0"/>
+              </a:spcBef>
+              <a:spcAft>
+                <a:spcPct val="0"/>
+              </a:spcAft>
+              <a:buClrTx/>
+              <a:buFontTx/>
+              <a:buChar char="•"/>
+            </a:pPr>
+            <a:r>
+              <a:rPr lang="en-US" sz="1100" dirty="0">
+                <a:solidFill>
+                  <a:schemeClr val="accent3"/>
+                </a:solidFill>
+                <a:latin typeface="Fira Code"/>
+                <a:ea typeface="Fira Code"/>
+                <a:cs typeface="B Nazanin" panose="00000400000000000000" pitchFamily="2" charset="-78"/>
+              </a:rPr>
+              <a:t>Run your program for the table below.</a:t>
+            </a:r>
+            <a:endParaRPr lang="fa-IR" altLang="en-US" sz="1100" dirty="0">
+              <a:solidFill>
+                <a:schemeClr val="accent3"/>
+              </a:solidFill>
+              <a:latin typeface="Fira Code"/>
+              <a:ea typeface="Fira Code"/>
+              <a:cs typeface="B Nazanin" panose="00000400000000000000" pitchFamily="2" charset="-78"/>
+            </a:endParaRPr>
+          </a:p>
+          <a:p>
+            <a:pPr marL="457200" lvl="1" indent="-171450" algn="just" eaLnBrk="0" fontAlgn="base" hangingPunct="0">
+              <a:spcBef>
+                <a:spcPct val="0"/>
+              </a:spcBef>
+              <a:spcAft>
+                <a:spcPct val="0"/>
+              </a:spcAft>
+              <a:buClrTx/>
+              <a:buFontTx/>
+              <a:buChar char="•"/>
+            </a:pPr>
+            <a:endParaRPr lang="en-US" altLang="en-US" sz="1100" dirty="0">
+              <a:solidFill>
+                <a:schemeClr val="accent3"/>
+              </a:solidFill>
+              <a:latin typeface="Fira Code"/>
+              <a:ea typeface="Fira Code"/>
+              <a:cs typeface="B Nazanin" panose="00000400000000000000" pitchFamily="2" charset="-78"/>
+            </a:endParaRPr>
+          </a:p>
+          <a:p>
+            <a:pPr lvl="0" eaLnBrk="0" fontAlgn="base" hangingPunct="0">
+              <a:spcBef>
+                <a:spcPct val="0"/>
+              </a:spcBef>
+              <a:spcAft>
+                <a:spcPct val="0"/>
+              </a:spcAft>
+              <a:buClrTx/>
+            </a:pPr>
+            <a:endParaRPr lang="en-US" altLang="en-US" sz="1100" dirty="0">
+              <a:solidFill>
+                <a:schemeClr val="accent3"/>
+              </a:solidFill>
+              <a:latin typeface="Arial" panose="020B0604020202020204" pitchFamily="34" charset="0"/>
+            </a:endParaRPr>
+          </a:p>
+        </p:txBody>
+      </p:sp>
+      <p:sp>
+        <p:nvSpPr>
+          <p:cNvPr id="6" name="Google Shape;473;p28">
+            <a:extLst>
+              <a:ext uri="{FF2B5EF4-FFF2-40B4-BE49-F238E27FC236}">
+                <a16:creationId xmlns:a16="http://schemas.microsoft.com/office/drawing/2014/main" id="{27D7923B-9E1B-B91A-362D-D18FF2A0516B}"/>
+              </a:ext>
+            </a:extLst>
+          </p:cNvPr>
+          <p:cNvSpPr txBox="1">
+            <a:spLocks/>
+          </p:cNvSpPr>
+          <p:nvPr/>
+        </p:nvSpPr>
+        <p:spPr>
+          <a:xfrm>
+            <a:off x="729503" y="4701324"/>
+            <a:ext cx="4865100" cy="357300"/>
+          </a:xfrm>
+          <a:prstGeom prst="rect">
+            <a:avLst/>
+          </a:prstGeom>
+          <a:noFill/>
+          <a:ln>
+            <a:noFill/>
+          </a:ln>
+        </p:spPr>
+        <p:txBody>
+          <a:bodyPr spcFirstLastPara="1" wrap="square" lIns="91425" tIns="91425" rIns="91425" bIns="91425" anchor="ctr" anchorCtr="0">
+            <a:noAutofit/>
+          </a:bodyPr>
+          <a:lstStyle>
+            <a:defPPr marR="0" lvl="0" algn="l" rtl="0">
+              <a:lnSpc>
+                <a:spcPct val="100000"/>
+              </a:lnSpc>
+              <a:spcBef>
+                <a:spcPts val="0"/>
+              </a:spcBef>
+              <a:spcAft>
+                <a:spcPts val="0"/>
+              </a:spcAft>
+            </a:defPPr>
+            <a:lvl1pPr marL="457200" marR="0" lvl="0" indent="-317500" algn="l" rtl="0">
+              <a:lnSpc>
+                <a:spcPct val="100000"/>
+              </a:lnSpc>
+              <a:spcBef>
+                <a:spcPts val="0"/>
+              </a:spcBef>
+              <a:spcAft>
+                <a:spcPts val="0"/>
+              </a:spcAft>
+              <a:buClr>
+                <a:schemeClr val="dk2"/>
+              </a:buClr>
+              <a:buSzPts val="1400"/>
+              <a:buFont typeface="Fira Code"/>
+              <a:buChar char="●"/>
+              <a:defRPr sz="1400" b="0" i="0" u="none" strike="noStrike" cap="none">
+                <a:solidFill>
+                  <a:schemeClr val="dk2"/>
+                </a:solidFill>
+                <a:latin typeface="Fira Code"/>
+                <a:ea typeface="Fira Code"/>
+                <a:cs typeface="Fira Code"/>
+                <a:sym typeface="Fira Code"/>
+              </a:defRPr>
+            </a:lvl1pPr>
+            <a:lvl2pPr marL="914400" marR="0" lvl="1" indent="-317500" algn="l" rtl="0">
+              <a:lnSpc>
+                <a:spcPct val="100000"/>
+              </a:lnSpc>
+              <a:spcBef>
+                <a:spcPts val="0"/>
+              </a:spcBef>
+              <a:spcAft>
+                <a:spcPts val="0"/>
+              </a:spcAft>
+              <a:buClr>
+                <a:schemeClr val="dk2"/>
+              </a:buClr>
+              <a:buSzPts val="1400"/>
+              <a:buFont typeface="Fira Code"/>
+              <a:buChar char="○"/>
+              <a:defRPr sz="1400" b="0" i="0" u="none" strike="noStrike" cap="none">
+                <a:solidFill>
+                  <a:schemeClr val="dk2"/>
+                </a:solidFill>
+                <a:latin typeface="Fira Code"/>
+                <a:ea typeface="Fira Code"/>
+                <a:cs typeface="Fira Code"/>
+                <a:sym typeface="Fira Code"/>
+              </a:defRPr>
+            </a:lvl2pPr>
+            <a:lvl3pPr marL="1371600" marR="0" lvl="2" indent="-317500" algn="l" rtl="0">
+              <a:lnSpc>
+                <a:spcPct val="100000"/>
+              </a:lnSpc>
+              <a:spcBef>
+                <a:spcPts val="0"/>
+              </a:spcBef>
+              <a:spcAft>
+                <a:spcPts val="0"/>
+              </a:spcAft>
+              <a:buClr>
+                <a:schemeClr val="dk2"/>
+              </a:buClr>
+              <a:buSzPts val="1400"/>
+              <a:buFont typeface="Fira Code"/>
+              <a:buChar char="■"/>
+              <a:defRPr sz="1400" b="0" i="0" u="none" strike="noStrike" cap="none">
+                <a:solidFill>
+                  <a:schemeClr val="dk2"/>
+                </a:solidFill>
+                <a:latin typeface="Fira Code"/>
+                <a:ea typeface="Fira Code"/>
+                <a:cs typeface="Fira Code"/>
+                <a:sym typeface="Fira Code"/>
+              </a:defRPr>
+            </a:lvl3pPr>
+            <a:lvl4pPr marL="1828800" marR="0" lvl="3" indent="-317500" algn="l" rtl="0">
+              <a:lnSpc>
+                <a:spcPct val="100000"/>
+              </a:lnSpc>
+              <a:spcBef>
+                <a:spcPts val="0"/>
+              </a:spcBef>
+              <a:spcAft>
+                <a:spcPts val="0"/>
+              </a:spcAft>
+              <a:buClr>
+                <a:schemeClr val="dk2"/>
+              </a:buClr>
+              <a:buSzPts val="1400"/>
+              <a:buFont typeface="Fira Code"/>
+              <a:buChar char="●"/>
+              <a:defRPr sz="1400" b="0" i="0" u="none" strike="noStrike" cap="none">
+                <a:solidFill>
+                  <a:schemeClr val="dk2"/>
+                </a:solidFill>
+                <a:latin typeface="Fira Code"/>
+                <a:ea typeface="Fira Code"/>
+                <a:cs typeface="Fira Code"/>
+                <a:sym typeface="Fira Code"/>
+              </a:defRPr>
+            </a:lvl4pPr>
+            <a:lvl5pPr marL="2286000" marR="0" lvl="4" indent="-317500" algn="l" rtl="0">
+              <a:lnSpc>
+                <a:spcPct val="100000"/>
+              </a:lnSpc>
+              <a:spcBef>
+                <a:spcPts val="0"/>
+              </a:spcBef>
+              <a:spcAft>
+                <a:spcPts val="0"/>
+              </a:spcAft>
+              <a:buClr>
+                <a:schemeClr val="dk2"/>
+              </a:buClr>
+              <a:buSzPts val="1400"/>
+              <a:buFont typeface="Fira Code"/>
+              <a:buChar char="○"/>
+              <a:defRPr sz="1400" b="0" i="0" u="none" strike="noStrike" cap="none">
+                <a:solidFill>
+                  <a:schemeClr val="dk2"/>
+                </a:solidFill>
+                <a:latin typeface="Fira Code"/>
+                <a:ea typeface="Fira Code"/>
+                <a:cs typeface="Fira Code"/>
+                <a:sym typeface="Fira Code"/>
+              </a:defRPr>
+            </a:lvl5pPr>
+            <a:lvl6pPr marL="2743200" marR="0" lvl="5" indent="-317500" algn="l" rtl="0">
+              <a:lnSpc>
+                <a:spcPct val="100000"/>
+              </a:lnSpc>
+              <a:spcBef>
+                <a:spcPts val="0"/>
+              </a:spcBef>
+              <a:spcAft>
+                <a:spcPts val="0"/>
+              </a:spcAft>
+              <a:buClr>
+                <a:schemeClr val="dk2"/>
+              </a:buClr>
+              <a:buSzPts val="1400"/>
+              <a:buFont typeface="Fira Code"/>
+              <a:buChar char="■"/>
+              <a:defRPr sz="1400" b="0" i="0" u="none" strike="noStrike" cap="none">
+                <a:solidFill>
+                  <a:schemeClr val="dk2"/>
+                </a:solidFill>
+                <a:latin typeface="Fira Code"/>
+                <a:ea typeface="Fira Code"/>
+                <a:cs typeface="Fira Code"/>
+                <a:sym typeface="Fira Code"/>
+              </a:defRPr>
+            </a:lvl6pPr>
+            <a:lvl7pPr marL="3200400" marR="0" lvl="6" indent="-317500" algn="l" rtl="0">
+              <a:lnSpc>
+                <a:spcPct val="100000"/>
+              </a:lnSpc>
+              <a:spcBef>
+                <a:spcPts val="0"/>
+              </a:spcBef>
+              <a:spcAft>
+                <a:spcPts val="0"/>
+              </a:spcAft>
+              <a:buClr>
+                <a:schemeClr val="dk2"/>
+              </a:buClr>
+              <a:buSzPts val="1400"/>
+              <a:buFont typeface="Fira Code"/>
+              <a:buChar char="●"/>
+              <a:defRPr sz="1400" b="0" i="0" u="none" strike="noStrike" cap="none">
+                <a:solidFill>
+                  <a:schemeClr val="dk2"/>
+                </a:solidFill>
+                <a:latin typeface="Fira Code"/>
+                <a:ea typeface="Fira Code"/>
+                <a:cs typeface="Fira Code"/>
+                <a:sym typeface="Fira Code"/>
+              </a:defRPr>
+            </a:lvl7pPr>
+            <a:lvl8pPr marL="3657600" marR="0" lvl="7" indent="-317500" algn="l" rtl="0">
+              <a:lnSpc>
+                <a:spcPct val="100000"/>
+              </a:lnSpc>
+              <a:spcBef>
+                <a:spcPts val="0"/>
+              </a:spcBef>
+              <a:spcAft>
+                <a:spcPts val="0"/>
+              </a:spcAft>
+              <a:buClr>
+                <a:schemeClr val="dk2"/>
+              </a:buClr>
+              <a:buSzPts val="1400"/>
+              <a:buFont typeface="Fira Code"/>
+              <a:buChar char="○"/>
+              <a:defRPr sz="1400" b="0" i="0" u="none" strike="noStrike" cap="none">
+                <a:solidFill>
+                  <a:schemeClr val="dk2"/>
+                </a:solidFill>
+                <a:latin typeface="Fira Code"/>
+                <a:ea typeface="Fira Code"/>
+                <a:cs typeface="Fira Code"/>
+                <a:sym typeface="Fira Code"/>
+              </a:defRPr>
+            </a:lvl8pPr>
+            <a:lvl9pPr marL="4114800" marR="0" lvl="8" indent="-317500" algn="l" rtl="0">
+              <a:lnSpc>
+                <a:spcPct val="100000"/>
+              </a:lnSpc>
+              <a:spcBef>
+                <a:spcPts val="0"/>
+              </a:spcBef>
+              <a:spcAft>
+                <a:spcPts val="0"/>
+              </a:spcAft>
+              <a:buClr>
+                <a:schemeClr val="dk2"/>
+              </a:buClr>
+              <a:buSzPts val="1400"/>
+              <a:buFont typeface="Fira Code"/>
+              <a:buChar char="■"/>
+              <a:defRPr sz="1400" b="0" i="0" u="none" strike="noStrike" cap="none">
+                <a:solidFill>
+                  <a:schemeClr val="dk2"/>
+                </a:solidFill>
+                <a:latin typeface="Fira Code"/>
+                <a:ea typeface="Fira Code"/>
+                <a:cs typeface="Fira Code"/>
+                <a:sym typeface="Fira Code"/>
+              </a:defRPr>
+            </a:lvl9pPr>
+          </a:lstStyle>
+          <a:p>
+            <a:pPr marL="0" indent="0">
+              <a:buFont typeface="Fira Code"/>
+              <a:buNone/>
+            </a:pPr>
+            <a:r>
+              <a:rPr lang="en-US" dirty="0">
+                <a:solidFill>
+                  <a:schemeClr val="accent3"/>
+                </a:solidFill>
+              </a:rPr>
+              <a:t>Programming Language Lab</a:t>
+            </a:r>
+          </a:p>
+        </p:txBody>
+      </p:sp>
+      <p:sp>
+        <p:nvSpPr>
+          <p:cNvPr id="7" name="Google Shape;473;p28">
+            <a:extLst>
+              <a:ext uri="{FF2B5EF4-FFF2-40B4-BE49-F238E27FC236}">
+                <a16:creationId xmlns:a16="http://schemas.microsoft.com/office/drawing/2014/main" id="{E04F1622-1905-2CA2-F30C-23BEBD4FF94D}"/>
+              </a:ext>
+            </a:extLst>
+          </p:cNvPr>
+          <p:cNvSpPr txBox="1">
+            <a:spLocks/>
+          </p:cNvSpPr>
+          <p:nvPr/>
+        </p:nvSpPr>
+        <p:spPr>
+          <a:xfrm>
+            <a:off x="8433851" y="4694675"/>
+            <a:ext cx="438300" cy="357300"/>
+          </a:xfrm>
+          <a:prstGeom prst="rect">
+            <a:avLst/>
+          </a:prstGeom>
+          <a:noFill/>
+          <a:ln>
+            <a:noFill/>
+          </a:ln>
+        </p:spPr>
+        <p:txBody>
+          <a:bodyPr spcFirstLastPara="1" wrap="square" lIns="91425" tIns="91425" rIns="91425" bIns="91425" anchor="ctr" anchorCtr="0">
+            <a:noAutofit/>
+          </a:bodyPr>
+          <a:lstStyle>
+            <a:defPPr marR="0" lvl="0" algn="l" rtl="0">
+              <a:lnSpc>
+                <a:spcPct val="100000"/>
+              </a:lnSpc>
+              <a:spcBef>
+                <a:spcPts val="0"/>
+              </a:spcBef>
+              <a:spcAft>
+                <a:spcPts val="0"/>
+              </a:spcAft>
+            </a:defPPr>
+            <a:lvl1pPr marL="457200" marR="0" lvl="0" indent="-317500" algn="l" rtl="0">
+              <a:lnSpc>
+                <a:spcPct val="100000"/>
+              </a:lnSpc>
+              <a:spcBef>
+                <a:spcPts val="0"/>
+              </a:spcBef>
+              <a:spcAft>
+                <a:spcPts val="0"/>
+              </a:spcAft>
+              <a:buClr>
+                <a:schemeClr val="dk2"/>
+              </a:buClr>
+              <a:buSzPts val="1400"/>
+              <a:buFont typeface="Fira Code"/>
+              <a:buChar char="●"/>
+              <a:defRPr sz="1400" b="0" i="0" u="none" strike="noStrike" cap="none">
+                <a:solidFill>
+                  <a:schemeClr val="dk2"/>
+                </a:solidFill>
+                <a:latin typeface="Fira Code"/>
+                <a:ea typeface="Fira Code"/>
+                <a:cs typeface="Fira Code"/>
+                <a:sym typeface="Fira Code"/>
+              </a:defRPr>
+            </a:lvl1pPr>
+            <a:lvl2pPr marL="914400" marR="0" lvl="1" indent="-317500" algn="l" rtl="0">
+              <a:lnSpc>
+                <a:spcPct val="100000"/>
+              </a:lnSpc>
+              <a:spcBef>
+                <a:spcPts val="0"/>
+              </a:spcBef>
+              <a:spcAft>
+                <a:spcPts val="0"/>
+              </a:spcAft>
+              <a:buClr>
+                <a:schemeClr val="dk2"/>
+              </a:buClr>
+              <a:buSzPts val="1400"/>
+              <a:buFont typeface="Fira Code"/>
+              <a:buChar char="○"/>
+              <a:defRPr sz="1400" b="0" i="0" u="none" strike="noStrike" cap="none">
+                <a:solidFill>
+                  <a:schemeClr val="dk2"/>
+                </a:solidFill>
+                <a:latin typeface="Fira Code"/>
+                <a:ea typeface="Fira Code"/>
+                <a:cs typeface="Fira Code"/>
+                <a:sym typeface="Fira Code"/>
+              </a:defRPr>
+            </a:lvl2pPr>
+            <a:lvl3pPr marL="1371600" marR="0" lvl="2" indent="-317500" algn="l" rtl="0">
+              <a:lnSpc>
+                <a:spcPct val="100000"/>
+              </a:lnSpc>
+              <a:spcBef>
+                <a:spcPts val="0"/>
+              </a:spcBef>
+              <a:spcAft>
+                <a:spcPts val="0"/>
+              </a:spcAft>
+              <a:buClr>
+                <a:schemeClr val="dk2"/>
+              </a:buClr>
+              <a:buSzPts val="1400"/>
+              <a:buFont typeface="Fira Code"/>
+              <a:buChar char="■"/>
+              <a:defRPr sz="1400" b="0" i="0" u="none" strike="noStrike" cap="none">
+                <a:solidFill>
+                  <a:schemeClr val="dk2"/>
+                </a:solidFill>
+                <a:latin typeface="Fira Code"/>
+                <a:ea typeface="Fira Code"/>
+                <a:cs typeface="Fira Code"/>
+                <a:sym typeface="Fira Code"/>
+              </a:defRPr>
+            </a:lvl3pPr>
+            <a:lvl4pPr marL="1828800" marR="0" lvl="3" indent="-317500" algn="l" rtl="0">
+              <a:lnSpc>
+                <a:spcPct val="100000"/>
+              </a:lnSpc>
+              <a:spcBef>
+                <a:spcPts val="0"/>
+              </a:spcBef>
+              <a:spcAft>
+                <a:spcPts val="0"/>
+              </a:spcAft>
+              <a:buClr>
+                <a:schemeClr val="dk2"/>
+              </a:buClr>
+              <a:buSzPts val="1400"/>
+              <a:buFont typeface="Fira Code"/>
+              <a:buChar char="●"/>
+              <a:defRPr sz="1400" b="0" i="0" u="none" strike="noStrike" cap="none">
+                <a:solidFill>
+                  <a:schemeClr val="dk2"/>
+                </a:solidFill>
+                <a:latin typeface="Fira Code"/>
+                <a:ea typeface="Fira Code"/>
+                <a:cs typeface="Fira Code"/>
+                <a:sym typeface="Fira Code"/>
+              </a:defRPr>
+            </a:lvl4pPr>
+            <a:lvl5pPr marL="2286000" marR="0" lvl="4" indent="-317500" algn="l" rtl="0">
+              <a:lnSpc>
+                <a:spcPct val="100000"/>
+              </a:lnSpc>
+              <a:spcBef>
+                <a:spcPts val="0"/>
+              </a:spcBef>
+              <a:spcAft>
+                <a:spcPts val="0"/>
+              </a:spcAft>
+              <a:buClr>
+                <a:schemeClr val="dk2"/>
+              </a:buClr>
+              <a:buSzPts val="1400"/>
+              <a:buFont typeface="Fira Code"/>
+              <a:buChar char="○"/>
+              <a:defRPr sz="1400" b="0" i="0" u="none" strike="noStrike" cap="none">
+                <a:solidFill>
+                  <a:schemeClr val="dk2"/>
+                </a:solidFill>
+                <a:latin typeface="Fira Code"/>
+                <a:ea typeface="Fira Code"/>
+                <a:cs typeface="Fira Code"/>
+                <a:sym typeface="Fira Code"/>
+              </a:defRPr>
+            </a:lvl5pPr>
+            <a:lvl6pPr marL="2743200" marR="0" lvl="5" indent="-317500" algn="l" rtl="0">
+              <a:lnSpc>
+                <a:spcPct val="100000"/>
+              </a:lnSpc>
+              <a:spcBef>
+                <a:spcPts val="0"/>
+              </a:spcBef>
+              <a:spcAft>
+                <a:spcPts val="0"/>
+              </a:spcAft>
+              <a:buClr>
+                <a:schemeClr val="dk2"/>
+              </a:buClr>
+              <a:buSzPts val="1400"/>
+              <a:buFont typeface="Fira Code"/>
+              <a:buChar char="■"/>
+              <a:defRPr sz="1400" b="0" i="0" u="none" strike="noStrike" cap="none">
+                <a:solidFill>
+                  <a:schemeClr val="dk2"/>
+                </a:solidFill>
+                <a:latin typeface="Fira Code"/>
+                <a:ea typeface="Fira Code"/>
+                <a:cs typeface="Fira Code"/>
+                <a:sym typeface="Fira Code"/>
+              </a:defRPr>
+            </a:lvl6pPr>
+            <a:lvl7pPr marL="3200400" marR="0" lvl="6" indent="-317500" algn="l" rtl="0">
+              <a:lnSpc>
+                <a:spcPct val="100000"/>
+              </a:lnSpc>
+              <a:spcBef>
+                <a:spcPts val="0"/>
+              </a:spcBef>
+              <a:spcAft>
+                <a:spcPts val="0"/>
+              </a:spcAft>
+              <a:buClr>
+                <a:schemeClr val="dk2"/>
+              </a:buClr>
+              <a:buSzPts val="1400"/>
+              <a:buFont typeface="Fira Code"/>
+              <a:buChar char="●"/>
+              <a:defRPr sz="1400" b="0" i="0" u="none" strike="noStrike" cap="none">
+                <a:solidFill>
+                  <a:schemeClr val="dk2"/>
+                </a:solidFill>
+                <a:latin typeface="Fira Code"/>
+                <a:ea typeface="Fira Code"/>
+                <a:cs typeface="Fira Code"/>
+                <a:sym typeface="Fira Code"/>
+              </a:defRPr>
+            </a:lvl7pPr>
+            <a:lvl8pPr marL="3657600" marR="0" lvl="7" indent="-317500" algn="l" rtl="0">
+              <a:lnSpc>
+                <a:spcPct val="100000"/>
+              </a:lnSpc>
+              <a:spcBef>
+                <a:spcPts val="0"/>
+              </a:spcBef>
+              <a:spcAft>
+                <a:spcPts val="0"/>
+              </a:spcAft>
+              <a:buClr>
+                <a:schemeClr val="dk2"/>
+              </a:buClr>
+              <a:buSzPts val="1400"/>
+              <a:buFont typeface="Fira Code"/>
+              <a:buChar char="○"/>
+              <a:defRPr sz="1400" b="0" i="0" u="none" strike="noStrike" cap="none">
+                <a:solidFill>
+                  <a:schemeClr val="dk2"/>
+                </a:solidFill>
+                <a:latin typeface="Fira Code"/>
+                <a:ea typeface="Fira Code"/>
+                <a:cs typeface="Fira Code"/>
+                <a:sym typeface="Fira Code"/>
+              </a:defRPr>
+            </a:lvl8pPr>
+            <a:lvl9pPr marL="4114800" marR="0" lvl="8" indent="-317500" algn="l" rtl="0">
+              <a:lnSpc>
+                <a:spcPct val="100000"/>
+              </a:lnSpc>
+              <a:spcBef>
+                <a:spcPts val="0"/>
+              </a:spcBef>
+              <a:spcAft>
+                <a:spcPts val="0"/>
+              </a:spcAft>
+              <a:buClr>
+                <a:schemeClr val="dk2"/>
+              </a:buClr>
+              <a:buSzPts val="1400"/>
+              <a:buFont typeface="Fira Code"/>
+              <a:buChar char="■"/>
+              <a:defRPr sz="1400" b="0" i="0" u="none" strike="noStrike" cap="none">
+                <a:solidFill>
+                  <a:schemeClr val="dk2"/>
+                </a:solidFill>
+                <a:latin typeface="Fira Code"/>
+                <a:ea typeface="Fira Code"/>
+                <a:cs typeface="Fira Code"/>
+                <a:sym typeface="Fira Code"/>
+              </a:defRPr>
+            </a:lvl9pPr>
+          </a:lstStyle>
+          <a:p>
+            <a:pPr marL="0" indent="0">
+              <a:buFont typeface="Fira Code"/>
+              <a:buNone/>
+            </a:pPr>
+            <a:r>
+              <a:rPr lang="en" sz="1100" dirty="0">
+                <a:solidFill>
+                  <a:schemeClr val="accent3"/>
+                </a:solidFill>
+              </a:rPr>
+              <a:t>1</a:t>
+            </a:r>
+            <a:r>
+              <a:rPr lang="fa-IR" sz="1100" dirty="0">
+                <a:solidFill>
+                  <a:schemeClr val="accent3"/>
+                </a:solidFill>
+              </a:rPr>
+              <a:t>3</a:t>
+            </a:r>
+            <a:endParaRPr lang="en" dirty="0">
+              <a:solidFill>
+                <a:schemeClr val="accent3"/>
+              </a:solidFill>
+            </a:endParaRPr>
+          </a:p>
+        </p:txBody>
+      </p:sp>
+      <p:graphicFrame>
+        <p:nvGraphicFramePr>
+          <p:cNvPr id="3" name="Table 2">
+            <a:extLst>
+              <a:ext uri="{FF2B5EF4-FFF2-40B4-BE49-F238E27FC236}">
+                <a16:creationId xmlns:a16="http://schemas.microsoft.com/office/drawing/2014/main" id="{C90EB270-AF77-52BD-FC6D-6C1EBD7FE2BE}"/>
+              </a:ext>
+            </a:extLst>
+          </p:cNvPr>
+          <p:cNvGraphicFramePr>
+            <a:graphicFrameLocks noGrp="1"/>
+          </p:cNvGraphicFramePr>
+          <p:nvPr>
+            <p:extLst>
+              <p:ext uri="{D42A27DB-BD31-4B8C-83A1-F6EECF244321}">
+                <p14:modId xmlns:p14="http://schemas.microsoft.com/office/powerpoint/2010/main" val="4147740634"/>
+              </p:ext>
+            </p:extLst>
+          </p:nvPr>
+        </p:nvGraphicFramePr>
+        <p:xfrm>
+          <a:off x="1676400" y="2887741"/>
+          <a:ext cx="6096000" cy="1483360"/>
+        </p:xfrm>
+        <a:graphic>
+          <a:graphicData uri="http://schemas.openxmlformats.org/drawingml/2006/table">
+            <a:tbl>
+              <a:tblPr firstRow="1" bandRow="1">
+                <a:tableStyleId>{4BEAB1D1-4E42-4361-B4FD-13862715D387}</a:tableStyleId>
+              </a:tblPr>
+              <a:tblGrid>
+                <a:gridCol w="906162">
+                  <a:extLst>
+                    <a:ext uri="{9D8B030D-6E8A-4147-A177-3AD203B41FA5}">
+                      <a16:colId xmlns:a16="http://schemas.microsoft.com/office/drawing/2014/main" val="2993446251"/>
+                    </a:ext>
+                  </a:extLst>
+                </a:gridCol>
+                <a:gridCol w="2681416">
+                  <a:extLst>
+                    <a:ext uri="{9D8B030D-6E8A-4147-A177-3AD203B41FA5}">
+                      <a16:colId xmlns:a16="http://schemas.microsoft.com/office/drawing/2014/main" val="2961175289"/>
+                    </a:ext>
+                  </a:extLst>
+                </a:gridCol>
+                <a:gridCol w="2508422">
+                  <a:extLst>
+                    <a:ext uri="{9D8B030D-6E8A-4147-A177-3AD203B41FA5}">
+                      <a16:colId xmlns:a16="http://schemas.microsoft.com/office/drawing/2014/main" val="3312397804"/>
+                    </a:ext>
+                  </a:extLst>
+                </a:gridCol>
+              </a:tblGrid>
+              <a:tr h="370840">
+                <a:tc>
+                  <a:txBody>
+                    <a:bodyPr/>
+                    <a:lstStyle/>
+                    <a:p>
+                      <a:pPr algn="ctr"/>
+                      <a:r>
+                        <a:rPr lang="en-US" dirty="0">
+                          <a:solidFill>
+                            <a:schemeClr val="accent3"/>
+                          </a:solidFill>
+                        </a:rPr>
+                        <a:t>Triangle</a:t>
+                      </a:r>
+                    </a:p>
+                  </a:txBody>
+                  <a:tcPr/>
+                </a:tc>
+                <a:tc>
+                  <a:txBody>
+                    <a:bodyPr/>
+                    <a:lstStyle/>
+                    <a:p>
+                      <a:pPr algn="ctr"/>
+                      <a:r>
+                        <a:rPr lang="en-US" dirty="0">
+                          <a:solidFill>
+                            <a:schemeClr val="accent3"/>
+                          </a:solidFill>
+                        </a:rPr>
+                        <a:t>Side 1</a:t>
+                      </a:r>
+                    </a:p>
+                  </a:txBody>
+                  <a:tcPr/>
+                </a:tc>
+                <a:tc>
+                  <a:txBody>
+                    <a:bodyPr/>
+                    <a:lstStyle/>
+                    <a:p>
+                      <a:pPr algn="ctr"/>
+                      <a:r>
+                        <a:rPr lang="en-US" dirty="0">
+                          <a:solidFill>
+                            <a:schemeClr val="accent3"/>
+                          </a:solidFill>
+                        </a:rPr>
+                        <a:t>Side </a:t>
+                      </a:r>
+                      <a:r>
+                        <a:rPr lang="fa-IR" dirty="0">
+                          <a:solidFill>
+                            <a:schemeClr val="accent3"/>
+                          </a:solidFill>
+                        </a:rPr>
+                        <a:t>2</a:t>
+                      </a:r>
+                      <a:endParaRPr lang="en-US" dirty="0">
+                        <a:solidFill>
+                          <a:schemeClr val="accent3"/>
+                        </a:solidFill>
+                      </a:endParaRPr>
+                    </a:p>
+                  </a:txBody>
+                  <a:tcPr/>
+                </a:tc>
+                <a:extLst>
+                  <a:ext uri="{0D108BD9-81ED-4DB2-BD59-A6C34878D82A}">
+                    <a16:rowId xmlns:a16="http://schemas.microsoft.com/office/drawing/2014/main" val="1072876222"/>
+                  </a:ext>
+                </a:extLst>
+              </a:tr>
+              <a:tr h="370840">
+                <a:tc>
+                  <a:txBody>
+                    <a:bodyPr/>
+                    <a:lstStyle/>
+                    <a:p>
+                      <a:pPr algn="ctr"/>
+                      <a:r>
+                        <a:rPr lang="fa-IR" dirty="0">
+                          <a:solidFill>
+                            <a:schemeClr val="accent3"/>
+                          </a:solidFill>
+                        </a:rPr>
+                        <a:t>1</a:t>
+                      </a:r>
+                      <a:endParaRPr lang="en-US" dirty="0">
+                        <a:solidFill>
+                          <a:schemeClr val="accent3"/>
+                        </a:solidFill>
+                      </a:endParaRPr>
+                    </a:p>
+                  </a:txBody>
+                  <a:tcPr/>
+                </a:tc>
+                <a:tc>
+                  <a:txBody>
+                    <a:bodyPr/>
+                    <a:lstStyle/>
+                    <a:p>
+                      <a:pPr algn="ctr"/>
+                      <a:r>
+                        <a:rPr lang="fa-IR" dirty="0">
+                          <a:solidFill>
+                            <a:schemeClr val="accent3"/>
+                          </a:solidFill>
+                        </a:rPr>
+                        <a:t>3.0</a:t>
+                      </a:r>
+                      <a:endParaRPr lang="en-US" dirty="0">
+                        <a:solidFill>
+                          <a:schemeClr val="accent3"/>
+                        </a:solidFill>
+                      </a:endParaRPr>
+                    </a:p>
+                  </a:txBody>
+                  <a:tcPr/>
+                </a:tc>
+                <a:tc>
+                  <a:txBody>
+                    <a:bodyPr/>
+                    <a:lstStyle/>
+                    <a:p>
+                      <a:pPr algn="ctr"/>
+                      <a:r>
+                        <a:rPr lang="fa-IR" dirty="0">
+                          <a:solidFill>
+                            <a:schemeClr val="accent3"/>
+                          </a:solidFill>
+                        </a:rPr>
+                        <a:t>4.0</a:t>
+                      </a:r>
+                      <a:endParaRPr lang="en-US" dirty="0">
+                        <a:solidFill>
+                          <a:schemeClr val="accent3"/>
+                        </a:solidFill>
+                      </a:endParaRPr>
+                    </a:p>
+                  </a:txBody>
+                  <a:tcPr/>
+                </a:tc>
+                <a:extLst>
+                  <a:ext uri="{0D108BD9-81ED-4DB2-BD59-A6C34878D82A}">
+                    <a16:rowId xmlns:a16="http://schemas.microsoft.com/office/drawing/2014/main" val="2149594251"/>
+                  </a:ext>
+                </a:extLst>
+              </a:tr>
+              <a:tr h="370840">
+                <a:tc>
+                  <a:txBody>
+                    <a:bodyPr/>
+                    <a:lstStyle/>
+                    <a:p>
+                      <a:pPr algn="ctr"/>
+                      <a:r>
+                        <a:rPr lang="fa-IR" dirty="0">
+                          <a:solidFill>
+                            <a:schemeClr val="accent3"/>
+                          </a:solidFill>
+                        </a:rPr>
+                        <a:t>2</a:t>
+                      </a:r>
+                      <a:endParaRPr lang="en-US" dirty="0">
+                        <a:solidFill>
+                          <a:schemeClr val="accent3"/>
+                        </a:solidFill>
+                      </a:endParaRPr>
+                    </a:p>
+                  </a:txBody>
+                  <a:tcPr/>
+                </a:tc>
+                <a:tc>
+                  <a:txBody>
+                    <a:bodyPr/>
+                    <a:lstStyle/>
+                    <a:p>
+                      <a:pPr algn="ctr"/>
+                      <a:r>
+                        <a:rPr lang="fa-IR" dirty="0">
+                          <a:solidFill>
+                            <a:schemeClr val="accent3"/>
+                          </a:solidFill>
+                        </a:rPr>
+                        <a:t>5.0</a:t>
+                      </a:r>
+                      <a:endParaRPr lang="en-US" dirty="0">
+                        <a:solidFill>
+                          <a:schemeClr val="accent3"/>
+                        </a:solidFill>
+                      </a:endParaRPr>
+                    </a:p>
+                  </a:txBody>
+                  <a:tcPr/>
+                </a:tc>
+                <a:tc>
+                  <a:txBody>
+                    <a:bodyPr/>
+                    <a:lstStyle/>
+                    <a:p>
+                      <a:pPr algn="ctr"/>
+                      <a:r>
+                        <a:rPr lang="fa-IR" dirty="0">
+                          <a:solidFill>
+                            <a:schemeClr val="accent3"/>
+                          </a:solidFill>
+                        </a:rPr>
+                        <a:t>12.0</a:t>
+                      </a:r>
+                      <a:endParaRPr lang="en-US" dirty="0">
+                        <a:solidFill>
+                          <a:schemeClr val="accent3"/>
+                        </a:solidFill>
+                      </a:endParaRPr>
+                    </a:p>
+                  </a:txBody>
+                  <a:tcPr/>
+                </a:tc>
+                <a:extLst>
+                  <a:ext uri="{0D108BD9-81ED-4DB2-BD59-A6C34878D82A}">
+                    <a16:rowId xmlns:a16="http://schemas.microsoft.com/office/drawing/2014/main" val="350324425"/>
+                  </a:ext>
+                </a:extLst>
+              </a:tr>
+              <a:tr h="370840">
+                <a:tc>
+                  <a:txBody>
+                    <a:bodyPr/>
+                    <a:lstStyle/>
+                    <a:p>
+                      <a:pPr algn="ctr"/>
+                      <a:r>
+                        <a:rPr lang="fa-IR" dirty="0">
+                          <a:solidFill>
+                            <a:schemeClr val="accent3"/>
+                          </a:solidFill>
+                        </a:rPr>
+                        <a:t>3</a:t>
+                      </a:r>
+                      <a:endParaRPr lang="en-US" dirty="0">
+                        <a:solidFill>
+                          <a:schemeClr val="accent3"/>
+                        </a:solidFill>
+                      </a:endParaRPr>
+                    </a:p>
+                  </a:txBody>
+                  <a:tcPr/>
+                </a:tc>
+                <a:tc>
+                  <a:txBody>
+                    <a:bodyPr/>
+                    <a:lstStyle/>
+                    <a:p>
+                      <a:pPr algn="ctr"/>
+                      <a:r>
+                        <a:rPr lang="fa-IR" dirty="0">
+                          <a:solidFill>
+                            <a:schemeClr val="accent3"/>
+                          </a:solidFill>
+                        </a:rPr>
+                        <a:t>8.0</a:t>
+                      </a:r>
+                      <a:endParaRPr lang="en-US" dirty="0">
+                        <a:solidFill>
+                          <a:schemeClr val="accent3"/>
+                        </a:solidFill>
+                      </a:endParaRPr>
+                    </a:p>
+                  </a:txBody>
+                  <a:tcPr/>
+                </a:tc>
+                <a:tc>
+                  <a:txBody>
+                    <a:bodyPr/>
+                    <a:lstStyle/>
+                    <a:p>
+                      <a:pPr algn="ctr"/>
+                      <a:r>
+                        <a:rPr lang="fa-IR" dirty="0">
+                          <a:solidFill>
+                            <a:schemeClr val="accent3"/>
+                          </a:solidFill>
+                        </a:rPr>
+                        <a:t>15.0</a:t>
+                      </a:r>
+                      <a:endParaRPr lang="en-US" dirty="0">
+                        <a:solidFill>
+                          <a:schemeClr val="accent3"/>
+                        </a:solidFill>
+                      </a:endParaRPr>
+                    </a:p>
+                  </a:txBody>
+                  <a:tcPr/>
+                </a:tc>
+                <a:extLst>
+                  <a:ext uri="{0D108BD9-81ED-4DB2-BD59-A6C34878D82A}">
+                    <a16:rowId xmlns:a16="http://schemas.microsoft.com/office/drawing/2014/main" val="2157742919"/>
+                  </a:ext>
+                </a:extLst>
+              </a:tr>
+            </a:tbl>
+          </a:graphicData>
+        </a:graphic>
+      </p:graphicFrame>
     </p:spTree>
     <p:extLst>
       <p:ext uri="{BB962C8B-B14F-4D97-AF65-F5344CB8AC3E}">
-        <p14:creationId xmlns:p14="http://schemas.microsoft.com/office/powerpoint/2010/main" val="460007682"/>
+        <p14:creationId xmlns:p14="http://schemas.microsoft.com/office/powerpoint/2010/main" val="1614182316"/>
       </p:ext>
     </p:extLst>
   </p:cSld>

--- a/slides/3.Math/Math.pptx
+++ b/slides/3.Math/Math.pptx
@@ -5,7 +5,7 @@
     <p:sldMasterId id="2147483672" r:id="rId1"/>
   </p:sldMasterIdLst>
   <p:notesMasterIdLst>
-    <p:notesMasterId r:id="rId16"/>
+    <p:notesMasterId r:id="rId18"/>
   </p:notesMasterIdLst>
   <p:sldIdLst>
     <p:sldId id="256" r:id="rId2"/>
@@ -20,28 +20,30 @@
     <p:sldId id="312" r:id="rId11"/>
     <p:sldId id="313" r:id="rId12"/>
     <p:sldId id="315" r:id="rId13"/>
-    <p:sldId id="314" r:id="rId14"/>
-    <p:sldId id="316" r:id="rId15"/>
+    <p:sldId id="317" r:id="rId14"/>
+    <p:sldId id="318" r:id="rId15"/>
+    <p:sldId id="314" r:id="rId16"/>
+    <p:sldId id="316" r:id="rId17"/>
   </p:sldIdLst>
   <p:sldSz cx="9144000" cy="5143500" type="screen16x9"/>
   <p:notesSz cx="6858000" cy="9144000"/>
   <p:embeddedFontLst>
     <p:embeddedFont>
       <p:font typeface="B Nazanin" panose="00000400000000000000" pitchFamily="2" charset="-78"/>
-      <p:regular r:id="rId17"/>
-      <p:bold r:id="rId18"/>
+      <p:regular r:id="rId19"/>
+      <p:bold r:id="rId20"/>
     </p:embeddedFont>
     <p:embeddedFont>
       <p:font typeface="Dana" panose="020B0604020202020204" charset="0"/>
-      <p:regular r:id="rId19"/>
-      <p:bold r:id="rId20"/>
-      <p:italic r:id="rId21"/>
-      <p:boldItalic r:id="rId22"/>
+      <p:regular r:id="rId21"/>
+      <p:bold r:id="rId22"/>
+      <p:italic r:id="rId23"/>
+      <p:boldItalic r:id="rId24"/>
     </p:embeddedFont>
     <p:embeddedFont>
       <p:font typeface="Fira Code" panose="020B0809050000020004" pitchFamily="49" charset="0"/>
-      <p:regular r:id="rId23"/>
-      <p:bold r:id="rId24"/>
+      <p:regular r:id="rId25"/>
+      <p:bold r:id="rId26"/>
     </p:embeddedFont>
   </p:embeddedFontLst>
   <p:defaultTextStyle>
@@ -279,6 +281,18 @@
     </p:ext>
   </p:extLst>
 </p:presentation>
+</file>
+
+<file path=ppt/commentAuthors.xml><?xml version="1.0" encoding="utf-8"?>
+<p:cmAuthorLst xmlns:a="http://schemas.openxmlformats.org/drawingml/2006/main" xmlns:r="http://schemas.openxmlformats.org/officeDocument/2006/relationships" xmlns:p="http://schemas.openxmlformats.org/presentationml/2006/main">
+  <p:cmAuthor id="1" name="shayan naghizadeh" initials="sn" lastIdx="1" clrIdx="0">
+    <p:extLst>
+      <p:ext uri="{19B8F6BF-5375-455C-9EA6-DF929625EA0E}">
+        <p15:presenceInfo xmlns:p15="http://schemas.microsoft.com/office/powerpoint/2012/main" userId="e53695f2bc6c9297" providerId="Windows Live"/>
+      </p:ext>
+    </p:extLst>
+  </p:cmAuthor>
+</p:cmAuthorLst>
 </file>
 
 <file path=ppt/notesMasters/notesMaster1.xml><?xml version="1.0" encoding="utf-8"?>
@@ -6968,7 +6982,7 @@
         <p:spPr>
           <a:xfrm>
             <a:off x="1005892" y="887181"/>
-            <a:ext cx="8014537" cy="1314912"/>
+            <a:ext cx="8014537" cy="1591911"/>
           </a:xfrm>
           <a:prstGeom prst="rect">
             <a:avLst/>
@@ -7029,6 +7043,36 @@
               </a:rPr>
               <a:t>Random numbers are numbers that are generated in such a way that each possible number has an equal chance of being chosen. They do not follow a specific pattern and are often used in computer programs to add variety or unpredictability.</a:t>
             </a:r>
+            <a:endParaRPr lang="fa-IR" sz="1200" dirty="0">
+              <a:solidFill>
+                <a:schemeClr val="accent3"/>
+              </a:solidFill>
+              <a:latin typeface="Fira Code"/>
+              <a:ea typeface="Fira Code"/>
+              <a:cs typeface="B Nazanin" panose="00000400000000000000" pitchFamily="2" charset="-78"/>
+            </a:endParaRPr>
+          </a:p>
+          <a:p>
+            <a:pPr algn="just" eaLnBrk="0" fontAlgn="base" hangingPunct="0">
+              <a:lnSpc>
+                <a:spcPct val="150000"/>
+              </a:lnSpc>
+              <a:spcBef>
+                <a:spcPct val="0"/>
+              </a:spcBef>
+              <a:spcAft>
+                <a:spcPct val="0"/>
+              </a:spcAft>
+              <a:buClrTx/>
+            </a:pPr>
+            <a:endParaRPr lang="en-US" sz="1200" dirty="0">
+              <a:solidFill>
+                <a:schemeClr val="accent3"/>
+              </a:solidFill>
+              <a:latin typeface="Fira Code"/>
+              <a:ea typeface="Fira Code"/>
+              <a:cs typeface="B Nazanin" panose="00000400000000000000" pitchFamily="2" charset="-78"/>
+            </a:endParaRPr>
           </a:p>
         </p:txBody>
       </p:sp>
@@ -7046,7 +7090,7 @@
         </p:nvSpPr>
         <p:spPr>
           <a:xfrm>
-            <a:off x="1005892" y="2077377"/>
+            <a:off x="1005892" y="2262728"/>
             <a:ext cx="8014537" cy="2115964"/>
           </a:xfrm>
           <a:prstGeom prst="rect">
@@ -8227,7 +8271,7 @@
         </p:nvSpPr>
         <p:spPr>
           <a:xfrm>
-            <a:off x="951471" y="848060"/>
+            <a:off x="957649" y="985921"/>
             <a:ext cx="8126667" cy="1247649"/>
           </a:xfrm>
           <a:prstGeom prst="rect">
@@ -10407,7 +10451,7 @@
           <a:p>
             <a:pPr marL="0" indent="0" algn="ctr"/>
             <a:r>
-              <a:rPr lang="en-US" sz="1000"/>
+              <a:rPr lang="en-US" sz="1000" dirty="0" err="1"/>
               <a:t>Random.c</a:t>
             </a:r>
             <a:endParaRPr lang="en-US" sz="1000" dirty="0"/>
@@ -10428,6 +10472,2703 @@
 </file>
 
 <file path=ppt/slides/slide13.xml><?xml version="1.0" encoding="utf-8"?>
+<p:sld xmlns:a="http://schemas.openxmlformats.org/drawingml/2006/main" xmlns:r="http://schemas.openxmlformats.org/officeDocument/2006/relationships" xmlns:p="http://schemas.openxmlformats.org/presentationml/2006/main">
+  <p:cSld>
+    <p:spTree>
+      <p:nvGrpSpPr>
+        <p:cNvPr id="1" name=""/>
+        <p:cNvGrpSpPr/>
+        <p:nvPr/>
+      </p:nvGrpSpPr>
+      <p:grpSpPr>
+        <a:xfrm>
+          <a:off x="0" y="0"/>
+          <a:ext cx="0" cy="0"/>
+          <a:chOff x="0" y="0"/>
+          <a:chExt cx="0" cy="0"/>
+        </a:xfrm>
+      </p:grpSpPr>
+      <p:sp>
+        <p:nvSpPr>
+          <p:cNvPr id="4" name="Google Shape;814;p39">
+            <a:extLst>
+              <a:ext uri="{FF2B5EF4-FFF2-40B4-BE49-F238E27FC236}">
+                <a16:creationId xmlns:a16="http://schemas.microsoft.com/office/drawing/2014/main" id="{69A45831-A2E1-980F-3027-5995ADF72288}"/>
+              </a:ext>
+            </a:extLst>
+          </p:cNvPr>
+          <p:cNvSpPr txBox="1">
+            <a:spLocks/>
+          </p:cNvSpPr>
+          <p:nvPr/>
+        </p:nvSpPr>
+        <p:spPr>
+          <a:xfrm>
+            <a:off x="1015267" y="537519"/>
+            <a:ext cx="7113466" cy="596254"/>
+          </a:xfrm>
+          <a:prstGeom prst="rect">
+            <a:avLst/>
+          </a:prstGeom>
+          <a:noFill/>
+          <a:ln>
+            <a:noFill/>
+          </a:ln>
+        </p:spPr>
+        <p:txBody>
+          <a:bodyPr spcFirstLastPara="1" wrap="square" lIns="91425" tIns="91425" rIns="91425" bIns="91425" anchor="ctr" anchorCtr="0">
+            <a:noAutofit/>
+          </a:bodyPr>
+          <a:lstStyle>
+            <a:defPPr marR="0" lvl="0" algn="l" rtl="0">
+              <a:lnSpc>
+                <a:spcPct val="100000"/>
+              </a:lnSpc>
+              <a:spcBef>
+                <a:spcPts val="0"/>
+              </a:spcBef>
+              <a:spcAft>
+                <a:spcPts val="0"/>
+              </a:spcAft>
+            </a:defPPr>
+            <a:lvl1pPr marR="0" lvl="0" algn="l" rtl="0">
+              <a:lnSpc>
+                <a:spcPct val="100000"/>
+              </a:lnSpc>
+              <a:spcBef>
+                <a:spcPts val="0"/>
+              </a:spcBef>
+              <a:spcAft>
+                <a:spcPts val="0"/>
+              </a:spcAft>
+              <a:buClr>
+                <a:schemeClr val="lt1"/>
+              </a:buClr>
+              <a:buSzPts val="5200"/>
+              <a:buFont typeface="Fira Code"/>
+              <a:buNone/>
+              <a:defRPr sz="3000" b="0" i="0" u="none" strike="noStrike" cap="none">
+                <a:solidFill>
+                  <a:schemeClr val="lt1"/>
+                </a:solidFill>
+                <a:latin typeface="Fira Code"/>
+                <a:ea typeface="Fira Code"/>
+                <a:cs typeface="Fira Code"/>
+                <a:sym typeface="Fira Code"/>
+              </a:defRPr>
+            </a:lvl1pPr>
+            <a:lvl2pPr marR="0" lvl="1" algn="ctr" rtl="0">
+              <a:lnSpc>
+                <a:spcPct val="100000"/>
+              </a:lnSpc>
+              <a:spcBef>
+                <a:spcPts val="0"/>
+              </a:spcBef>
+              <a:spcAft>
+                <a:spcPts val="0"/>
+              </a:spcAft>
+              <a:buClr>
+                <a:schemeClr val="dk1"/>
+              </a:buClr>
+              <a:buSzPts val="5200"/>
+              <a:buFont typeface="Fira Code"/>
+              <a:buNone/>
+              <a:defRPr sz="5200" b="0" i="0" u="none" strike="noStrike" cap="none">
+                <a:solidFill>
+                  <a:schemeClr val="dk1"/>
+                </a:solidFill>
+                <a:latin typeface="Fira Code"/>
+                <a:ea typeface="Fira Code"/>
+                <a:cs typeface="Fira Code"/>
+                <a:sym typeface="Fira Code"/>
+              </a:defRPr>
+            </a:lvl2pPr>
+            <a:lvl3pPr marR="0" lvl="2" algn="ctr" rtl="0">
+              <a:lnSpc>
+                <a:spcPct val="100000"/>
+              </a:lnSpc>
+              <a:spcBef>
+                <a:spcPts val="0"/>
+              </a:spcBef>
+              <a:spcAft>
+                <a:spcPts val="0"/>
+              </a:spcAft>
+              <a:buClr>
+                <a:schemeClr val="dk1"/>
+              </a:buClr>
+              <a:buSzPts val="5200"/>
+              <a:buFont typeface="Fira Code"/>
+              <a:buNone/>
+              <a:defRPr sz="5200" b="0" i="0" u="none" strike="noStrike" cap="none">
+                <a:solidFill>
+                  <a:schemeClr val="dk1"/>
+                </a:solidFill>
+                <a:latin typeface="Fira Code"/>
+                <a:ea typeface="Fira Code"/>
+                <a:cs typeface="Fira Code"/>
+                <a:sym typeface="Fira Code"/>
+              </a:defRPr>
+            </a:lvl3pPr>
+            <a:lvl4pPr marR="0" lvl="3" algn="ctr" rtl="0">
+              <a:lnSpc>
+                <a:spcPct val="100000"/>
+              </a:lnSpc>
+              <a:spcBef>
+                <a:spcPts val="0"/>
+              </a:spcBef>
+              <a:spcAft>
+                <a:spcPts val="0"/>
+              </a:spcAft>
+              <a:buClr>
+                <a:schemeClr val="dk1"/>
+              </a:buClr>
+              <a:buSzPts val="5200"/>
+              <a:buFont typeface="Fira Code"/>
+              <a:buNone/>
+              <a:defRPr sz="5200" b="0" i="0" u="none" strike="noStrike" cap="none">
+                <a:solidFill>
+                  <a:schemeClr val="dk1"/>
+                </a:solidFill>
+                <a:latin typeface="Fira Code"/>
+                <a:ea typeface="Fira Code"/>
+                <a:cs typeface="Fira Code"/>
+                <a:sym typeface="Fira Code"/>
+              </a:defRPr>
+            </a:lvl4pPr>
+            <a:lvl5pPr marR="0" lvl="4" algn="ctr" rtl="0">
+              <a:lnSpc>
+                <a:spcPct val="100000"/>
+              </a:lnSpc>
+              <a:spcBef>
+                <a:spcPts val="0"/>
+              </a:spcBef>
+              <a:spcAft>
+                <a:spcPts val="0"/>
+              </a:spcAft>
+              <a:buClr>
+                <a:schemeClr val="dk1"/>
+              </a:buClr>
+              <a:buSzPts val="5200"/>
+              <a:buFont typeface="Fira Code"/>
+              <a:buNone/>
+              <a:defRPr sz="5200" b="0" i="0" u="none" strike="noStrike" cap="none">
+                <a:solidFill>
+                  <a:schemeClr val="dk1"/>
+                </a:solidFill>
+                <a:latin typeface="Fira Code"/>
+                <a:ea typeface="Fira Code"/>
+                <a:cs typeface="Fira Code"/>
+                <a:sym typeface="Fira Code"/>
+              </a:defRPr>
+            </a:lvl5pPr>
+            <a:lvl6pPr marR="0" lvl="5" algn="ctr" rtl="0">
+              <a:lnSpc>
+                <a:spcPct val="100000"/>
+              </a:lnSpc>
+              <a:spcBef>
+                <a:spcPts val="0"/>
+              </a:spcBef>
+              <a:spcAft>
+                <a:spcPts val="0"/>
+              </a:spcAft>
+              <a:buClr>
+                <a:schemeClr val="dk1"/>
+              </a:buClr>
+              <a:buSzPts val="5200"/>
+              <a:buFont typeface="Fira Code"/>
+              <a:buNone/>
+              <a:defRPr sz="5200" b="0" i="0" u="none" strike="noStrike" cap="none">
+                <a:solidFill>
+                  <a:schemeClr val="dk1"/>
+                </a:solidFill>
+                <a:latin typeface="Fira Code"/>
+                <a:ea typeface="Fira Code"/>
+                <a:cs typeface="Fira Code"/>
+                <a:sym typeface="Fira Code"/>
+              </a:defRPr>
+            </a:lvl6pPr>
+            <a:lvl7pPr marR="0" lvl="6" algn="ctr" rtl="0">
+              <a:lnSpc>
+                <a:spcPct val="100000"/>
+              </a:lnSpc>
+              <a:spcBef>
+                <a:spcPts val="0"/>
+              </a:spcBef>
+              <a:spcAft>
+                <a:spcPts val="0"/>
+              </a:spcAft>
+              <a:buClr>
+                <a:schemeClr val="dk1"/>
+              </a:buClr>
+              <a:buSzPts val="5200"/>
+              <a:buFont typeface="Fira Code"/>
+              <a:buNone/>
+              <a:defRPr sz="5200" b="0" i="0" u="none" strike="noStrike" cap="none">
+                <a:solidFill>
+                  <a:schemeClr val="dk1"/>
+                </a:solidFill>
+                <a:latin typeface="Fira Code"/>
+                <a:ea typeface="Fira Code"/>
+                <a:cs typeface="Fira Code"/>
+                <a:sym typeface="Fira Code"/>
+              </a:defRPr>
+            </a:lvl7pPr>
+            <a:lvl8pPr marR="0" lvl="7" algn="ctr" rtl="0">
+              <a:lnSpc>
+                <a:spcPct val="100000"/>
+              </a:lnSpc>
+              <a:spcBef>
+                <a:spcPts val="0"/>
+              </a:spcBef>
+              <a:spcAft>
+                <a:spcPts val="0"/>
+              </a:spcAft>
+              <a:buClr>
+                <a:schemeClr val="dk1"/>
+              </a:buClr>
+              <a:buSzPts val="5200"/>
+              <a:buFont typeface="Fira Code"/>
+              <a:buNone/>
+              <a:defRPr sz="5200" b="0" i="0" u="none" strike="noStrike" cap="none">
+                <a:solidFill>
+                  <a:schemeClr val="dk1"/>
+                </a:solidFill>
+                <a:latin typeface="Fira Code"/>
+                <a:ea typeface="Fira Code"/>
+                <a:cs typeface="Fira Code"/>
+                <a:sym typeface="Fira Code"/>
+              </a:defRPr>
+            </a:lvl8pPr>
+            <a:lvl9pPr marR="0" lvl="8" algn="ctr" rtl="0">
+              <a:lnSpc>
+                <a:spcPct val="100000"/>
+              </a:lnSpc>
+              <a:spcBef>
+                <a:spcPts val="0"/>
+              </a:spcBef>
+              <a:spcAft>
+                <a:spcPts val="0"/>
+              </a:spcAft>
+              <a:buClr>
+                <a:schemeClr val="dk1"/>
+              </a:buClr>
+              <a:buSzPts val="5200"/>
+              <a:buFont typeface="Fira Code"/>
+              <a:buNone/>
+              <a:defRPr sz="5200" b="0" i="0" u="none" strike="noStrike" cap="none">
+                <a:solidFill>
+                  <a:schemeClr val="dk1"/>
+                </a:solidFill>
+                <a:latin typeface="Fira Code"/>
+                <a:ea typeface="Fira Code"/>
+                <a:cs typeface="Fira Code"/>
+                <a:sym typeface="Fira Code"/>
+              </a:defRPr>
+            </a:lvl9pPr>
+          </a:lstStyle>
+          <a:p>
+            <a:endParaRPr lang="fa-IR" sz="2400" dirty="0">
+              <a:solidFill>
+                <a:schemeClr val="accent2"/>
+              </a:solidFill>
+            </a:endParaRPr>
+          </a:p>
+          <a:p>
+            <a:r>
+              <a:rPr lang="en-US" sz="2400" dirty="0">
+                <a:solidFill>
+                  <a:schemeClr val="accent2"/>
+                </a:solidFill>
+              </a:rPr>
+              <a:t>How to Search and Fix Errors in C</a:t>
+            </a:r>
+          </a:p>
+          <a:p>
+            <a:endParaRPr lang="en-US" sz="2400" dirty="0">
+              <a:solidFill>
+                <a:schemeClr val="accent2"/>
+              </a:solidFill>
+            </a:endParaRPr>
+          </a:p>
+        </p:txBody>
+      </p:sp>
+      <p:sp>
+        <p:nvSpPr>
+          <p:cNvPr id="6" name="TextBox 5">
+            <a:extLst>
+              <a:ext uri="{FF2B5EF4-FFF2-40B4-BE49-F238E27FC236}">
+                <a16:creationId xmlns:a16="http://schemas.microsoft.com/office/drawing/2014/main" id="{281EE04F-76CF-1C7A-2680-3DCAE13EF74A}"/>
+              </a:ext>
+            </a:extLst>
+          </p:cNvPr>
+          <p:cNvSpPr txBox="1"/>
+          <p:nvPr/>
+        </p:nvSpPr>
+        <p:spPr>
+          <a:xfrm>
+            <a:off x="1167713" y="1246313"/>
+            <a:ext cx="7531443" cy="2569934"/>
+          </a:xfrm>
+          <a:prstGeom prst="rect">
+            <a:avLst/>
+          </a:prstGeom>
+          <a:noFill/>
+        </p:spPr>
+        <p:txBody>
+          <a:bodyPr wrap="square">
+            <a:spAutoFit/>
+          </a:bodyPr>
+          <a:lstStyle/>
+          <a:p>
+            <a:pPr>
+              <a:buClr>
+                <a:schemeClr val="accent3"/>
+              </a:buClr>
+            </a:pPr>
+            <a:r>
+              <a:rPr lang="en-US" b="1" dirty="0">
+                <a:solidFill>
+                  <a:schemeClr val="accent3"/>
+                </a:solidFill>
+                <a:latin typeface="Fira Code" panose="020B0809050000020004" pitchFamily="49" charset="0"/>
+                <a:ea typeface="Fira Code" panose="020B0809050000020004" pitchFamily="49" charset="0"/>
+                <a:cs typeface="Fira Code" panose="020B0809050000020004" pitchFamily="49" charset="0"/>
+              </a:rPr>
+              <a:t>1. Read the Error Message Carefully</a:t>
+            </a:r>
+          </a:p>
+          <a:p>
+            <a:pPr lvl="0" eaLnBrk="0" fontAlgn="base" hangingPunct="0">
+              <a:lnSpc>
+                <a:spcPct val="150000"/>
+              </a:lnSpc>
+              <a:spcBef>
+                <a:spcPct val="0"/>
+              </a:spcBef>
+              <a:spcAft>
+                <a:spcPct val="0"/>
+              </a:spcAft>
+              <a:buClrTx/>
+            </a:pPr>
+            <a:r>
+              <a:rPr lang="en-US" altLang="en-US" sz="1200" dirty="0">
+                <a:solidFill>
+                  <a:schemeClr val="accent3"/>
+                </a:solidFill>
+                <a:latin typeface="Fira Code" panose="020B0809050000020004" pitchFamily="49" charset="0"/>
+                <a:ea typeface="Fira Code" panose="020B0809050000020004" pitchFamily="49" charset="0"/>
+                <a:cs typeface="Fira Code" panose="020B0809050000020004" pitchFamily="49" charset="0"/>
+              </a:rPr>
+              <a:t>     Check file name and line number</a:t>
+            </a:r>
+          </a:p>
+          <a:p>
+            <a:pPr lvl="2" eaLnBrk="0" fontAlgn="base" hangingPunct="0">
+              <a:lnSpc>
+                <a:spcPct val="150000"/>
+              </a:lnSpc>
+              <a:spcBef>
+                <a:spcPct val="0"/>
+              </a:spcBef>
+              <a:spcAft>
+                <a:spcPct val="0"/>
+              </a:spcAft>
+              <a:buClrTx/>
+            </a:pPr>
+            <a:r>
+              <a:rPr lang="en-US" altLang="en-US" sz="1200" dirty="0">
+                <a:solidFill>
+                  <a:schemeClr val="accent3"/>
+                </a:solidFill>
+                <a:latin typeface="Fira Code" panose="020B0809050000020004" pitchFamily="49" charset="0"/>
+                <a:ea typeface="Fira Code" panose="020B0809050000020004" pitchFamily="49" charset="0"/>
+                <a:cs typeface="Fira Code" panose="020B0809050000020004" pitchFamily="49" charset="0"/>
+              </a:rPr>
+              <a:t>     Identify the type of error (</a:t>
+            </a:r>
+            <a:r>
+              <a:rPr lang="en-US" altLang="en-US" sz="1200" b="1" dirty="0">
+                <a:solidFill>
+                  <a:schemeClr val="accent3"/>
+                </a:solidFill>
+                <a:latin typeface="Fira Code" panose="020B0809050000020004" pitchFamily="49" charset="0"/>
+                <a:ea typeface="Fira Code" panose="020B0809050000020004" pitchFamily="49" charset="0"/>
+                <a:cs typeface="Fira Code" panose="020B0809050000020004" pitchFamily="49" charset="0"/>
+              </a:rPr>
+              <a:t>syntax</a:t>
+            </a:r>
+            <a:r>
+              <a:rPr lang="en-US" altLang="en-US" sz="1200" dirty="0">
+                <a:solidFill>
+                  <a:schemeClr val="accent3"/>
+                </a:solidFill>
+                <a:latin typeface="Fira Code" panose="020B0809050000020004" pitchFamily="49" charset="0"/>
+                <a:ea typeface="Fira Code" panose="020B0809050000020004" pitchFamily="49" charset="0"/>
+                <a:cs typeface="Fira Code" panose="020B0809050000020004" pitchFamily="49" charset="0"/>
+              </a:rPr>
+              <a:t>, </a:t>
+            </a:r>
+            <a:r>
+              <a:rPr lang="en-US" altLang="en-US" sz="1200" b="1" dirty="0">
+                <a:solidFill>
+                  <a:schemeClr val="accent3"/>
+                </a:solidFill>
+                <a:latin typeface="Fira Code" panose="020B0809050000020004" pitchFamily="49" charset="0"/>
+                <a:ea typeface="Fira Code" panose="020B0809050000020004" pitchFamily="49" charset="0"/>
+                <a:cs typeface="Fira Code" panose="020B0809050000020004" pitchFamily="49" charset="0"/>
+              </a:rPr>
+              <a:t>linker</a:t>
+            </a:r>
+            <a:r>
+              <a:rPr lang="en-US" altLang="en-US" sz="1200" dirty="0">
+                <a:solidFill>
+                  <a:schemeClr val="accent3"/>
+                </a:solidFill>
+                <a:latin typeface="Fira Code" panose="020B0809050000020004" pitchFamily="49" charset="0"/>
+                <a:ea typeface="Fira Code" panose="020B0809050000020004" pitchFamily="49" charset="0"/>
+                <a:cs typeface="Fira Code" panose="020B0809050000020004" pitchFamily="49" charset="0"/>
+              </a:rPr>
+              <a:t>, </a:t>
+            </a:r>
+            <a:r>
+              <a:rPr lang="en-US" altLang="en-US" sz="1200" b="1" dirty="0">
+                <a:solidFill>
+                  <a:schemeClr val="accent3"/>
+                </a:solidFill>
+                <a:latin typeface="Fira Code" panose="020B0809050000020004" pitchFamily="49" charset="0"/>
+                <a:ea typeface="Fira Code" panose="020B0809050000020004" pitchFamily="49" charset="0"/>
+                <a:cs typeface="Fira Code" panose="020B0809050000020004" pitchFamily="49" charset="0"/>
+              </a:rPr>
+              <a:t>runtime</a:t>
+            </a:r>
+            <a:r>
+              <a:rPr lang="en-US" altLang="en-US" sz="1200" dirty="0">
+                <a:solidFill>
+                  <a:schemeClr val="accent3"/>
+                </a:solidFill>
+                <a:latin typeface="Fira Code" panose="020B0809050000020004" pitchFamily="49" charset="0"/>
+                <a:ea typeface="Fira Code" panose="020B0809050000020004" pitchFamily="49" charset="0"/>
+                <a:cs typeface="Fira Code" panose="020B0809050000020004" pitchFamily="49" charset="0"/>
+              </a:rPr>
+              <a:t>)</a:t>
+            </a:r>
+          </a:p>
+          <a:p>
+            <a:pPr lvl="2" eaLnBrk="0" fontAlgn="base" hangingPunct="0">
+              <a:buClr>
+                <a:schemeClr val="accent3"/>
+              </a:buClr>
+            </a:pPr>
+            <a:endParaRPr lang="en-US" sz="1200" dirty="0">
+              <a:solidFill>
+                <a:schemeClr val="accent3"/>
+              </a:solidFill>
+              <a:latin typeface="Fira Code" panose="020B0809050000020004" pitchFamily="49" charset="0"/>
+              <a:ea typeface="Fira Code" panose="020B0809050000020004" pitchFamily="49" charset="0"/>
+              <a:cs typeface="Fira Code" panose="020B0809050000020004" pitchFamily="49" charset="0"/>
+            </a:endParaRPr>
+          </a:p>
+          <a:p>
+            <a:pPr lvl="2" eaLnBrk="0" fontAlgn="base" hangingPunct="0">
+              <a:buClr>
+                <a:schemeClr val="accent3"/>
+              </a:buClr>
+            </a:pPr>
+            <a:r>
+              <a:rPr lang="en-US" sz="1200" b="1" dirty="0">
+                <a:solidFill>
+                  <a:schemeClr val="accent3"/>
+                </a:solidFill>
+                <a:latin typeface="Fira Code" panose="020B0809050000020004" pitchFamily="49" charset="0"/>
+                <a:ea typeface="Fira Code" panose="020B0809050000020004" pitchFamily="49" charset="0"/>
+                <a:cs typeface="Fira Code" panose="020B0809050000020004" pitchFamily="49" charset="0"/>
+              </a:rPr>
+              <a:t>2.</a:t>
+            </a:r>
+            <a:r>
+              <a:rPr lang="en-US" sz="1200" b="1" dirty="0"/>
+              <a:t>  </a:t>
+            </a:r>
+            <a:r>
+              <a:rPr lang="en-US" b="1" dirty="0">
+                <a:solidFill>
+                  <a:schemeClr val="accent3"/>
+                </a:solidFill>
+                <a:latin typeface="Fira Code" panose="020B0809050000020004" pitchFamily="49" charset="0"/>
+                <a:ea typeface="Fira Code" panose="020B0809050000020004" pitchFamily="49" charset="0"/>
+                <a:cs typeface="Fira Code" panose="020B0809050000020004" pitchFamily="49" charset="0"/>
+              </a:rPr>
+              <a:t>Understand Common Error Types</a:t>
+            </a:r>
+            <a:endParaRPr lang="en-US" altLang="en-US" dirty="0">
+              <a:solidFill>
+                <a:schemeClr val="accent3"/>
+              </a:solidFill>
+              <a:latin typeface="Arial" panose="020B0604020202020204" pitchFamily="34" charset="0"/>
+            </a:endParaRPr>
+          </a:p>
+          <a:p>
+            <a:pPr lvl="1" eaLnBrk="0" fontAlgn="base" hangingPunct="0">
+              <a:lnSpc>
+                <a:spcPct val="150000"/>
+              </a:lnSpc>
+              <a:spcBef>
+                <a:spcPct val="0"/>
+              </a:spcBef>
+              <a:spcAft>
+                <a:spcPct val="0"/>
+              </a:spcAft>
+              <a:buClrTx/>
+            </a:pPr>
+            <a:r>
+              <a:rPr lang="en-US" altLang="en-US" sz="1200" dirty="0">
+                <a:solidFill>
+                  <a:schemeClr val="accent3"/>
+                </a:solidFill>
+                <a:latin typeface="Fira Code" panose="020B0809050000020004" pitchFamily="49" charset="0"/>
+                <a:ea typeface="Fira Code" panose="020B0809050000020004" pitchFamily="49" charset="0"/>
+                <a:cs typeface="Fira Code" panose="020B0809050000020004" pitchFamily="49" charset="0"/>
+              </a:rPr>
+              <a:t>     Syntax Error → </a:t>
+            </a:r>
+            <a:r>
+              <a:rPr lang="en-US" altLang="en-US" sz="1200" b="1" dirty="0">
+                <a:solidFill>
+                  <a:schemeClr val="accent3"/>
+                </a:solidFill>
+                <a:latin typeface="Fira Code" panose="020B0809050000020004" pitchFamily="49" charset="0"/>
+                <a:ea typeface="Fira Code" panose="020B0809050000020004" pitchFamily="49" charset="0"/>
+                <a:cs typeface="Fira Code" panose="020B0809050000020004" pitchFamily="49" charset="0"/>
+              </a:rPr>
+              <a:t>Missing ;, wrong brackets</a:t>
+            </a:r>
+          </a:p>
+          <a:p>
+            <a:pPr lvl="1" eaLnBrk="0" fontAlgn="base" hangingPunct="0">
+              <a:lnSpc>
+                <a:spcPct val="150000"/>
+              </a:lnSpc>
+              <a:spcBef>
+                <a:spcPct val="0"/>
+              </a:spcBef>
+              <a:spcAft>
+                <a:spcPct val="0"/>
+              </a:spcAft>
+              <a:buClrTx/>
+            </a:pPr>
+            <a:r>
+              <a:rPr lang="en-US" altLang="en-US" sz="1200" dirty="0">
+                <a:solidFill>
+                  <a:schemeClr val="accent3"/>
+                </a:solidFill>
+                <a:latin typeface="Fira Code" panose="020B0809050000020004" pitchFamily="49" charset="0"/>
+                <a:ea typeface="Fira Code" panose="020B0809050000020004" pitchFamily="49" charset="0"/>
+                <a:cs typeface="Fira Code" panose="020B0809050000020004" pitchFamily="49" charset="0"/>
+              </a:rPr>
+              <a:t>     Linker Error → </a:t>
+            </a:r>
+            <a:r>
+              <a:rPr lang="en-US" altLang="en-US" sz="1200" b="1" dirty="0">
+                <a:solidFill>
+                  <a:schemeClr val="accent3"/>
+                </a:solidFill>
+                <a:latin typeface="Fira Code" panose="020B0809050000020004" pitchFamily="49" charset="0"/>
+                <a:ea typeface="Fira Code" panose="020B0809050000020004" pitchFamily="49" charset="0"/>
+                <a:cs typeface="Fira Code" panose="020B0809050000020004" pitchFamily="49" charset="0"/>
+              </a:rPr>
+              <a:t>Function not defined or missing object file</a:t>
+            </a:r>
+          </a:p>
+          <a:p>
+            <a:pPr lvl="1" eaLnBrk="0" fontAlgn="base" hangingPunct="0">
+              <a:lnSpc>
+                <a:spcPct val="150000"/>
+              </a:lnSpc>
+              <a:spcBef>
+                <a:spcPct val="0"/>
+              </a:spcBef>
+              <a:spcAft>
+                <a:spcPct val="0"/>
+              </a:spcAft>
+              <a:buClrTx/>
+            </a:pPr>
+            <a:r>
+              <a:rPr lang="en-US" altLang="en-US" sz="1200" dirty="0">
+                <a:solidFill>
+                  <a:schemeClr val="accent3"/>
+                </a:solidFill>
+                <a:latin typeface="Fira Code" panose="020B0809050000020004" pitchFamily="49" charset="0"/>
+                <a:ea typeface="Fira Code" panose="020B0809050000020004" pitchFamily="49" charset="0"/>
+                <a:cs typeface="Fira Code" panose="020B0809050000020004" pitchFamily="49" charset="0"/>
+              </a:rPr>
+              <a:t>     Runtime Error → </a:t>
+            </a:r>
+            <a:r>
+              <a:rPr lang="en-US" altLang="en-US" sz="1200" b="1" dirty="0">
+                <a:solidFill>
+                  <a:schemeClr val="accent3"/>
+                </a:solidFill>
+                <a:latin typeface="Fira Code" panose="020B0809050000020004" pitchFamily="49" charset="0"/>
+                <a:ea typeface="Fira Code" panose="020B0809050000020004" pitchFamily="49" charset="0"/>
+                <a:cs typeface="Fira Code" panose="020B0809050000020004" pitchFamily="49" charset="0"/>
+              </a:rPr>
+              <a:t>Division by zero </a:t>
+            </a:r>
+            <a:r>
+              <a:rPr lang="en-US" altLang="en-US" dirty="0">
+                <a:solidFill>
+                  <a:schemeClr val="tx1"/>
+                </a:solidFill>
+                <a:latin typeface="Arial" panose="020B0604020202020204" pitchFamily="34" charset="0"/>
+              </a:rPr>
+              <a:t>zero, invalid pointer access</a:t>
+            </a:r>
+          </a:p>
+          <a:p>
+            <a:pPr lvl="0" eaLnBrk="0" fontAlgn="base" hangingPunct="0">
+              <a:spcBef>
+                <a:spcPct val="0"/>
+              </a:spcBef>
+              <a:spcAft>
+                <a:spcPct val="0"/>
+              </a:spcAft>
+              <a:buClrTx/>
+            </a:pPr>
+            <a:endParaRPr lang="en-US" altLang="en-US" dirty="0">
+              <a:solidFill>
+                <a:schemeClr val="tx1"/>
+              </a:solidFill>
+              <a:latin typeface="Arial" panose="020B0604020202020204" pitchFamily="34" charset="0"/>
+            </a:endParaRPr>
+          </a:p>
+          <a:p>
+            <a:endParaRPr lang="en-US" dirty="0">
+              <a:solidFill>
+                <a:schemeClr val="accent3"/>
+              </a:solidFill>
+              <a:latin typeface="Fira Code" panose="020B0809050000020004" pitchFamily="49" charset="0"/>
+              <a:ea typeface="Fira Code" panose="020B0809050000020004" pitchFamily="49" charset="0"/>
+              <a:cs typeface="Fira Code" panose="020B0809050000020004" pitchFamily="49" charset="0"/>
+            </a:endParaRPr>
+          </a:p>
+        </p:txBody>
+      </p:sp>
+      <p:sp>
+        <p:nvSpPr>
+          <p:cNvPr id="11" name="Google Shape;473;p28">
+            <a:extLst>
+              <a:ext uri="{FF2B5EF4-FFF2-40B4-BE49-F238E27FC236}">
+                <a16:creationId xmlns:a16="http://schemas.microsoft.com/office/drawing/2014/main" id="{CF817274-9DD9-9258-AB8A-EDC68D2B86DA}"/>
+              </a:ext>
+            </a:extLst>
+          </p:cNvPr>
+          <p:cNvSpPr txBox="1">
+            <a:spLocks/>
+          </p:cNvSpPr>
+          <p:nvPr/>
+        </p:nvSpPr>
+        <p:spPr>
+          <a:xfrm>
+            <a:off x="729503" y="4701324"/>
+            <a:ext cx="4865100" cy="357300"/>
+          </a:xfrm>
+          <a:prstGeom prst="rect">
+            <a:avLst/>
+          </a:prstGeom>
+          <a:noFill/>
+          <a:ln>
+            <a:noFill/>
+          </a:ln>
+        </p:spPr>
+        <p:txBody>
+          <a:bodyPr spcFirstLastPara="1" wrap="square" lIns="91425" tIns="91425" rIns="91425" bIns="91425" anchor="ctr" anchorCtr="0">
+            <a:noAutofit/>
+          </a:bodyPr>
+          <a:lstStyle>
+            <a:defPPr marR="0" lvl="0" algn="l" rtl="0">
+              <a:lnSpc>
+                <a:spcPct val="100000"/>
+              </a:lnSpc>
+              <a:spcBef>
+                <a:spcPts val="0"/>
+              </a:spcBef>
+              <a:spcAft>
+                <a:spcPts val="0"/>
+              </a:spcAft>
+            </a:defPPr>
+            <a:lvl1pPr marL="457200" marR="0" lvl="0" indent="-317500" algn="l" rtl="0">
+              <a:lnSpc>
+                <a:spcPct val="100000"/>
+              </a:lnSpc>
+              <a:spcBef>
+                <a:spcPts val="0"/>
+              </a:spcBef>
+              <a:spcAft>
+                <a:spcPts val="0"/>
+              </a:spcAft>
+              <a:buClr>
+                <a:schemeClr val="dk2"/>
+              </a:buClr>
+              <a:buSzPts val="1400"/>
+              <a:buFont typeface="Fira Code"/>
+              <a:buChar char="●"/>
+              <a:defRPr sz="1400" b="0" i="0" u="none" strike="noStrike" cap="none">
+                <a:solidFill>
+                  <a:schemeClr val="dk2"/>
+                </a:solidFill>
+                <a:latin typeface="Fira Code"/>
+                <a:ea typeface="Fira Code"/>
+                <a:cs typeface="Fira Code"/>
+                <a:sym typeface="Fira Code"/>
+              </a:defRPr>
+            </a:lvl1pPr>
+            <a:lvl2pPr marL="914400" marR="0" lvl="1" indent="-317500" algn="l" rtl="0">
+              <a:lnSpc>
+                <a:spcPct val="100000"/>
+              </a:lnSpc>
+              <a:spcBef>
+                <a:spcPts val="0"/>
+              </a:spcBef>
+              <a:spcAft>
+                <a:spcPts val="0"/>
+              </a:spcAft>
+              <a:buClr>
+                <a:schemeClr val="dk2"/>
+              </a:buClr>
+              <a:buSzPts val="1400"/>
+              <a:buFont typeface="Fira Code"/>
+              <a:buChar char="○"/>
+              <a:defRPr sz="1400" b="0" i="0" u="none" strike="noStrike" cap="none">
+                <a:solidFill>
+                  <a:schemeClr val="dk2"/>
+                </a:solidFill>
+                <a:latin typeface="Fira Code"/>
+                <a:ea typeface="Fira Code"/>
+                <a:cs typeface="Fira Code"/>
+                <a:sym typeface="Fira Code"/>
+              </a:defRPr>
+            </a:lvl2pPr>
+            <a:lvl3pPr marL="1371600" marR="0" lvl="2" indent="-317500" algn="l" rtl="0">
+              <a:lnSpc>
+                <a:spcPct val="100000"/>
+              </a:lnSpc>
+              <a:spcBef>
+                <a:spcPts val="0"/>
+              </a:spcBef>
+              <a:spcAft>
+                <a:spcPts val="0"/>
+              </a:spcAft>
+              <a:buClr>
+                <a:schemeClr val="dk2"/>
+              </a:buClr>
+              <a:buSzPts val="1400"/>
+              <a:buFont typeface="Fira Code"/>
+              <a:buChar char="■"/>
+              <a:defRPr sz="1400" b="0" i="0" u="none" strike="noStrike" cap="none">
+                <a:solidFill>
+                  <a:schemeClr val="dk2"/>
+                </a:solidFill>
+                <a:latin typeface="Fira Code"/>
+                <a:ea typeface="Fira Code"/>
+                <a:cs typeface="Fira Code"/>
+                <a:sym typeface="Fira Code"/>
+              </a:defRPr>
+            </a:lvl3pPr>
+            <a:lvl4pPr marL="1828800" marR="0" lvl="3" indent="-317500" algn="l" rtl="0">
+              <a:lnSpc>
+                <a:spcPct val="100000"/>
+              </a:lnSpc>
+              <a:spcBef>
+                <a:spcPts val="0"/>
+              </a:spcBef>
+              <a:spcAft>
+                <a:spcPts val="0"/>
+              </a:spcAft>
+              <a:buClr>
+                <a:schemeClr val="dk2"/>
+              </a:buClr>
+              <a:buSzPts val="1400"/>
+              <a:buFont typeface="Fira Code"/>
+              <a:buChar char="●"/>
+              <a:defRPr sz="1400" b="0" i="0" u="none" strike="noStrike" cap="none">
+                <a:solidFill>
+                  <a:schemeClr val="dk2"/>
+                </a:solidFill>
+                <a:latin typeface="Fira Code"/>
+                <a:ea typeface="Fira Code"/>
+                <a:cs typeface="Fira Code"/>
+                <a:sym typeface="Fira Code"/>
+              </a:defRPr>
+            </a:lvl4pPr>
+            <a:lvl5pPr marL="2286000" marR="0" lvl="4" indent="-317500" algn="l" rtl="0">
+              <a:lnSpc>
+                <a:spcPct val="100000"/>
+              </a:lnSpc>
+              <a:spcBef>
+                <a:spcPts val="0"/>
+              </a:spcBef>
+              <a:spcAft>
+                <a:spcPts val="0"/>
+              </a:spcAft>
+              <a:buClr>
+                <a:schemeClr val="dk2"/>
+              </a:buClr>
+              <a:buSzPts val="1400"/>
+              <a:buFont typeface="Fira Code"/>
+              <a:buChar char="○"/>
+              <a:defRPr sz="1400" b="0" i="0" u="none" strike="noStrike" cap="none">
+                <a:solidFill>
+                  <a:schemeClr val="dk2"/>
+                </a:solidFill>
+                <a:latin typeface="Fira Code"/>
+                <a:ea typeface="Fira Code"/>
+                <a:cs typeface="Fira Code"/>
+                <a:sym typeface="Fira Code"/>
+              </a:defRPr>
+            </a:lvl5pPr>
+            <a:lvl6pPr marL="2743200" marR="0" lvl="5" indent="-317500" algn="l" rtl="0">
+              <a:lnSpc>
+                <a:spcPct val="100000"/>
+              </a:lnSpc>
+              <a:spcBef>
+                <a:spcPts val="0"/>
+              </a:spcBef>
+              <a:spcAft>
+                <a:spcPts val="0"/>
+              </a:spcAft>
+              <a:buClr>
+                <a:schemeClr val="dk2"/>
+              </a:buClr>
+              <a:buSzPts val="1400"/>
+              <a:buFont typeface="Fira Code"/>
+              <a:buChar char="■"/>
+              <a:defRPr sz="1400" b="0" i="0" u="none" strike="noStrike" cap="none">
+                <a:solidFill>
+                  <a:schemeClr val="dk2"/>
+                </a:solidFill>
+                <a:latin typeface="Fira Code"/>
+                <a:ea typeface="Fira Code"/>
+                <a:cs typeface="Fira Code"/>
+                <a:sym typeface="Fira Code"/>
+              </a:defRPr>
+            </a:lvl6pPr>
+            <a:lvl7pPr marL="3200400" marR="0" lvl="6" indent="-317500" algn="l" rtl="0">
+              <a:lnSpc>
+                <a:spcPct val="100000"/>
+              </a:lnSpc>
+              <a:spcBef>
+                <a:spcPts val="0"/>
+              </a:spcBef>
+              <a:spcAft>
+                <a:spcPts val="0"/>
+              </a:spcAft>
+              <a:buClr>
+                <a:schemeClr val="dk2"/>
+              </a:buClr>
+              <a:buSzPts val="1400"/>
+              <a:buFont typeface="Fira Code"/>
+              <a:buChar char="●"/>
+              <a:defRPr sz="1400" b="0" i="0" u="none" strike="noStrike" cap="none">
+                <a:solidFill>
+                  <a:schemeClr val="dk2"/>
+                </a:solidFill>
+                <a:latin typeface="Fira Code"/>
+                <a:ea typeface="Fira Code"/>
+                <a:cs typeface="Fira Code"/>
+                <a:sym typeface="Fira Code"/>
+              </a:defRPr>
+            </a:lvl7pPr>
+            <a:lvl8pPr marL="3657600" marR="0" lvl="7" indent="-317500" algn="l" rtl="0">
+              <a:lnSpc>
+                <a:spcPct val="100000"/>
+              </a:lnSpc>
+              <a:spcBef>
+                <a:spcPts val="0"/>
+              </a:spcBef>
+              <a:spcAft>
+                <a:spcPts val="0"/>
+              </a:spcAft>
+              <a:buClr>
+                <a:schemeClr val="dk2"/>
+              </a:buClr>
+              <a:buSzPts val="1400"/>
+              <a:buFont typeface="Fira Code"/>
+              <a:buChar char="○"/>
+              <a:defRPr sz="1400" b="0" i="0" u="none" strike="noStrike" cap="none">
+                <a:solidFill>
+                  <a:schemeClr val="dk2"/>
+                </a:solidFill>
+                <a:latin typeface="Fira Code"/>
+                <a:ea typeface="Fira Code"/>
+                <a:cs typeface="Fira Code"/>
+                <a:sym typeface="Fira Code"/>
+              </a:defRPr>
+            </a:lvl8pPr>
+            <a:lvl9pPr marL="4114800" marR="0" lvl="8" indent="-317500" algn="l" rtl="0">
+              <a:lnSpc>
+                <a:spcPct val="100000"/>
+              </a:lnSpc>
+              <a:spcBef>
+                <a:spcPts val="0"/>
+              </a:spcBef>
+              <a:spcAft>
+                <a:spcPts val="0"/>
+              </a:spcAft>
+              <a:buClr>
+                <a:schemeClr val="dk2"/>
+              </a:buClr>
+              <a:buSzPts val="1400"/>
+              <a:buFont typeface="Fira Code"/>
+              <a:buChar char="■"/>
+              <a:defRPr sz="1400" b="0" i="0" u="none" strike="noStrike" cap="none">
+                <a:solidFill>
+                  <a:schemeClr val="dk2"/>
+                </a:solidFill>
+                <a:latin typeface="Fira Code"/>
+                <a:ea typeface="Fira Code"/>
+                <a:cs typeface="Fira Code"/>
+                <a:sym typeface="Fira Code"/>
+              </a:defRPr>
+            </a:lvl9pPr>
+          </a:lstStyle>
+          <a:p>
+            <a:pPr marL="0" indent="0">
+              <a:buFont typeface="Fira Code"/>
+              <a:buNone/>
+            </a:pPr>
+            <a:r>
+              <a:rPr lang="en-US" dirty="0">
+                <a:solidFill>
+                  <a:schemeClr val="accent3"/>
+                </a:solidFill>
+              </a:rPr>
+              <a:t>Programming Language Lab</a:t>
+            </a:r>
+          </a:p>
+        </p:txBody>
+      </p:sp>
+      <p:sp>
+        <p:nvSpPr>
+          <p:cNvPr id="12" name="Google Shape;473;p28">
+            <a:extLst>
+              <a:ext uri="{FF2B5EF4-FFF2-40B4-BE49-F238E27FC236}">
+                <a16:creationId xmlns:a16="http://schemas.microsoft.com/office/drawing/2014/main" id="{B665FFA2-EC62-9343-6758-C6C30159395E}"/>
+              </a:ext>
+            </a:extLst>
+          </p:cNvPr>
+          <p:cNvSpPr txBox="1">
+            <a:spLocks/>
+          </p:cNvSpPr>
+          <p:nvPr/>
+        </p:nvSpPr>
+        <p:spPr>
+          <a:xfrm>
+            <a:off x="8433851" y="4694675"/>
+            <a:ext cx="438300" cy="357300"/>
+          </a:xfrm>
+          <a:prstGeom prst="rect">
+            <a:avLst/>
+          </a:prstGeom>
+          <a:noFill/>
+          <a:ln>
+            <a:noFill/>
+          </a:ln>
+        </p:spPr>
+        <p:txBody>
+          <a:bodyPr spcFirstLastPara="1" wrap="square" lIns="91425" tIns="91425" rIns="91425" bIns="91425" anchor="ctr" anchorCtr="0">
+            <a:noAutofit/>
+          </a:bodyPr>
+          <a:lstStyle>
+            <a:defPPr marR="0" lvl="0" algn="l" rtl="0">
+              <a:lnSpc>
+                <a:spcPct val="100000"/>
+              </a:lnSpc>
+              <a:spcBef>
+                <a:spcPts val="0"/>
+              </a:spcBef>
+              <a:spcAft>
+                <a:spcPts val="0"/>
+              </a:spcAft>
+            </a:defPPr>
+            <a:lvl1pPr marL="457200" marR="0" lvl="0" indent="-317500" algn="l" rtl="0">
+              <a:lnSpc>
+                <a:spcPct val="100000"/>
+              </a:lnSpc>
+              <a:spcBef>
+                <a:spcPts val="0"/>
+              </a:spcBef>
+              <a:spcAft>
+                <a:spcPts val="0"/>
+              </a:spcAft>
+              <a:buClr>
+                <a:schemeClr val="dk2"/>
+              </a:buClr>
+              <a:buSzPts val="1400"/>
+              <a:buFont typeface="Fira Code"/>
+              <a:buChar char="●"/>
+              <a:defRPr sz="1400" b="0" i="0" u="none" strike="noStrike" cap="none">
+                <a:solidFill>
+                  <a:schemeClr val="dk2"/>
+                </a:solidFill>
+                <a:latin typeface="Fira Code"/>
+                <a:ea typeface="Fira Code"/>
+                <a:cs typeface="Fira Code"/>
+                <a:sym typeface="Fira Code"/>
+              </a:defRPr>
+            </a:lvl1pPr>
+            <a:lvl2pPr marL="914400" marR="0" lvl="1" indent="-317500" algn="l" rtl="0">
+              <a:lnSpc>
+                <a:spcPct val="100000"/>
+              </a:lnSpc>
+              <a:spcBef>
+                <a:spcPts val="0"/>
+              </a:spcBef>
+              <a:spcAft>
+                <a:spcPts val="0"/>
+              </a:spcAft>
+              <a:buClr>
+                <a:schemeClr val="dk2"/>
+              </a:buClr>
+              <a:buSzPts val="1400"/>
+              <a:buFont typeface="Fira Code"/>
+              <a:buChar char="○"/>
+              <a:defRPr sz="1400" b="0" i="0" u="none" strike="noStrike" cap="none">
+                <a:solidFill>
+                  <a:schemeClr val="dk2"/>
+                </a:solidFill>
+                <a:latin typeface="Fira Code"/>
+                <a:ea typeface="Fira Code"/>
+                <a:cs typeface="Fira Code"/>
+                <a:sym typeface="Fira Code"/>
+              </a:defRPr>
+            </a:lvl2pPr>
+            <a:lvl3pPr marL="1371600" marR="0" lvl="2" indent="-317500" algn="l" rtl="0">
+              <a:lnSpc>
+                <a:spcPct val="100000"/>
+              </a:lnSpc>
+              <a:spcBef>
+                <a:spcPts val="0"/>
+              </a:spcBef>
+              <a:spcAft>
+                <a:spcPts val="0"/>
+              </a:spcAft>
+              <a:buClr>
+                <a:schemeClr val="dk2"/>
+              </a:buClr>
+              <a:buSzPts val="1400"/>
+              <a:buFont typeface="Fira Code"/>
+              <a:buChar char="■"/>
+              <a:defRPr sz="1400" b="0" i="0" u="none" strike="noStrike" cap="none">
+                <a:solidFill>
+                  <a:schemeClr val="dk2"/>
+                </a:solidFill>
+                <a:latin typeface="Fira Code"/>
+                <a:ea typeface="Fira Code"/>
+                <a:cs typeface="Fira Code"/>
+                <a:sym typeface="Fira Code"/>
+              </a:defRPr>
+            </a:lvl3pPr>
+            <a:lvl4pPr marL="1828800" marR="0" lvl="3" indent="-317500" algn="l" rtl="0">
+              <a:lnSpc>
+                <a:spcPct val="100000"/>
+              </a:lnSpc>
+              <a:spcBef>
+                <a:spcPts val="0"/>
+              </a:spcBef>
+              <a:spcAft>
+                <a:spcPts val="0"/>
+              </a:spcAft>
+              <a:buClr>
+                <a:schemeClr val="dk2"/>
+              </a:buClr>
+              <a:buSzPts val="1400"/>
+              <a:buFont typeface="Fira Code"/>
+              <a:buChar char="●"/>
+              <a:defRPr sz="1400" b="0" i="0" u="none" strike="noStrike" cap="none">
+                <a:solidFill>
+                  <a:schemeClr val="dk2"/>
+                </a:solidFill>
+                <a:latin typeface="Fira Code"/>
+                <a:ea typeface="Fira Code"/>
+                <a:cs typeface="Fira Code"/>
+                <a:sym typeface="Fira Code"/>
+              </a:defRPr>
+            </a:lvl4pPr>
+            <a:lvl5pPr marL="2286000" marR="0" lvl="4" indent="-317500" algn="l" rtl="0">
+              <a:lnSpc>
+                <a:spcPct val="100000"/>
+              </a:lnSpc>
+              <a:spcBef>
+                <a:spcPts val="0"/>
+              </a:spcBef>
+              <a:spcAft>
+                <a:spcPts val="0"/>
+              </a:spcAft>
+              <a:buClr>
+                <a:schemeClr val="dk2"/>
+              </a:buClr>
+              <a:buSzPts val="1400"/>
+              <a:buFont typeface="Fira Code"/>
+              <a:buChar char="○"/>
+              <a:defRPr sz="1400" b="0" i="0" u="none" strike="noStrike" cap="none">
+                <a:solidFill>
+                  <a:schemeClr val="dk2"/>
+                </a:solidFill>
+                <a:latin typeface="Fira Code"/>
+                <a:ea typeface="Fira Code"/>
+                <a:cs typeface="Fira Code"/>
+                <a:sym typeface="Fira Code"/>
+              </a:defRPr>
+            </a:lvl5pPr>
+            <a:lvl6pPr marL="2743200" marR="0" lvl="5" indent="-317500" algn="l" rtl="0">
+              <a:lnSpc>
+                <a:spcPct val="100000"/>
+              </a:lnSpc>
+              <a:spcBef>
+                <a:spcPts val="0"/>
+              </a:spcBef>
+              <a:spcAft>
+                <a:spcPts val="0"/>
+              </a:spcAft>
+              <a:buClr>
+                <a:schemeClr val="dk2"/>
+              </a:buClr>
+              <a:buSzPts val="1400"/>
+              <a:buFont typeface="Fira Code"/>
+              <a:buChar char="■"/>
+              <a:defRPr sz="1400" b="0" i="0" u="none" strike="noStrike" cap="none">
+                <a:solidFill>
+                  <a:schemeClr val="dk2"/>
+                </a:solidFill>
+                <a:latin typeface="Fira Code"/>
+                <a:ea typeface="Fira Code"/>
+                <a:cs typeface="Fira Code"/>
+                <a:sym typeface="Fira Code"/>
+              </a:defRPr>
+            </a:lvl6pPr>
+            <a:lvl7pPr marL="3200400" marR="0" lvl="6" indent="-317500" algn="l" rtl="0">
+              <a:lnSpc>
+                <a:spcPct val="100000"/>
+              </a:lnSpc>
+              <a:spcBef>
+                <a:spcPts val="0"/>
+              </a:spcBef>
+              <a:spcAft>
+                <a:spcPts val="0"/>
+              </a:spcAft>
+              <a:buClr>
+                <a:schemeClr val="dk2"/>
+              </a:buClr>
+              <a:buSzPts val="1400"/>
+              <a:buFont typeface="Fira Code"/>
+              <a:buChar char="●"/>
+              <a:defRPr sz="1400" b="0" i="0" u="none" strike="noStrike" cap="none">
+                <a:solidFill>
+                  <a:schemeClr val="dk2"/>
+                </a:solidFill>
+                <a:latin typeface="Fira Code"/>
+                <a:ea typeface="Fira Code"/>
+                <a:cs typeface="Fira Code"/>
+                <a:sym typeface="Fira Code"/>
+              </a:defRPr>
+            </a:lvl7pPr>
+            <a:lvl8pPr marL="3657600" marR="0" lvl="7" indent="-317500" algn="l" rtl="0">
+              <a:lnSpc>
+                <a:spcPct val="100000"/>
+              </a:lnSpc>
+              <a:spcBef>
+                <a:spcPts val="0"/>
+              </a:spcBef>
+              <a:spcAft>
+                <a:spcPts val="0"/>
+              </a:spcAft>
+              <a:buClr>
+                <a:schemeClr val="dk2"/>
+              </a:buClr>
+              <a:buSzPts val="1400"/>
+              <a:buFont typeface="Fira Code"/>
+              <a:buChar char="○"/>
+              <a:defRPr sz="1400" b="0" i="0" u="none" strike="noStrike" cap="none">
+                <a:solidFill>
+                  <a:schemeClr val="dk2"/>
+                </a:solidFill>
+                <a:latin typeface="Fira Code"/>
+                <a:ea typeface="Fira Code"/>
+                <a:cs typeface="Fira Code"/>
+                <a:sym typeface="Fira Code"/>
+              </a:defRPr>
+            </a:lvl8pPr>
+            <a:lvl9pPr marL="4114800" marR="0" lvl="8" indent="-317500" algn="l" rtl="0">
+              <a:lnSpc>
+                <a:spcPct val="100000"/>
+              </a:lnSpc>
+              <a:spcBef>
+                <a:spcPts val="0"/>
+              </a:spcBef>
+              <a:spcAft>
+                <a:spcPts val="0"/>
+              </a:spcAft>
+              <a:buClr>
+                <a:schemeClr val="dk2"/>
+              </a:buClr>
+              <a:buSzPts val="1400"/>
+              <a:buFont typeface="Fira Code"/>
+              <a:buChar char="■"/>
+              <a:defRPr sz="1400" b="0" i="0" u="none" strike="noStrike" cap="none">
+                <a:solidFill>
+                  <a:schemeClr val="dk2"/>
+                </a:solidFill>
+                <a:latin typeface="Fira Code"/>
+                <a:ea typeface="Fira Code"/>
+                <a:cs typeface="Fira Code"/>
+                <a:sym typeface="Fira Code"/>
+              </a:defRPr>
+            </a:lvl9pPr>
+          </a:lstStyle>
+          <a:p>
+            <a:pPr marL="0" indent="0">
+              <a:buFont typeface="Fira Code"/>
+              <a:buNone/>
+            </a:pPr>
+            <a:r>
+              <a:rPr lang="en" sz="1100" dirty="0">
+                <a:solidFill>
+                  <a:schemeClr val="accent3"/>
+                </a:solidFill>
+              </a:rPr>
+              <a:t>12</a:t>
+            </a:r>
+            <a:endParaRPr lang="en" dirty="0">
+              <a:solidFill>
+                <a:schemeClr val="accent3"/>
+              </a:solidFill>
+            </a:endParaRPr>
+          </a:p>
+        </p:txBody>
+      </p:sp>
+    </p:spTree>
+    <p:extLst>
+      <p:ext uri="{BB962C8B-B14F-4D97-AF65-F5344CB8AC3E}">
+        <p14:creationId xmlns:p14="http://schemas.microsoft.com/office/powerpoint/2010/main" val="926536661"/>
+      </p:ext>
+    </p:extLst>
+  </p:cSld>
+  <p:clrMapOvr>
+    <a:masterClrMapping/>
+  </p:clrMapOvr>
+</p:sld>
+</file>
+
+<file path=ppt/slides/slide14.xml><?xml version="1.0" encoding="utf-8"?>
+<p:sld xmlns:a="http://schemas.openxmlformats.org/drawingml/2006/main" xmlns:r="http://schemas.openxmlformats.org/officeDocument/2006/relationships" xmlns:p="http://schemas.openxmlformats.org/presentationml/2006/main">
+  <p:cSld>
+    <p:spTree>
+      <p:nvGrpSpPr>
+        <p:cNvPr id="1" name=""/>
+        <p:cNvGrpSpPr/>
+        <p:nvPr/>
+      </p:nvGrpSpPr>
+      <p:grpSpPr>
+        <a:xfrm>
+          <a:off x="0" y="0"/>
+          <a:ext cx="0" cy="0"/>
+          <a:chOff x="0" y="0"/>
+          <a:chExt cx="0" cy="0"/>
+        </a:xfrm>
+      </p:grpSpPr>
+      <p:sp>
+        <p:nvSpPr>
+          <p:cNvPr id="4" name="Google Shape;814;p39">
+            <a:extLst>
+              <a:ext uri="{FF2B5EF4-FFF2-40B4-BE49-F238E27FC236}">
+                <a16:creationId xmlns:a16="http://schemas.microsoft.com/office/drawing/2014/main" id="{D70149FA-158B-2980-B68B-9C4F49D364DC}"/>
+              </a:ext>
+            </a:extLst>
+          </p:cNvPr>
+          <p:cNvSpPr txBox="1">
+            <a:spLocks/>
+          </p:cNvSpPr>
+          <p:nvPr/>
+        </p:nvSpPr>
+        <p:spPr>
+          <a:xfrm>
+            <a:off x="1015267" y="537519"/>
+            <a:ext cx="7113466" cy="596254"/>
+          </a:xfrm>
+          <a:prstGeom prst="rect">
+            <a:avLst/>
+          </a:prstGeom>
+          <a:noFill/>
+          <a:ln>
+            <a:noFill/>
+          </a:ln>
+        </p:spPr>
+        <p:txBody>
+          <a:bodyPr spcFirstLastPara="1" wrap="square" lIns="91425" tIns="91425" rIns="91425" bIns="91425" anchor="ctr" anchorCtr="0">
+            <a:noAutofit/>
+          </a:bodyPr>
+          <a:lstStyle>
+            <a:defPPr marR="0" lvl="0" algn="l" rtl="0">
+              <a:lnSpc>
+                <a:spcPct val="100000"/>
+              </a:lnSpc>
+              <a:spcBef>
+                <a:spcPts val="0"/>
+              </a:spcBef>
+              <a:spcAft>
+                <a:spcPts val="0"/>
+              </a:spcAft>
+            </a:defPPr>
+            <a:lvl1pPr marR="0" lvl="0" algn="l" rtl="0">
+              <a:lnSpc>
+                <a:spcPct val="100000"/>
+              </a:lnSpc>
+              <a:spcBef>
+                <a:spcPts val="0"/>
+              </a:spcBef>
+              <a:spcAft>
+                <a:spcPts val="0"/>
+              </a:spcAft>
+              <a:buClr>
+                <a:schemeClr val="lt1"/>
+              </a:buClr>
+              <a:buSzPts val="5200"/>
+              <a:buFont typeface="Fira Code"/>
+              <a:buNone/>
+              <a:defRPr sz="3000" b="0" i="0" u="none" strike="noStrike" cap="none">
+                <a:solidFill>
+                  <a:schemeClr val="lt1"/>
+                </a:solidFill>
+                <a:latin typeface="Fira Code"/>
+                <a:ea typeface="Fira Code"/>
+                <a:cs typeface="Fira Code"/>
+                <a:sym typeface="Fira Code"/>
+              </a:defRPr>
+            </a:lvl1pPr>
+            <a:lvl2pPr marR="0" lvl="1" algn="ctr" rtl="0">
+              <a:lnSpc>
+                <a:spcPct val="100000"/>
+              </a:lnSpc>
+              <a:spcBef>
+                <a:spcPts val="0"/>
+              </a:spcBef>
+              <a:spcAft>
+                <a:spcPts val="0"/>
+              </a:spcAft>
+              <a:buClr>
+                <a:schemeClr val="dk1"/>
+              </a:buClr>
+              <a:buSzPts val="5200"/>
+              <a:buFont typeface="Fira Code"/>
+              <a:buNone/>
+              <a:defRPr sz="5200" b="0" i="0" u="none" strike="noStrike" cap="none">
+                <a:solidFill>
+                  <a:schemeClr val="dk1"/>
+                </a:solidFill>
+                <a:latin typeface="Fira Code"/>
+                <a:ea typeface="Fira Code"/>
+                <a:cs typeface="Fira Code"/>
+                <a:sym typeface="Fira Code"/>
+              </a:defRPr>
+            </a:lvl2pPr>
+            <a:lvl3pPr marR="0" lvl="2" algn="ctr" rtl="0">
+              <a:lnSpc>
+                <a:spcPct val="100000"/>
+              </a:lnSpc>
+              <a:spcBef>
+                <a:spcPts val="0"/>
+              </a:spcBef>
+              <a:spcAft>
+                <a:spcPts val="0"/>
+              </a:spcAft>
+              <a:buClr>
+                <a:schemeClr val="dk1"/>
+              </a:buClr>
+              <a:buSzPts val="5200"/>
+              <a:buFont typeface="Fira Code"/>
+              <a:buNone/>
+              <a:defRPr sz="5200" b="0" i="0" u="none" strike="noStrike" cap="none">
+                <a:solidFill>
+                  <a:schemeClr val="dk1"/>
+                </a:solidFill>
+                <a:latin typeface="Fira Code"/>
+                <a:ea typeface="Fira Code"/>
+                <a:cs typeface="Fira Code"/>
+                <a:sym typeface="Fira Code"/>
+              </a:defRPr>
+            </a:lvl3pPr>
+            <a:lvl4pPr marR="0" lvl="3" algn="ctr" rtl="0">
+              <a:lnSpc>
+                <a:spcPct val="100000"/>
+              </a:lnSpc>
+              <a:spcBef>
+                <a:spcPts val="0"/>
+              </a:spcBef>
+              <a:spcAft>
+                <a:spcPts val="0"/>
+              </a:spcAft>
+              <a:buClr>
+                <a:schemeClr val="dk1"/>
+              </a:buClr>
+              <a:buSzPts val="5200"/>
+              <a:buFont typeface="Fira Code"/>
+              <a:buNone/>
+              <a:defRPr sz="5200" b="0" i="0" u="none" strike="noStrike" cap="none">
+                <a:solidFill>
+                  <a:schemeClr val="dk1"/>
+                </a:solidFill>
+                <a:latin typeface="Fira Code"/>
+                <a:ea typeface="Fira Code"/>
+                <a:cs typeface="Fira Code"/>
+                <a:sym typeface="Fira Code"/>
+              </a:defRPr>
+            </a:lvl4pPr>
+            <a:lvl5pPr marR="0" lvl="4" algn="ctr" rtl="0">
+              <a:lnSpc>
+                <a:spcPct val="100000"/>
+              </a:lnSpc>
+              <a:spcBef>
+                <a:spcPts val="0"/>
+              </a:spcBef>
+              <a:spcAft>
+                <a:spcPts val="0"/>
+              </a:spcAft>
+              <a:buClr>
+                <a:schemeClr val="dk1"/>
+              </a:buClr>
+              <a:buSzPts val="5200"/>
+              <a:buFont typeface="Fira Code"/>
+              <a:buNone/>
+              <a:defRPr sz="5200" b="0" i="0" u="none" strike="noStrike" cap="none">
+                <a:solidFill>
+                  <a:schemeClr val="dk1"/>
+                </a:solidFill>
+                <a:latin typeface="Fira Code"/>
+                <a:ea typeface="Fira Code"/>
+                <a:cs typeface="Fira Code"/>
+                <a:sym typeface="Fira Code"/>
+              </a:defRPr>
+            </a:lvl5pPr>
+            <a:lvl6pPr marR="0" lvl="5" algn="ctr" rtl="0">
+              <a:lnSpc>
+                <a:spcPct val="100000"/>
+              </a:lnSpc>
+              <a:spcBef>
+                <a:spcPts val="0"/>
+              </a:spcBef>
+              <a:spcAft>
+                <a:spcPts val="0"/>
+              </a:spcAft>
+              <a:buClr>
+                <a:schemeClr val="dk1"/>
+              </a:buClr>
+              <a:buSzPts val="5200"/>
+              <a:buFont typeface="Fira Code"/>
+              <a:buNone/>
+              <a:defRPr sz="5200" b="0" i="0" u="none" strike="noStrike" cap="none">
+                <a:solidFill>
+                  <a:schemeClr val="dk1"/>
+                </a:solidFill>
+                <a:latin typeface="Fira Code"/>
+                <a:ea typeface="Fira Code"/>
+                <a:cs typeface="Fira Code"/>
+                <a:sym typeface="Fira Code"/>
+              </a:defRPr>
+            </a:lvl6pPr>
+            <a:lvl7pPr marR="0" lvl="6" algn="ctr" rtl="0">
+              <a:lnSpc>
+                <a:spcPct val="100000"/>
+              </a:lnSpc>
+              <a:spcBef>
+                <a:spcPts val="0"/>
+              </a:spcBef>
+              <a:spcAft>
+                <a:spcPts val="0"/>
+              </a:spcAft>
+              <a:buClr>
+                <a:schemeClr val="dk1"/>
+              </a:buClr>
+              <a:buSzPts val="5200"/>
+              <a:buFont typeface="Fira Code"/>
+              <a:buNone/>
+              <a:defRPr sz="5200" b="0" i="0" u="none" strike="noStrike" cap="none">
+                <a:solidFill>
+                  <a:schemeClr val="dk1"/>
+                </a:solidFill>
+                <a:latin typeface="Fira Code"/>
+                <a:ea typeface="Fira Code"/>
+                <a:cs typeface="Fira Code"/>
+                <a:sym typeface="Fira Code"/>
+              </a:defRPr>
+            </a:lvl7pPr>
+            <a:lvl8pPr marR="0" lvl="7" algn="ctr" rtl="0">
+              <a:lnSpc>
+                <a:spcPct val="100000"/>
+              </a:lnSpc>
+              <a:spcBef>
+                <a:spcPts val="0"/>
+              </a:spcBef>
+              <a:spcAft>
+                <a:spcPts val="0"/>
+              </a:spcAft>
+              <a:buClr>
+                <a:schemeClr val="dk1"/>
+              </a:buClr>
+              <a:buSzPts val="5200"/>
+              <a:buFont typeface="Fira Code"/>
+              <a:buNone/>
+              <a:defRPr sz="5200" b="0" i="0" u="none" strike="noStrike" cap="none">
+                <a:solidFill>
+                  <a:schemeClr val="dk1"/>
+                </a:solidFill>
+                <a:latin typeface="Fira Code"/>
+                <a:ea typeface="Fira Code"/>
+                <a:cs typeface="Fira Code"/>
+                <a:sym typeface="Fira Code"/>
+              </a:defRPr>
+            </a:lvl8pPr>
+            <a:lvl9pPr marR="0" lvl="8" algn="ctr" rtl="0">
+              <a:lnSpc>
+                <a:spcPct val="100000"/>
+              </a:lnSpc>
+              <a:spcBef>
+                <a:spcPts val="0"/>
+              </a:spcBef>
+              <a:spcAft>
+                <a:spcPts val="0"/>
+              </a:spcAft>
+              <a:buClr>
+                <a:schemeClr val="dk1"/>
+              </a:buClr>
+              <a:buSzPts val="5200"/>
+              <a:buFont typeface="Fira Code"/>
+              <a:buNone/>
+              <a:defRPr sz="5200" b="0" i="0" u="none" strike="noStrike" cap="none">
+                <a:solidFill>
+                  <a:schemeClr val="dk1"/>
+                </a:solidFill>
+                <a:latin typeface="Fira Code"/>
+                <a:ea typeface="Fira Code"/>
+                <a:cs typeface="Fira Code"/>
+                <a:sym typeface="Fira Code"/>
+              </a:defRPr>
+            </a:lvl9pPr>
+          </a:lstStyle>
+          <a:p>
+            <a:endParaRPr lang="fa-IR" sz="2400" dirty="0">
+              <a:solidFill>
+                <a:schemeClr val="accent2"/>
+              </a:solidFill>
+            </a:endParaRPr>
+          </a:p>
+          <a:p>
+            <a:r>
+              <a:rPr lang="en-US" sz="2400" dirty="0">
+                <a:solidFill>
+                  <a:schemeClr val="accent2"/>
+                </a:solidFill>
+              </a:rPr>
+              <a:t>How to Search and Fix Errors in C</a:t>
+            </a:r>
+          </a:p>
+          <a:p>
+            <a:endParaRPr lang="en-US" sz="2400" dirty="0">
+              <a:solidFill>
+                <a:schemeClr val="accent2"/>
+              </a:solidFill>
+            </a:endParaRPr>
+          </a:p>
+        </p:txBody>
+      </p:sp>
+      <p:sp>
+        <p:nvSpPr>
+          <p:cNvPr id="5" name="TextBox 4">
+            <a:extLst>
+              <a:ext uri="{FF2B5EF4-FFF2-40B4-BE49-F238E27FC236}">
+                <a16:creationId xmlns:a16="http://schemas.microsoft.com/office/drawing/2014/main" id="{03DF2F23-1D32-AD39-DD38-D92F15374BE0}"/>
+              </a:ext>
+            </a:extLst>
+          </p:cNvPr>
+          <p:cNvSpPr txBox="1"/>
+          <p:nvPr/>
+        </p:nvSpPr>
+        <p:spPr>
+          <a:xfrm>
+            <a:off x="1439561" y="1059632"/>
+            <a:ext cx="7531443" cy="3400931"/>
+          </a:xfrm>
+          <a:prstGeom prst="rect">
+            <a:avLst/>
+          </a:prstGeom>
+          <a:noFill/>
+        </p:spPr>
+        <p:txBody>
+          <a:bodyPr wrap="square">
+            <a:spAutoFit/>
+          </a:bodyPr>
+          <a:lstStyle/>
+          <a:p>
+            <a:pPr lvl="2" eaLnBrk="0" fontAlgn="base" hangingPunct="0">
+              <a:lnSpc>
+                <a:spcPct val="150000"/>
+              </a:lnSpc>
+              <a:buClr>
+                <a:schemeClr val="accent3"/>
+              </a:buClr>
+            </a:pPr>
+            <a:r>
+              <a:rPr lang="en-US" b="1" dirty="0">
+                <a:solidFill>
+                  <a:schemeClr val="accent3"/>
+                </a:solidFill>
+                <a:latin typeface="Fira Code" panose="020B0809050000020004" pitchFamily="49" charset="0"/>
+                <a:ea typeface="Fira Code" panose="020B0809050000020004" pitchFamily="49" charset="0"/>
+                <a:cs typeface="Fira Code" panose="020B0809050000020004" pitchFamily="49" charset="0"/>
+              </a:rPr>
+              <a:t>3. Use Online Search Effectively</a:t>
+            </a:r>
+          </a:p>
+          <a:p>
+            <a:pPr lvl="3" eaLnBrk="0" fontAlgn="base" hangingPunct="0">
+              <a:lnSpc>
+                <a:spcPct val="150000"/>
+              </a:lnSpc>
+              <a:spcBef>
+                <a:spcPct val="0"/>
+              </a:spcBef>
+              <a:spcAft>
+                <a:spcPct val="0"/>
+              </a:spcAft>
+              <a:buClrTx/>
+            </a:pPr>
+            <a:r>
+              <a:rPr lang="en-US" altLang="en-US" sz="1200" dirty="0">
+                <a:solidFill>
+                  <a:schemeClr val="accent3"/>
+                </a:solidFill>
+                <a:latin typeface="Fira Code" panose="020B0809050000020004" pitchFamily="49" charset="0"/>
+                <a:ea typeface="Fira Code" panose="020B0809050000020004" pitchFamily="49" charset="0"/>
+                <a:cs typeface="Fira Code" panose="020B0809050000020004" pitchFamily="49" charset="0"/>
+              </a:rPr>
+              <a:t>    Copy only relevant part of the error message</a:t>
+            </a:r>
+          </a:p>
+          <a:p>
+            <a:pPr lvl="3" eaLnBrk="0" fontAlgn="base" hangingPunct="0">
+              <a:lnSpc>
+                <a:spcPct val="150000"/>
+              </a:lnSpc>
+              <a:spcBef>
+                <a:spcPct val="0"/>
+              </a:spcBef>
+              <a:spcAft>
+                <a:spcPct val="0"/>
+              </a:spcAft>
+              <a:buClrTx/>
+            </a:pPr>
+            <a:r>
+              <a:rPr lang="en-US" altLang="en-US" sz="1200" dirty="0">
+                <a:solidFill>
+                  <a:schemeClr val="accent3"/>
+                </a:solidFill>
+                <a:latin typeface="Fira Code" panose="020B0809050000020004" pitchFamily="49" charset="0"/>
+                <a:ea typeface="Fira Code" panose="020B0809050000020004" pitchFamily="49" charset="0"/>
+                <a:cs typeface="Fira Code" panose="020B0809050000020004" pitchFamily="49" charset="0"/>
+              </a:rPr>
+              <a:t>    Add keywords like "C language" or "</a:t>
+            </a:r>
+            <a:r>
+              <a:rPr lang="en-US" altLang="en-US" sz="1200" dirty="0" err="1">
+                <a:solidFill>
+                  <a:schemeClr val="accent3"/>
+                </a:solidFill>
+                <a:latin typeface="Fira Code" panose="020B0809050000020004" pitchFamily="49" charset="0"/>
+                <a:ea typeface="Fira Code" panose="020B0809050000020004" pitchFamily="49" charset="0"/>
+                <a:cs typeface="Fira Code" panose="020B0809050000020004" pitchFamily="49" charset="0"/>
+              </a:rPr>
+              <a:t>gcc</a:t>
+            </a:r>
+            <a:r>
+              <a:rPr lang="en-US" altLang="en-US" sz="1200" dirty="0">
+                <a:solidFill>
+                  <a:schemeClr val="accent3"/>
+                </a:solidFill>
+                <a:latin typeface="Fira Code" panose="020B0809050000020004" pitchFamily="49" charset="0"/>
+                <a:ea typeface="Fira Code" panose="020B0809050000020004" pitchFamily="49" charset="0"/>
+                <a:cs typeface="Fira Code" panose="020B0809050000020004" pitchFamily="49" charset="0"/>
+              </a:rPr>
+              <a:t>"</a:t>
+            </a:r>
+          </a:p>
+          <a:p>
+            <a:pPr lvl="0" eaLnBrk="0" fontAlgn="base" hangingPunct="0">
+              <a:spcBef>
+                <a:spcPct val="0"/>
+              </a:spcBef>
+              <a:spcAft>
+                <a:spcPct val="0"/>
+              </a:spcAft>
+              <a:buClrTx/>
+              <a:buFontTx/>
+              <a:buChar char="•"/>
+            </a:pPr>
+            <a:endParaRPr lang="en-US" altLang="en-US" sz="1200" dirty="0">
+              <a:solidFill>
+                <a:schemeClr val="tx1"/>
+              </a:solidFill>
+              <a:latin typeface="Arial" panose="020B0604020202020204" pitchFamily="34" charset="0"/>
+            </a:endParaRPr>
+          </a:p>
+          <a:p>
+            <a:pPr lvl="2" eaLnBrk="0" fontAlgn="base" hangingPunct="0">
+              <a:lnSpc>
+                <a:spcPct val="150000"/>
+              </a:lnSpc>
+              <a:buClr>
+                <a:schemeClr val="accent3"/>
+              </a:buClr>
+            </a:pPr>
+            <a:r>
+              <a:rPr lang="en-US" b="1" dirty="0">
+                <a:solidFill>
+                  <a:schemeClr val="accent3"/>
+                </a:solidFill>
+                <a:latin typeface="Fira Code" panose="020B0809050000020004" pitchFamily="49" charset="0"/>
+                <a:ea typeface="Fira Code" panose="020B0809050000020004" pitchFamily="49" charset="0"/>
+                <a:cs typeface="Fira Code" panose="020B0809050000020004" pitchFamily="49" charset="0"/>
+              </a:rPr>
+              <a:t>4. Test Small Changes</a:t>
+            </a:r>
+            <a:endParaRPr lang="en-US" altLang="en-US" sz="1800" dirty="0">
+              <a:solidFill>
+                <a:schemeClr val="accent3"/>
+              </a:solidFill>
+              <a:latin typeface="Arial" panose="020B0604020202020204" pitchFamily="34" charset="0"/>
+            </a:endParaRPr>
+          </a:p>
+          <a:p>
+            <a:pPr lvl="0" eaLnBrk="0" fontAlgn="base" hangingPunct="0">
+              <a:lnSpc>
+                <a:spcPct val="150000"/>
+              </a:lnSpc>
+              <a:spcBef>
+                <a:spcPct val="0"/>
+              </a:spcBef>
+              <a:spcAft>
+                <a:spcPct val="0"/>
+              </a:spcAft>
+              <a:buClrTx/>
+            </a:pPr>
+            <a:r>
+              <a:rPr lang="en-US" altLang="en-US" sz="1200" dirty="0">
+                <a:solidFill>
+                  <a:schemeClr val="accent3"/>
+                </a:solidFill>
+                <a:latin typeface="Fira Code" panose="020B0809050000020004" pitchFamily="49" charset="0"/>
+                <a:ea typeface="Fira Code" panose="020B0809050000020004" pitchFamily="49" charset="0"/>
+                <a:cs typeface="Fira Code" panose="020B0809050000020004" pitchFamily="49" charset="0"/>
+              </a:rPr>
+              <a:t>    </a:t>
+            </a:r>
+            <a:r>
+              <a:rPr lang="en-US" altLang="en-US" sz="1200" b="1" dirty="0">
+                <a:solidFill>
+                  <a:schemeClr val="accent3"/>
+                </a:solidFill>
+                <a:latin typeface="Fira Code" panose="020B0809050000020004" pitchFamily="49" charset="0"/>
+                <a:ea typeface="Fira Code" panose="020B0809050000020004" pitchFamily="49" charset="0"/>
+                <a:cs typeface="Fira Code" panose="020B0809050000020004" pitchFamily="49" charset="0"/>
+              </a:rPr>
+              <a:t>Comment</a:t>
+            </a:r>
+            <a:r>
+              <a:rPr lang="en-US" altLang="en-US" sz="1200" dirty="0">
+                <a:solidFill>
+                  <a:schemeClr val="accent3"/>
+                </a:solidFill>
+                <a:latin typeface="Fira Code" panose="020B0809050000020004" pitchFamily="49" charset="0"/>
+                <a:ea typeface="Fira Code" panose="020B0809050000020004" pitchFamily="49" charset="0"/>
+                <a:cs typeface="Fira Code" panose="020B0809050000020004" pitchFamily="49" charset="0"/>
+              </a:rPr>
+              <a:t> suspicious code and recompile</a:t>
+            </a:r>
+          </a:p>
+          <a:p>
+            <a:pPr lvl="0" eaLnBrk="0" fontAlgn="base" hangingPunct="0">
+              <a:lnSpc>
+                <a:spcPct val="150000"/>
+              </a:lnSpc>
+              <a:spcBef>
+                <a:spcPct val="0"/>
+              </a:spcBef>
+              <a:spcAft>
+                <a:spcPct val="0"/>
+              </a:spcAft>
+              <a:buClrTx/>
+            </a:pPr>
+            <a:r>
+              <a:rPr lang="en-US" altLang="en-US" sz="1200" dirty="0">
+                <a:solidFill>
+                  <a:schemeClr val="accent3"/>
+                </a:solidFill>
+                <a:latin typeface="Fira Code" panose="020B0809050000020004" pitchFamily="49" charset="0"/>
+                <a:ea typeface="Fira Code" panose="020B0809050000020004" pitchFamily="49" charset="0"/>
+                <a:cs typeface="Fira Code" panose="020B0809050000020004" pitchFamily="49" charset="0"/>
+              </a:rPr>
+              <a:t>    Use </a:t>
+            </a:r>
+            <a:r>
+              <a:rPr lang="en-US" altLang="en-US" sz="1200" b="1" dirty="0" err="1">
+                <a:solidFill>
+                  <a:schemeClr val="accent3"/>
+                </a:solidFill>
+                <a:latin typeface="Fira Code" panose="020B0809050000020004" pitchFamily="49" charset="0"/>
+                <a:ea typeface="Fira Code" panose="020B0809050000020004" pitchFamily="49" charset="0"/>
+                <a:cs typeface="Fira Code" panose="020B0809050000020004" pitchFamily="49" charset="0"/>
+              </a:rPr>
+              <a:t>printf</a:t>
+            </a:r>
+            <a:r>
+              <a:rPr lang="en-US" altLang="en-US" sz="1200" dirty="0">
+                <a:solidFill>
+                  <a:schemeClr val="accent3"/>
+                </a:solidFill>
+                <a:latin typeface="Fira Code" panose="020B0809050000020004" pitchFamily="49" charset="0"/>
+                <a:ea typeface="Fira Code" panose="020B0809050000020004" pitchFamily="49" charset="0"/>
+                <a:cs typeface="Fira Code" panose="020B0809050000020004" pitchFamily="49" charset="0"/>
+              </a:rPr>
+              <a:t> debugging to track variable values</a:t>
+            </a:r>
+          </a:p>
+          <a:p>
+            <a:pPr lvl="0" eaLnBrk="0" fontAlgn="base" hangingPunct="0">
+              <a:lnSpc>
+                <a:spcPct val="150000"/>
+              </a:lnSpc>
+              <a:spcBef>
+                <a:spcPct val="0"/>
+              </a:spcBef>
+              <a:spcAft>
+                <a:spcPct val="0"/>
+              </a:spcAft>
+              <a:buClrTx/>
+            </a:pPr>
+            <a:endParaRPr lang="en-US" altLang="en-US" sz="1200" dirty="0">
+              <a:solidFill>
+                <a:schemeClr val="accent3"/>
+              </a:solidFill>
+              <a:latin typeface="Fira Code" panose="020B0809050000020004" pitchFamily="49" charset="0"/>
+              <a:ea typeface="Fira Code" panose="020B0809050000020004" pitchFamily="49" charset="0"/>
+              <a:cs typeface="Fira Code" panose="020B0809050000020004" pitchFamily="49" charset="0"/>
+            </a:endParaRPr>
+          </a:p>
+          <a:p>
+            <a:pPr lvl="0" eaLnBrk="0" fontAlgn="base" hangingPunct="0">
+              <a:lnSpc>
+                <a:spcPct val="150000"/>
+              </a:lnSpc>
+              <a:spcBef>
+                <a:spcPct val="0"/>
+              </a:spcBef>
+              <a:spcAft>
+                <a:spcPct val="0"/>
+              </a:spcAft>
+              <a:buClrTx/>
+            </a:pPr>
+            <a:r>
+              <a:rPr lang="en-US" altLang="en-US" b="1" dirty="0">
+                <a:solidFill>
+                  <a:schemeClr val="accent3"/>
+                </a:solidFill>
+                <a:latin typeface="Fira Code" panose="020B0809050000020004" pitchFamily="49" charset="0"/>
+                <a:ea typeface="Fira Code" panose="020B0809050000020004" pitchFamily="49" charset="0"/>
+                <a:cs typeface="Fira Code" panose="020B0809050000020004" pitchFamily="49" charset="0"/>
+              </a:rPr>
+              <a:t>5. </a:t>
+            </a:r>
+            <a:r>
+              <a:rPr lang="en-US" b="1" dirty="0">
+                <a:solidFill>
+                  <a:schemeClr val="accent3"/>
+                </a:solidFill>
+                <a:latin typeface="Fira Code" panose="020B0809050000020004" pitchFamily="49" charset="0"/>
+                <a:ea typeface="Fira Code" panose="020B0809050000020004" pitchFamily="49" charset="0"/>
+                <a:cs typeface="Fira Code" panose="020B0809050000020004" pitchFamily="49" charset="0"/>
+              </a:rPr>
+              <a:t>Learn from the Fix</a:t>
+            </a:r>
+            <a:endParaRPr lang="en-US" altLang="en-US" b="1" dirty="0">
+              <a:solidFill>
+                <a:schemeClr val="accent3"/>
+              </a:solidFill>
+              <a:latin typeface="Fira Code" panose="020B0809050000020004" pitchFamily="49" charset="0"/>
+              <a:ea typeface="Fira Code" panose="020B0809050000020004" pitchFamily="49" charset="0"/>
+              <a:cs typeface="Fira Code" panose="020B0809050000020004" pitchFamily="49" charset="0"/>
+            </a:endParaRPr>
+          </a:p>
+          <a:p>
+            <a:pPr lvl="0" eaLnBrk="0" fontAlgn="base" hangingPunct="0">
+              <a:lnSpc>
+                <a:spcPct val="150000"/>
+              </a:lnSpc>
+              <a:spcBef>
+                <a:spcPct val="0"/>
+              </a:spcBef>
+              <a:spcAft>
+                <a:spcPct val="0"/>
+              </a:spcAft>
+              <a:buClrTx/>
+            </a:pPr>
+            <a:r>
+              <a:rPr lang="en-US" altLang="en-US" sz="1200" dirty="0">
+                <a:solidFill>
+                  <a:schemeClr val="accent3"/>
+                </a:solidFill>
+                <a:latin typeface="Fira Code" panose="020B0809050000020004" pitchFamily="49" charset="0"/>
+                <a:ea typeface="Fira Code" panose="020B0809050000020004" pitchFamily="49" charset="0"/>
+                <a:cs typeface="Fira Code" panose="020B0809050000020004" pitchFamily="49" charset="0"/>
+              </a:rPr>
+              <a:t>    Document the solution for future reference</a:t>
+            </a:r>
+          </a:p>
+          <a:p>
+            <a:pPr lvl="0" eaLnBrk="0" fontAlgn="base" hangingPunct="0">
+              <a:lnSpc>
+                <a:spcPct val="150000"/>
+              </a:lnSpc>
+              <a:spcBef>
+                <a:spcPct val="0"/>
+              </a:spcBef>
+              <a:spcAft>
+                <a:spcPct val="0"/>
+              </a:spcAft>
+              <a:buClrTx/>
+            </a:pPr>
+            <a:r>
+              <a:rPr lang="en-US" altLang="en-US" sz="1200" dirty="0">
+                <a:solidFill>
+                  <a:schemeClr val="accent3"/>
+                </a:solidFill>
+                <a:latin typeface="Fira Code" panose="020B0809050000020004" pitchFamily="49" charset="0"/>
+                <a:ea typeface="Fira Code" panose="020B0809050000020004" pitchFamily="49" charset="0"/>
+                <a:cs typeface="Fira Code" panose="020B0809050000020004" pitchFamily="49" charset="0"/>
+              </a:rPr>
+              <a:t>    Share with your classmates or team</a:t>
+            </a:r>
+          </a:p>
+          <a:p>
+            <a:endParaRPr lang="en-US" dirty="0">
+              <a:solidFill>
+                <a:schemeClr val="accent3"/>
+              </a:solidFill>
+              <a:latin typeface="Fira Code" panose="020B0809050000020004" pitchFamily="49" charset="0"/>
+              <a:ea typeface="Fira Code" panose="020B0809050000020004" pitchFamily="49" charset="0"/>
+              <a:cs typeface="Fira Code" panose="020B0809050000020004" pitchFamily="49" charset="0"/>
+            </a:endParaRPr>
+          </a:p>
+        </p:txBody>
+      </p:sp>
+      <p:sp>
+        <p:nvSpPr>
+          <p:cNvPr id="8" name="Rectangle 3">
+            <a:extLst>
+              <a:ext uri="{FF2B5EF4-FFF2-40B4-BE49-F238E27FC236}">
+                <a16:creationId xmlns:a16="http://schemas.microsoft.com/office/drawing/2014/main" id="{709E14F0-DB15-D278-30B8-673581F86134}"/>
+              </a:ext>
+            </a:extLst>
+          </p:cNvPr>
+          <p:cNvSpPr>
+            <a:spLocks noChangeArrowheads="1"/>
+          </p:cNvSpPr>
+          <p:nvPr/>
+        </p:nvSpPr>
+        <p:spPr bwMode="auto">
+          <a:xfrm>
+            <a:off x="0" y="-184666"/>
+            <a:ext cx="264816" cy="369332"/>
+          </a:xfrm>
+          <a:prstGeom prst="rect">
+            <a:avLst/>
+          </a:prstGeom>
+          <a:noFill/>
+          <a:ln>
+            <a:noFill/>
+          </a:ln>
+          <a:effectLst/>
+          <a:extLst>
+            <a:ext uri="{909E8E84-426E-40DD-AFC4-6F175D3DCCD1}">
+              <a14:hiddenFill xmlns:a14="http://schemas.microsoft.com/office/drawing/2010/main">
+                <a:solidFill>
+                  <a:schemeClr val="accent1"/>
+                </a:solidFill>
+              </a14:hiddenFill>
+            </a:ext>
+            <a:ext uri="{91240B29-F687-4F45-9708-019B960494DF}">
+              <a14:hiddenLine xmlns:a14="http://schemas.microsoft.com/office/drawing/2010/main" w="9525">
+                <a:solidFill>
+                  <a:schemeClr val="tx1"/>
+                </a:solidFill>
+                <a:miter lim="800000"/>
+                <a:headEnd/>
+                <a:tailEnd/>
+              </a14:hiddenLine>
+            </a:ext>
+            <a:ext uri="{AF507438-7753-43E0-B8FC-AC1667EBCBE1}">
+              <a14:hiddenEffects xmlns:a14="http://schemas.microsoft.com/office/drawing/2010/main">
+                <a:effectLst>
+                  <a:outerShdw dist="35921" dir="2700000" algn="ctr" rotWithShape="0">
+                    <a:schemeClr val="bg2"/>
+                  </a:outerShdw>
+                </a:effectLst>
+              </a14:hiddenEffects>
+            </a:ext>
+          </a:extLst>
+        </p:spPr>
+        <p:txBody>
+          <a:bodyPr vert="horz" wrap="none" lIns="91440" tIns="45720" rIns="91440" bIns="45720" numCol="1" anchor="ctr" anchorCtr="0" compatLnSpc="1">
+            <a:prstTxWarp prst="textNoShape">
+              <a:avLst/>
+            </a:prstTxWarp>
+            <a:spAutoFit/>
+          </a:bodyPr>
+          <a:lstStyle/>
+          <a:p>
+            <a:pPr marL="0" marR="0" lvl="0" indent="0" algn="l" defTabSz="914400" rtl="0" eaLnBrk="0" fontAlgn="base" latinLnBrk="0" hangingPunct="0">
+              <a:lnSpc>
+                <a:spcPct val="100000"/>
+              </a:lnSpc>
+              <a:spcBef>
+                <a:spcPct val="0"/>
+              </a:spcBef>
+              <a:spcAft>
+                <a:spcPct val="0"/>
+              </a:spcAft>
+              <a:buClrTx/>
+              <a:buSzTx/>
+              <a:buFontTx/>
+              <a:buChar char="•"/>
+              <a:tabLst/>
+            </a:pPr>
+            <a:endParaRPr kumimoji="0" lang="en-US" altLang="en-US" sz="1800" b="0" i="0" u="none" strike="noStrike" cap="none" normalizeH="0" baseline="0" dirty="0">
+              <a:ln>
+                <a:noFill/>
+              </a:ln>
+              <a:solidFill>
+                <a:schemeClr val="tx1"/>
+              </a:solidFill>
+              <a:effectLst/>
+              <a:latin typeface="Arial" panose="020B0604020202020204" pitchFamily="34" charset="0"/>
+            </a:endParaRPr>
+          </a:p>
+        </p:txBody>
+      </p:sp>
+      <p:sp>
+        <p:nvSpPr>
+          <p:cNvPr id="9" name="Google Shape;473;p28">
+            <a:extLst>
+              <a:ext uri="{FF2B5EF4-FFF2-40B4-BE49-F238E27FC236}">
+                <a16:creationId xmlns:a16="http://schemas.microsoft.com/office/drawing/2014/main" id="{1756E03D-DAFE-6045-6EB0-221478FBF39A}"/>
+              </a:ext>
+            </a:extLst>
+          </p:cNvPr>
+          <p:cNvSpPr txBox="1">
+            <a:spLocks/>
+          </p:cNvSpPr>
+          <p:nvPr/>
+        </p:nvSpPr>
+        <p:spPr>
+          <a:xfrm>
+            <a:off x="729503" y="4701324"/>
+            <a:ext cx="4865100" cy="357300"/>
+          </a:xfrm>
+          <a:prstGeom prst="rect">
+            <a:avLst/>
+          </a:prstGeom>
+          <a:noFill/>
+          <a:ln>
+            <a:noFill/>
+          </a:ln>
+        </p:spPr>
+        <p:txBody>
+          <a:bodyPr spcFirstLastPara="1" wrap="square" lIns="91425" tIns="91425" rIns="91425" bIns="91425" anchor="ctr" anchorCtr="0">
+            <a:noAutofit/>
+          </a:bodyPr>
+          <a:lstStyle>
+            <a:defPPr marR="0" lvl="0" algn="l" rtl="0">
+              <a:lnSpc>
+                <a:spcPct val="100000"/>
+              </a:lnSpc>
+              <a:spcBef>
+                <a:spcPts val="0"/>
+              </a:spcBef>
+              <a:spcAft>
+                <a:spcPts val="0"/>
+              </a:spcAft>
+            </a:defPPr>
+            <a:lvl1pPr marL="457200" marR="0" lvl="0" indent="-317500" algn="l" rtl="0">
+              <a:lnSpc>
+                <a:spcPct val="100000"/>
+              </a:lnSpc>
+              <a:spcBef>
+                <a:spcPts val="0"/>
+              </a:spcBef>
+              <a:spcAft>
+                <a:spcPts val="0"/>
+              </a:spcAft>
+              <a:buClr>
+                <a:schemeClr val="dk2"/>
+              </a:buClr>
+              <a:buSzPts val="1400"/>
+              <a:buFont typeface="Fira Code"/>
+              <a:buChar char="●"/>
+              <a:defRPr sz="1400" b="0" i="0" u="none" strike="noStrike" cap="none">
+                <a:solidFill>
+                  <a:schemeClr val="dk2"/>
+                </a:solidFill>
+                <a:latin typeface="Fira Code"/>
+                <a:ea typeface="Fira Code"/>
+                <a:cs typeface="Fira Code"/>
+                <a:sym typeface="Fira Code"/>
+              </a:defRPr>
+            </a:lvl1pPr>
+            <a:lvl2pPr marL="914400" marR="0" lvl="1" indent="-317500" algn="l" rtl="0">
+              <a:lnSpc>
+                <a:spcPct val="100000"/>
+              </a:lnSpc>
+              <a:spcBef>
+                <a:spcPts val="0"/>
+              </a:spcBef>
+              <a:spcAft>
+                <a:spcPts val="0"/>
+              </a:spcAft>
+              <a:buClr>
+                <a:schemeClr val="dk2"/>
+              </a:buClr>
+              <a:buSzPts val="1400"/>
+              <a:buFont typeface="Fira Code"/>
+              <a:buChar char="○"/>
+              <a:defRPr sz="1400" b="0" i="0" u="none" strike="noStrike" cap="none">
+                <a:solidFill>
+                  <a:schemeClr val="dk2"/>
+                </a:solidFill>
+                <a:latin typeface="Fira Code"/>
+                <a:ea typeface="Fira Code"/>
+                <a:cs typeface="Fira Code"/>
+                <a:sym typeface="Fira Code"/>
+              </a:defRPr>
+            </a:lvl2pPr>
+            <a:lvl3pPr marL="1371600" marR="0" lvl="2" indent="-317500" algn="l" rtl="0">
+              <a:lnSpc>
+                <a:spcPct val="100000"/>
+              </a:lnSpc>
+              <a:spcBef>
+                <a:spcPts val="0"/>
+              </a:spcBef>
+              <a:spcAft>
+                <a:spcPts val="0"/>
+              </a:spcAft>
+              <a:buClr>
+                <a:schemeClr val="dk2"/>
+              </a:buClr>
+              <a:buSzPts val="1400"/>
+              <a:buFont typeface="Fira Code"/>
+              <a:buChar char="■"/>
+              <a:defRPr sz="1400" b="0" i="0" u="none" strike="noStrike" cap="none">
+                <a:solidFill>
+                  <a:schemeClr val="dk2"/>
+                </a:solidFill>
+                <a:latin typeface="Fira Code"/>
+                <a:ea typeface="Fira Code"/>
+                <a:cs typeface="Fira Code"/>
+                <a:sym typeface="Fira Code"/>
+              </a:defRPr>
+            </a:lvl3pPr>
+            <a:lvl4pPr marL="1828800" marR="0" lvl="3" indent="-317500" algn="l" rtl="0">
+              <a:lnSpc>
+                <a:spcPct val="100000"/>
+              </a:lnSpc>
+              <a:spcBef>
+                <a:spcPts val="0"/>
+              </a:spcBef>
+              <a:spcAft>
+                <a:spcPts val="0"/>
+              </a:spcAft>
+              <a:buClr>
+                <a:schemeClr val="dk2"/>
+              </a:buClr>
+              <a:buSzPts val="1400"/>
+              <a:buFont typeface="Fira Code"/>
+              <a:buChar char="●"/>
+              <a:defRPr sz="1400" b="0" i="0" u="none" strike="noStrike" cap="none">
+                <a:solidFill>
+                  <a:schemeClr val="dk2"/>
+                </a:solidFill>
+                <a:latin typeface="Fira Code"/>
+                <a:ea typeface="Fira Code"/>
+                <a:cs typeface="Fira Code"/>
+                <a:sym typeface="Fira Code"/>
+              </a:defRPr>
+            </a:lvl4pPr>
+            <a:lvl5pPr marL="2286000" marR="0" lvl="4" indent="-317500" algn="l" rtl="0">
+              <a:lnSpc>
+                <a:spcPct val="100000"/>
+              </a:lnSpc>
+              <a:spcBef>
+                <a:spcPts val="0"/>
+              </a:spcBef>
+              <a:spcAft>
+                <a:spcPts val="0"/>
+              </a:spcAft>
+              <a:buClr>
+                <a:schemeClr val="dk2"/>
+              </a:buClr>
+              <a:buSzPts val="1400"/>
+              <a:buFont typeface="Fira Code"/>
+              <a:buChar char="○"/>
+              <a:defRPr sz="1400" b="0" i="0" u="none" strike="noStrike" cap="none">
+                <a:solidFill>
+                  <a:schemeClr val="dk2"/>
+                </a:solidFill>
+                <a:latin typeface="Fira Code"/>
+                <a:ea typeface="Fira Code"/>
+                <a:cs typeface="Fira Code"/>
+                <a:sym typeface="Fira Code"/>
+              </a:defRPr>
+            </a:lvl5pPr>
+            <a:lvl6pPr marL="2743200" marR="0" lvl="5" indent="-317500" algn="l" rtl="0">
+              <a:lnSpc>
+                <a:spcPct val="100000"/>
+              </a:lnSpc>
+              <a:spcBef>
+                <a:spcPts val="0"/>
+              </a:spcBef>
+              <a:spcAft>
+                <a:spcPts val="0"/>
+              </a:spcAft>
+              <a:buClr>
+                <a:schemeClr val="dk2"/>
+              </a:buClr>
+              <a:buSzPts val="1400"/>
+              <a:buFont typeface="Fira Code"/>
+              <a:buChar char="■"/>
+              <a:defRPr sz="1400" b="0" i="0" u="none" strike="noStrike" cap="none">
+                <a:solidFill>
+                  <a:schemeClr val="dk2"/>
+                </a:solidFill>
+                <a:latin typeface="Fira Code"/>
+                <a:ea typeface="Fira Code"/>
+                <a:cs typeface="Fira Code"/>
+                <a:sym typeface="Fira Code"/>
+              </a:defRPr>
+            </a:lvl6pPr>
+            <a:lvl7pPr marL="3200400" marR="0" lvl="6" indent="-317500" algn="l" rtl="0">
+              <a:lnSpc>
+                <a:spcPct val="100000"/>
+              </a:lnSpc>
+              <a:spcBef>
+                <a:spcPts val="0"/>
+              </a:spcBef>
+              <a:spcAft>
+                <a:spcPts val="0"/>
+              </a:spcAft>
+              <a:buClr>
+                <a:schemeClr val="dk2"/>
+              </a:buClr>
+              <a:buSzPts val="1400"/>
+              <a:buFont typeface="Fira Code"/>
+              <a:buChar char="●"/>
+              <a:defRPr sz="1400" b="0" i="0" u="none" strike="noStrike" cap="none">
+                <a:solidFill>
+                  <a:schemeClr val="dk2"/>
+                </a:solidFill>
+                <a:latin typeface="Fira Code"/>
+                <a:ea typeface="Fira Code"/>
+                <a:cs typeface="Fira Code"/>
+                <a:sym typeface="Fira Code"/>
+              </a:defRPr>
+            </a:lvl7pPr>
+            <a:lvl8pPr marL="3657600" marR="0" lvl="7" indent="-317500" algn="l" rtl="0">
+              <a:lnSpc>
+                <a:spcPct val="100000"/>
+              </a:lnSpc>
+              <a:spcBef>
+                <a:spcPts val="0"/>
+              </a:spcBef>
+              <a:spcAft>
+                <a:spcPts val="0"/>
+              </a:spcAft>
+              <a:buClr>
+                <a:schemeClr val="dk2"/>
+              </a:buClr>
+              <a:buSzPts val="1400"/>
+              <a:buFont typeface="Fira Code"/>
+              <a:buChar char="○"/>
+              <a:defRPr sz="1400" b="0" i="0" u="none" strike="noStrike" cap="none">
+                <a:solidFill>
+                  <a:schemeClr val="dk2"/>
+                </a:solidFill>
+                <a:latin typeface="Fira Code"/>
+                <a:ea typeface="Fira Code"/>
+                <a:cs typeface="Fira Code"/>
+                <a:sym typeface="Fira Code"/>
+              </a:defRPr>
+            </a:lvl8pPr>
+            <a:lvl9pPr marL="4114800" marR="0" lvl="8" indent="-317500" algn="l" rtl="0">
+              <a:lnSpc>
+                <a:spcPct val="100000"/>
+              </a:lnSpc>
+              <a:spcBef>
+                <a:spcPts val="0"/>
+              </a:spcBef>
+              <a:spcAft>
+                <a:spcPts val="0"/>
+              </a:spcAft>
+              <a:buClr>
+                <a:schemeClr val="dk2"/>
+              </a:buClr>
+              <a:buSzPts val="1400"/>
+              <a:buFont typeface="Fira Code"/>
+              <a:buChar char="■"/>
+              <a:defRPr sz="1400" b="0" i="0" u="none" strike="noStrike" cap="none">
+                <a:solidFill>
+                  <a:schemeClr val="dk2"/>
+                </a:solidFill>
+                <a:latin typeface="Fira Code"/>
+                <a:ea typeface="Fira Code"/>
+                <a:cs typeface="Fira Code"/>
+                <a:sym typeface="Fira Code"/>
+              </a:defRPr>
+            </a:lvl9pPr>
+          </a:lstStyle>
+          <a:p>
+            <a:pPr marL="0" indent="0">
+              <a:buFont typeface="Fira Code"/>
+              <a:buNone/>
+            </a:pPr>
+            <a:r>
+              <a:rPr lang="en-US" dirty="0">
+                <a:solidFill>
+                  <a:schemeClr val="accent3"/>
+                </a:solidFill>
+              </a:rPr>
+              <a:t>Programming Language Lab</a:t>
+            </a:r>
+          </a:p>
+        </p:txBody>
+      </p:sp>
+      <p:sp>
+        <p:nvSpPr>
+          <p:cNvPr id="10" name="Google Shape;473;p28">
+            <a:extLst>
+              <a:ext uri="{FF2B5EF4-FFF2-40B4-BE49-F238E27FC236}">
+                <a16:creationId xmlns:a16="http://schemas.microsoft.com/office/drawing/2014/main" id="{3DEE0FDA-36AB-25BC-258F-05C605D2865C}"/>
+              </a:ext>
+            </a:extLst>
+          </p:cNvPr>
+          <p:cNvSpPr txBox="1">
+            <a:spLocks/>
+          </p:cNvSpPr>
+          <p:nvPr/>
+        </p:nvSpPr>
+        <p:spPr>
+          <a:xfrm>
+            <a:off x="8433851" y="4694675"/>
+            <a:ext cx="438300" cy="357300"/>
+          </a:xfrm>
+          <a:prstGeom prst="rect">
+            <a:avLst/>
+          </a:prstGeom>
+          <a:noFill/>
+          <a:ln>
+            <a:noFill/>
+          </a:ln>
+        </p:spPr>
+        <p:txBody>
+          <a:bodyPr spcFirstLastPara="1" wrap="square" lIns="91425" tIns="91425" rIns="91425" bIns="91425" anchor="ctr" anchorCtr="0">
+            <a:noAutofit/>
+          </a:bodyPr>
+          <a:lstStyle>
+            <a:defPPr marR="0" lvl="0" algn="l" rtl="0">
+              <a:lnSpc>
+                <a:spcPct val="100000"/>
+              </a:lnSpc>
+              <a:spcBef>
+                <a:spcPts val="0"/>
+              </a:spcBef>
+              <a:spcAft>
+                <a:spcPts val="0"/>
+              </a:spcAft>
+            </a:defPPr>
+            <a:lvl1pPr marL="457200" marR="0" lvl="0" indent="-317500" algn="l" rtl="0">
+              <a:lnSpc>
+                <a:spcPct val="100000"/>
+              </a:lnSpc>
+              <a:spcBef>
+                <a:spcPts val="0"/>
+              </a:spcBef>
+              <a:spcAft>
+                <a:spcPts val="0"/>
+              </a:spcAft>
+              <a:buClr>
+                <a:schemeClr val="dk2"/>
+              </a:buClr>
+              <a:buSzPts val="1400"/>
+              <a:buFont typeface="Fira Code"/>
+              <a:buChar char="●"/>
+              <a:defRPr sz="1400" b="0" i="0" u="none" strike="noStrike" cap="none">
+                <a:solidFill>
+                  <a:schemeClr val="dk2"/>
+                </a:solidFill>
+                <a:latin typeface="Fira Code"/>
+                <a:ea typeface="Fira Code"/>
+                <a:cs typeface="Fira Code"/>
+                <a:sym typeface="Fira Code"/>
+              </a:defRPr>
+            </a:lvl1pPr>
+            <a:lvl2pPr marL="914400" marR="0" lvl="1" indent="-317500" algn="l" rtl="0">
+              <a:lnSpc>
+                <a:spcPct val="100000"/>
+              </a:lnSpc>
+              <a:spcBef>
+                <a:spcPts val="0"/>
+              </a:spcBef>
+              <a:spcAft>
+                <a:spcPts val="0"/>
+              </a:spcAft>
+              <a:buClr>
+                <a:schemeClr val="dk2"/>
+              </a:buClr>
+              <a:buSzPts val="1400"/>
+              <a:buFont typeface="Fira Code"/>
+              <a:buChar char="○"/>
+              <a:defRPr sz="1400" b="0" i="0" u="none" strike="noStrike" cap="none">
+                <a:solidFill>
+                  <a:schemeClr val="dk2"/>
+                </a:solidFill>
+                <a:latin typeface="Fira Code"/>
+                <a:ea typeface="Fira Code"/>
+                <a:cs typeface="Fira Code"/>
+                <a:sym typeface="Fira Code"/>
+              </a:defRPr>
+            </a:lvl2pPr>
+            <a:lvl3pPr marL="1371600" marR="0" lvl="2" indent="-317500" algn="l" rtl="0">
+              <a:lnSpc>
+                <a:spcPct val="100000"/>
+              </a:lnSpc>
+              <a:spcBef>
+                <a:spcPts val="0"/>
+              </a:spcBef>
+              <a:spcAft>
+                <a:spcPts val="0"/>
+              </a:spcAft>
+              <a:buClr>
+                <a:schemeClr val="dk2"/>
+              </a:buClr>
+              <a:buSzPts val="1400"/>
+              <a:buFont typeface="Fira Code"/>
+              <a:buChar char="■"/>
+              <a:defRPr sz="1400" b="0" i="0" u="none" strike="noStrike" cap="none">
+                <a:solidFill>
+                  <a:schemeClr val="dk2"/>
+                </a:solidFill>
+                <a:latin typeface="Fira Code"/>
+                <a:ea typeface="Fira Code"/>
+                <a:cs typeface="Fira Code"/>
+                <a:sym typeface="Fira Code"/>
+              </a:defRPr>
+            </a:lvl3pPr>
+            <a:lvl4pPr marL="1828800" marR="0" lvl="3" indent="-317500" algn="l" rtl="0">
+              <a:lnSpc>
+                <a:spcPct val="100000"/>
+              </a:lnSpc>
+              <a:spcBef>
+                <a:spcPts val="0"/>
+              </a:spcBef>
+              <a:spcAft>
+                <a:spcPts val="0"/>
+              </a:spcAft>
+              <a:buClr>
+                <a:schemeClr val="dk2"/>
+              </a:buClr>
+              <a:buSzPts val="1400"/>
+              <a:buFont typeface="Fira Code"/>
+              <a:buChar char="●"/>
+              <a:defRPr sz="1400" b="0" i="0" u="none" strike="noStrike" cap="none">
+                <a:solidFill>
+                  <a:schemeClr val="dk2"/>
+                </a:solidFill>
+                <a:latin typeface="Fira Code"/>
+                <a:ea typeface="Fira Code"/>
+                <a:cs typeface="Fira Code"/>
+                <a:sym typeface="Fira Code"/>
+              </a:defRPr>
+            </a:lvl4pPr>
+            <a:lvl5pPr marL="2286000" marR="0" lvl="4" indent="-317500" algn="l" rtl="0">
+              <a:lnSpc>
+                <a:spcPct val="100000"/>
+              </a:lnSpc>
+              <a:spcBef>
+                <a:spcPts val="0"/>
+              </a:spcBef>
+              <a:spcAft>
+                <a:spcPts val="0"/>
+              </a:spcAft>
+              <a:buClr>
+                <a:schemeClr val="dk2"/>
+              </a:buClr>
+              <a:buSzPts val="1400"/>
+              <a:buFont typeface="Fira Code"/>
+              <a:buChar char="○"/>
+              <a:defRPr sz="1400" b="0" i="0" u="none" strike="noStrike" cap="none">
+                <a:solidFill>
+                  <a:schemeClr val="dk2"/>
+                </a:solidFill>
+                <a:latin typeface="Fira Code"/>
+                <a:ea typeface="Fira Code"/>
+                <a:cs typeface="Fira Code"/>
+                <a:sym typeface="Fira Code"/>
+              </a:defRPr>
+            </a:lvl5pPr>
+            <a:lvl6pPr marL="2743200" marR="0" lvl="5" indent="-317500" algn="l" rtl="0">
+              <a:lnSpc>
+                <a:spcPct val="100000"/>
+              </a:lnSpc>
+              <a:spcBef>
+                <a:spcPts val="0"/>
+              </a:spcBef>
+              <a:spcAft>
+                <a:spcPts val="0"/>
+              </a:spcAft>
+              <a:buClr>
+                <a:schemeClr val="dk2"/>
+              </a:buClr>
+              <a:buSzPts val="1400"/>
+              <a:buFont typeface="Fira Code"/>
+              <a:buChar char="■"/>
+              <a:defRPr sz="1400" b="0" i="0" u="none" strike="noStrike" cap="none">
+                <a:solidFill>
+                  <a:schemeClr val="dk2"/>
+                </a:solidFill>
+                <a:latin typeface="Fira Code"/>
+                <a:ea typeface="Fira Code"/>
+                <a:cs typeface="Fira Code"/>
+                <a:sym typeface="Fira Code"/>
+              </a:defRPr>
+            </a:lvl6pPr>
+            <a:lvl7pPr marL="3200400" marR="0" lvl="6" indent="-317500" algn="l" rtl="0">
+              <a:lnSpc>
+                <a:spcPct val="100000"/>
+              </a:lnSpc>
+              <a:spcBef>
+                <a:spcPts val="0"/>
+              </a:spcBef>
+              <a:spcAft>
+                <a:spcPts val="0"/>
+              </a:spcAft>
+              <a:buClr>
+                <a:schemeClr val="dk2"/>
+              </a:buClr>
+              <a:buSzPts val="1400"/>
+              <a:buFont typeface="Fira Code"/>
+              <a:buChar char="●"/>
+              <a:defRPr sz="1400" b="0" i="0" u="none" strike="noStrike" cap="none">
+                <a:solidFill>
+                  <a:schemeClr val="dk2"/>
+                </a:solidFill>
+                <a:latin typeface="Fira Code"/>
+                <a:ea typeface="Fira Code"/>
+                <a:cs typeface="Fira Code"/>
+                <a:sym typeface="Fira Code"/>
+              </a:defRPr>
+            </a:lvl7pPr>
+            <a:lvl8pPr marL="3657600" marR="0" lvl="7" indent="-317500" algn="l" rtl="0">
+              <a:lnSpc>
+                <a:spcPct val="100000"/>
+              </a:lnSpc>
+              <a:spcBef>
+                <a:spcPts val="0"/>
+              </a:spcBef>
+              <a:spcAft>
+                <a:spcPts val="0"/>
+              </a:spcAft>
+              <a:buClr>
+                <a:schemeClr val="dk2"/>
+              </a:buClr>
+              <a:buSzPts val="1400"/>
+              <a:buFont typeface="Fira Code"/>
+              <a:buChar char="○"/>
+              <a:defRPr sz="1400" b="0" i="0" u="none" strike="noStrike" cap="none">
+                <a:solidFill>
+                  <a:schemeClr val="dk2"/>
+                </a:solidFill>
+                <a:latin typeface="Fira Code"/>
+                <a:ea typeface="Fira Code"/>
+                <a:cs typeface="Fira Code"/>
+                <a:sym typeface="Fira Code"/>
+              </a:defRPr>
+            </a:lvl8pPr>
+            <a:lvl9pPr marL="4114800" marR="0" lvl="8" indent="-317500" algn="l" rtl="0">
+              <a:lnSpc>
+                <a:spcPct val="100000"/>
+              </a:lnSpc>
+              <a:spcBef>
+                <a:spcPts val="0"/>
+              </a:spcBef>
+              <a:spcAft>
+                <a:spcPts val="0"/>
+              </a:spcAft>
+              <a:buClr>
+                <a:schemeClr val="dk2"/>
+              </a:buClr>
+              <a:buSzPts val="1400"/>
+              <a:buFont typeface="Fira Code"/>
+              <a:buChar char="■"/>
+              <a:defRPr sz="1400" b="0" i="0" u="none" strike="noStrike" cap="none">
+                <a:solidFill>
+                  <a:schemeClr val="dk2"/>
+                </a:solidFill>
+                <a:latin typeface="Fira Code"/>
+                <a:ea typeface="Fira Code"/>
+                <a:cs typeface="Fira Code"/>
+                <a:sym typeface="Fira Code"/>
+              </a:defRPr>
+            </a:lvl9pPr>
+          </a:lstStyle>
+          <a:p>
+            <a:pPr marL="0" indent="0">
+              <a:buFont typeface="Fira Code"/>
+              <a:buNone/>
+            </a:pPr>
+            <a:r>
+              <a:rPr lang="en" sz="1100" dirty="0">
+                <a:solidFill>
+                  <a:schemeClr val="accent3"/>
+                </a:solidFill>
+              </a:rPr>
+              <a:t>13</a:t>
+            </a:r>
+            <a:endParaRPr lang="en" dirty="0">
+              <a:solidFill>
+                <a:schemeClr val="accent3"/>
+              </a:solidFill>
+            </a:endParaRPr>
+          </a:p>
+        </p:txBody>
+      </p:sp>
+    </p:spTree>
+    <p:extLst>
+      <p:ext uri="{BB962C8B-B14F-4D97-AF65-F5344CB8AC3E}">
+        <p14:creationId xmlns:p14="http://schemas.microsoft.com/office/powerpoint/2010/main" val="2455169154"/>
+      </p:ext>
+    </p:extLst>
+  </p:cSld>
+  <p:clrMapOvr>
+    <a:masterClrMapping/>
+  </p:clrMapOvr>
+</p:sld>
+</file>
+
+<file path=ppt/slides/slide15.xml><?xml version="1.0" encoding="utf-8"?>
 <p:sld xmlns:a="http://schemas.openxmlformats.org/drawingml/2006/main" xmlns:r="http://schemas.openxmlformats.org/officeDocument/2006/relationships" xmlns:p="http://schemas.openxmlformats.org/presentationml/2006/main">
   <p:cSld>
     <p:spTree>
@@ -10828,7 +13569,7 @@
                   <a:schemeClr val="accent2"/>
                 </a:solidFill>
               </a:rPr>
-              <a:t>Home Work</a:t>
+              <a:t>Homework</a:t>
             </a:r>
           </a:p>
         </p:txBody>
@@ -11923,12 +14664,12 @@
               <a:t>1</a:t>
             </a:r>
             <a:r>
-              <a:rPr lang="fa-IR" sz="1100" dirty="0">
+              <a:rPr lang="en-US" sz="1100" dirty="0">
                 <a:solidFill>
                   <a:schemeClr val="accent3"/>
                 </a:solidFill>
               </a:rPr>
-              <a:t>2</a:t>
+              <a:t>4</a:t>
             </a:r>
             <a:endParaRPr lang="en" dirty="0">
               <a:solidFill>
@@ -11951,7 +14692,7 @@
 </p:sld>
 </file>
 
-<file path=ppt/slides/slide14.xml><?xml version="1.0" encoding="utf-8"?>
+<file path=ppt/slides/slide16.xml><?xml version="1.0" encoding="utf-8"?>
 <p:sld xmlns:a="http://schemas.openxmlformats.org/drawingml/2006/main" xmlns:r="http://schemas.openxmlformats.org/officeDocument/2006/relationships" xmlns:p="http://schemas.openxmlformats.org/presentationml/2006/main">
   <p:cSld>
     <p:spTree>
@@ -12351,13 +15092,18 @@
           </a:lstStyle>
           <a:p>
             <a:r>
-              <a:rPr lang="en-US" sz="2400" dirty="0">
+              <a:rPr lang="en-US" sz="2400">
                 <a:solidFill>
                   <a:schemeClr val="accent2"/>
                 </a:solidFill>
               </a:rPr>
-              <a:t>Home Work</a:t>
+              <a:t>Homework</a:t>
             </a:r>
+            <a:endParaRPr lang="en-US" sz="2400" dirty="0">
+              <a:solidFill>
+                <a:schemeClr val="accent2"/>
+              </a:solidFill>
+            </a:endParaRPr>
           </a:p>
         </p:txBody>
       </p:sp>
@@ -13289,12 +16035,12 @@
               <a:t>1</a:t>
             </a:r>
             <a:r>
-              <a:rPr lang="fa-IR" sz="1100" dirty="0">
+              <a:rPr lang="en-US" sz="1100" dirty="0">
                 <a:solidFill>
                   <a:schemeClr val="accent3"/>
                 </a:solidFill>
               </a:rPr>
-              <a:t>3</a:t>
+              <a:t>5</a:t>
             </a:r>
             <a:endParaRPr lang="en" dirty="0">
               <a:solidFill>
@@ -19346,7 +22092,7 @@
         </p:nvSpPr>
         <p:spPr bwMode="auto">
           <a:xfrm>
-            <a:off x="945019" y="1128755"/>
+            <a:off x="994446" y="1122576"/>
             <a:ext cx="8075413" cy="2708434"/>
           </a:xfrm>
           <a:prstGeom prst="rect">
@@ -21431,162 +24177,23 @@
         </p:nvSpPr>
         <p:spPr>
           <a:xfrm>
-            <a:off x="2697621" y="1474456"/>
-            <a:ext cx="434503" cy="385067"/>
+            <a:off x="2697620" y="1569315"/>
+            <a:ext cx="434503" cy="263448"/>
           </a:xfrm>
           <a:prstGeom prst="rightArrow">
             <a:avLst/>
           </a:prstGeom>
+          <a:ln/>
         </p:spPr>
         <p:style>
-          <a:lnRef idx="2">
-            <a:schemeClr val="dk1">
-              <a:shade val="15000"/>
-            </a:schemeClr>
+          <a:lnRef idx="1">
+            <a:schemeClr val="accent3"/>
           </a:lnRef>
-          <a:fillRef idx="1">
-            <a:schemeClr val="dk1"/>
+          <a:fillRef idx="3">
+            <a:schemeClr val="accent3"/>
           </a:fillRef>
-          <a:effectRef idx="0">
-            <a:schemeClr val="dk1"/>
-          </a:effectRef>
-          <a:fontRef idx="minor">
-            <a:schemeClr val="lt1"/>
-          </a:fontRef>
-        </p:style>
-        <p:txBody>
-          <a:bodyPr rtlCol="0" anchor="ctr"/>
-          <a:lstStyle/>
-          <a:p>
-            <a:pPr algn="ctr"/>
-            <a:endParaRPr lang="en-US"/>
-          </a:p>
-        </p:txBody>
-      </p:sp>
-      <p:sp>
-        <p:nvSpPr>
-          <p:cNvPr id="8" name="Arrow: Right 7">
-            <a:extLst>
-              <a:ext uri="{FF2B5EF4-FFF2-40B4-BE49-F238E27FC236}">
-                <a16:creationId xmlns:a16="http://schemas.microsoft.com/office/drawing/2014/main" id="{9FCE8C2D-7B15-8F1A-3DB5-03A248B63318}"/>
-              </a:ext>
-            </a:extLst>
-          </p:cNvPr>
-          <p:cNvSpPr/>
-          <p:nvPr/>
-        </p:nvSpPr>
-        <p:spPr>
-          <a:xfrm>
-            <a:off x="2697621" y="2101331"/>
-            <a:ext cx="434503" cy="385067"/>
-          </a:xfrm>
-          <a:prstGeom prst="rightArrow">
-            <a:avLst/>
-          </a:prstGeom>
-        </p:spPr>
-        <p:style>
-          <a:lnRef idx="2">
-            <a:schemeClr val="dk1">
-              <a:shade val="15000"/>
-            </a:schemeClr>
-          </a:lnRef>
-          <a:fillRef idx="1">
-            <a:schemeClr val="dk1"/>
-          </a:fillRef>
-          <a:effectRef idx="0">
-            <a:schemeClr val="dk1"/>
-          </a:effectRef>
-          <a:fontRef idx="minor">
-            <a:schemeClr val="lt1"/>
-          </a:fontRef>
-        </p:style>
-        <p:txBody>
-          <a:bodyPr rtlCol="0" anchor="ctr"/>
-          <a:lstStyle/>
-          <a:p>
-            <a:pPr algn="ctr"/>
-            <a:endParaRPr lang="en-US"/>
-          </a:p>
-        </p:txBody>
-      </p:sp>
-      <p:sp>
-        <p:nvSpPr>
-          <p:cNvPr id="9" name="Arrow: Right 8">
-            <a:extLst>
-              <a:ext uri="{FF2B5EF4-FFF2-40B4-BE49-F238E27FC236}">
-                <a16:creationId xmlns:a16="http://schemas.microsoft.com/office/drawing/2014/main" id="{71C03A65-795A-9165-DDC4-0887A7CC51F5}"/>
-              </a:ext>
-            </a:extLst>
-          </p:cNvPr>
-          <p:cNvSpPr/>
-          <p:nvPr/>
-        </p:nvSpPr>
-        <p:spPr>
-          <a:xfrm>
-            <a:off x="2697621" y="2728969"/>
-            <a:ext cx="434503" cy="385067"/>
-          </a:xfrm>
-          <a:prstGeom prst="rightArrow">
-            <a:avLst/>
-          </a:prstGeom>
-        </p:spPr>
-        <p:style>
-          <a:lnRef idx="2">
-            <a:schemeClr val="dk1">
-              <a:shade val="15000"/>
-            </a:schemeClr>
-          </a:lnRef>
-          <a:fillRef idx="1">
-            <a:schemeClr val="dk1"/>
-          </a:fillRef>
-          <a:effectRef idx="0">
-            <a:schemeClr val="dk1"/>
-          </a:effectRef>
-          <a:fontRef idx="minor">
-            <a:schemeClr val="lt1"/>
-          </a:fontRef>
-        </p:style>
-        <p:txBody>
-          <a:bodyPr rtlCol="0" anchor="ctr"/>
-          <a:lstStyle/>
-          <a:p>
-            <a:pPr algn="ctr"/>
-            <a:endParaRPr lang="en-US"/>
-          </a:p>
-        </p:txBody>
-      </p:sp>
-      <p:sp>
-        <p:nvSpPr>
-          <p:cNvPr id="10" name="Arrow: Right 9">
-            <a:extLst>
-              <a:ext uri="{FF2B5EF4-FFF2-40B4-BE49-F238E27FC236}">
-                <a16:creationId xmlns:a16="http://schemas.microsoft.com/office/drawing/2014/main" id="{0F0B4B31-CB24-AA7E-1FE0-3418CB0E92EA}"/>
-              </a:ext>
-            </a:extLst>
-          </p:cNvPr>
-          <p:cNvSpPr/>
-          <p:nvPr/>
-        </p:nvSpPr>
-        <p:spPr>
-          <a:xfrm>
-            <a:off x="2697621" y="3354394"/>
-            <a:ext cx="434503" cy="385067"/>
-          </a:xfrm>
-          <a:prstGeom prst="rightArrow">
-            <a:avLst/>
-          </a:prstGeom>
-        </p:spPr>
-        <p:style>
-          <a:lnRef idx="2">
-            <a:schemeClr val="dk1">
-              <a:shade val="15000"/>
-            </a:schemeClr>
-          </a:lnRef>
-          <a:fillRef idx="1">
-            <a:schemeClr val="dk1"/>
-          </a:fillRef>
-          <a:effectRef idx="0">
-            <a:schemeClr val="dk1"/>
+          <a:effectRef idx="2">
+            <a:schemeClr val="accent3"/>
           </a:effectRef>
           <a:fontRef idx="minor">
             <a:schemeClr val="lt1"/>
@@ -22191,6 +24798,141 @@
                 <a:schemeClr val="accent3"/>
               </a:solidFill>
             </a:endParaRPr>
+          </a:p>
+        </p:txBody>
+      </p:sp>
+      <p:sp>
+        <p:nvSpPr>
+          <p:cNvPr id="2" name="Arrow: Right 1">
+            <a:extLst>
+              <a:ext uri="{FF2B5EF4-FFF2-40B4-BE49-F238E27FC236}">
+                <a16:creationId xmlns:a16="http://schemas.microsoft.com/office/drawing/2014/main" id="{274D1663-F028-9642-42F6-8C799382D861}"/>
+              </a:ext>
+            </a:extLst>
+          </p:cNvPr>
+          <p:cNvSpPr/>
+          <p:nvPr/>
+        </p:nvSpPr>
+        <p:spPr>
+          <a:xfrm>
+            <a:off x="2727550" y="2155902"/>
+            <a:ext cx="434503" cy="263448"/>
+          </a:xfrm>
+          <a:prstGeom prst="rightArrow">
+            <a:avLst/>
+          </a:prstGeom>
+          <a:ln/>
+        </p:spPr>
+        <p:style>
+          <a:lnRef idx="1">
+            <a:schemeClr val="accent3"/>
+          </a:lnRef>
+          <a:fillRef idx="3">
+            <a:schemeClr val="accent3"/>
+          </a:fillRef>
+          <a:effectRef idx="2">
+            <a:schemeClr val="accent3"/>
+          </a:effectRef>
+          <a:fontRef idx="minor">
+            <a:schemeClr val="lt1"/>
+          </a:fontRef>
+        </p:style>
+        <p:txBody>
+          <a:bodyPr rtlCol="0" anchor="ctr"/>
+          <a:lstStyle/>
+          <a:p>
+            <a:pPr algn="ctr"/>
+            <a:endParaRPr lang="en-US"/>
+          </a:p>
+        </p:txBody>
+      </p:sp>
+      <p:sp>
+        <p:nvSpPr>
+          <p:cNvPr id="6" name="Arrow: Right 5">
+            <a:extLst>
+              <a:ext uri="{FF2B5EF4-FFF2-40B4-BE49-F238E27FC236}">
+                <a16:creationId xmlns:a16="http://schemas.microsoft.com/office/drawing/2014/main" id="{95A108FA-3726-B3E8-FE2D-7A6735222F31}"/>
+              </a:ext>
+            </a:extLst>
+          </p:cNvPr>
+          <p:cNvSpPr/>
+          <p:nvPr/>
+        </p:nvSpPr>
+        <p:spPr>
+          <a:xfrm>
+            <a:off x="2697620" y="2819318"/>
+            <a:ext cx="434503" cy="263448"/>
+          </a:xfrm>
+          <a:prstGeom prst="rightArrow">
+            <a:avLst/>
+          </a:prstGeom>
+          <a:ln/>
+        </p:spPr>
+        <p:style>
+          <a:lnRef idx="1">
+            <a:schemeClr val="accent3"/>
+          </a:lnRef>
+          <a:fillRef idx="3">
+            <a:schemeClr val="accent3"/>
+          </a:fillRef>
+          <a:effectRef idx="2">
+            <a:schemeClr val="accent3"/>
+          </a:effectRef>
+          <a:fontRef idx="minor">
+            <a:schemeClr val="lt1"/>
+          </a:fontRef>
+        </p:style>
+        <p:txBody>
+          <a:bodyPr rtlCol="0" anchor="ctr"/>
+          <a:lstStyle/>
+          <a:p>
+            <a:pPr algn="ctr"/>
+            <a:endParaRPr lang="en-US"/>
+          </a:p>
+        </p:txBody>
+      </p:sp>
+      <p:sp>
+        <p:nvSpPr>
+          <p:cNvPr id="7" name="Arrow: Right 6">
+            <a:extLst>
+              <a:ext uri="{FF2B5EF4-FFF2-40B4-BE49-F238E27FC236}">
+                <a16:creationId xmlns:a16="http://schemas.microsoft.com/office/drawing/2014/main" id="{366E38BF-8EDB-F2F1-5120-D559F4DF50F5}"/>
+              </a:ext>
+            </a:extLst>
+          </p:cNvPr>
+          <p:cNvSpPr/>
+          <p:nvPr/>
+        </p:nvSpPr>
+        <p:spPr>
+          <a:xfrm>
+            <a:off x="2727549" y="3482734"/>
+            <a:ext cx="434503" cy="263448"/>
+          </a:xfrm>
+          <a:prstGeom prst="rightArrow">
+            <a:avLst/>
+          </a:prstGeom>
+          <a:ln/>
+        </p:spPr>
+        <p:style>
+          <a:lnRef idx="1">
+            <a:schemeClr val="accent3"/>
+          </a:lnRef>
+          <a:fillRef idx="3">
+            <a:schemeClr val="accent3"/>
+          </a:fillRef>
+          <a:effectRef idx="2">
+            <a:schemeClr val="accent3"/>
+          </a:effectRef>
+          <a:fontRef idx="minor">
+            <a:schemeClr val="lt1"/>
+          </a:fontRef>
+        </p:style>
+        <p:txBody>
+          <a:bodyPr rtlCol="0" anchor="ctr"/>
+          <a:lstStyle/>
+          <a:p>
+            <a:pPr algn="ctr"/>
+            <a:endParaRPr lang="en-US"/>
           </a:p>
         </p:txBody>
       </p:sp>

--- a/slides/3.Math/Math.pptx
+++ b/slides/3.Math/Math.pptx
@@ -10828,7 +10828,7 @@
                   <a:schemeClr val="accent2"/>
                 </a:solidFill>
               </a:rPr>
-              <a:t>Home Work</a:t>
+              <a:t>Homework</a:t>
             </a:r>
           </a:p>
         </p:txBody>
@@ -12356,7 +12356,7 @@
                   <a:schemeClr val="accent2"/>
                 </a:solidFill>
               </a:rPr>
-              <a:t>Home Work</a:t>
+              <a:t>Homework</a:t>
             </a:r>
           </a:p>
         </p:txBody>
